--- a/Prez/IETF125/IETF 125-draft-ietf-nmop-rfc3535-20years-later.pptx
+++ b/Prez/IETF125/IETF 125-draft-ietf-nmop-rfc3535-20years-later.pptx
@@ -7,9 +7,11 @@
   <p:sldIdLst>
     <p:sldId id="259" r:id="rId2"/>
     <p:sldId id="261" r:id="rId3"/>
-    <p:sldId id="265" r:id="rId4"/>
-    <p:sldId id="266" r:id="rId5"/>
-    <p:sldId id="267" r:id="rId6"/>
+    <p:sldId id="268" r:id="rId4"/>
+    <p:sldId id="270" r:id="rId5"/>
+    <p:sldId id="265" r:id="rId6"/>
+    <p:sldId id="266" r:id="rId7"/>
+    <p:sldId id="267" r:id="rId8"/>
   </p:sldIdLst>
   <p:sldSz cx="12192000" cy="6858000"/>
   <p:notesSz cx="6858000" cy="9144000"/>
@@ -119,7 +121,7 @@
 <file path=ppt/revisionInfo.xml><?xml version="1.0" encoding="utf-8"?>
 <p1510:revInfo xmlns:a="http://schemas.openxmlformats.org/drawingml/2006/main" xmlns:r="http://schemas.openxmlformats.org/officeDocument/2006/relationships" xmlns:p1510="http://schemas.microsoft.com/office/powerpoint/2015/10/main">
   <p1510:revLst>
-    <p1510:client id="{7CF4F01F-CCAB-4265-9AD7-102F9D57BA48}" v="46" dt="2026-03-12T15:59:46.704"/>
+    <p1510:client id="{7CF4F01F-CCAB-4265-9AD7-102F9D57BA48}" v="67" dt="2026-03-13T07:52:53.909"/>
   </p1510:revLst>
 </p1510:revInfo>
 </file>
@@ -129,16 +131,24 @@
   <pc:docChgLst>
     <pc:chgData name="BOUCADAIR Mohamed INNOV/NET" userId="2acbca90-6db1-4111-98c4-832797dda751" providerId="ADAL" clId="{A64BD271-A47C-4266-84F7-4325E25623CE}"/>
     <pc:docChg chg="undo custSel mod addSld delSld modSld sldOrd modMainMaster">
-      <pc:chgData name="BOUCADAIR Mohamed INNOV/NET" userId="2acbca90-6db1-4111-98c4-832797dda751" providerId="ADAL" clId="{A64BD271-A47C-4266-84F7-4325E25623CE}" dt="2026-03-12T15:58:37.769" v="2355" actId="790"/>
+      <pc:chgData name="BOUCADAIR Mohamed INNOV/NET" userId="2acbca90-6db1-4111-98c4-832797dda751" providerId="ADAL" clId="{A64BD271-A47C-4266-84F7-4325E25623CE}" dt="2026-03-13T07:52:53.909" v="3535"/>
       <pc:docMkLst>
         <pc:docMk/>
       </pc:docMkLst>
-      <pc:sldChg chg="modSp mod">
-        <pc:chgData name="BOUCADAIR Mohamed INNOV/NET" userId="2acbca90-6db1-4111-98c4-832797dda751" providerId="ADAL" clId="{A64BD271-A47C-4266-84F7-4325E25623CE}" dt="2026-03-09T12:36:51.719" v="19" actId="20577"/>
+      <pc:sldChg chg="delSp modSp mod">
+        <pc:chgData name="BOUCADAIR Mohamed INNOV/NET" userId="2acbca90-6db1-4111-98c4-832797dda751" providerId="ADAL" clId="{A64BD271-A47C-4266-84F7-4325E25623CE}" dt="2026-03-13T07:38:35.196" v="2649" actId="478"/>
         <pc:sldMkLst>
           <pc:docMk/>
           <pc:sldMk cId="0" sldId="259"/>
         </pc:sldMkLst>
+        <pc:spChg chg="mod">
+          <ac:chgData name="BOUCADAIR Mohamed INNOV/NET" userId="2acbca90-6db1-4111-98c4-832797dda751" providerId="ADAL" clId="{A64BD271-A47C-4266-84F7-4325E25623CE}" dt="2026-03-13T07:38:30.703" v="2648" actId="403"/>
+          <ac:spMkLst>
+            <pc:docMk/>
+            <pc:sldMk cId="0" sldId="259"/>
+            <ac:spMk id="2" creationId="{9A04EB33-D3E4-7EBD-AE0D-87EC20001D53}"/>
+          </ac:spMkLst>
+        </pc:spChg>
         <pc:spChg chg="mod">
           <ac:chgData name="BOUCADAIR Mohamed INNOV/NET" userId="2acbca90-6db1-4111-98c4-832797dda751" providerId="ADAL" clId="{A64BD271-A47C-4266-84F7-4325E25623CE}" dt="2026-03-09T12:36:51.719" v="19" actId="20577"/>
           <ac:spMkLst>
@@ -147,6 +157,14 @@
             <ac:spMk id="3" creationId="{7D893ED2-DA42-B459-30D9-F02181931E5E}"/>
           </ac:spMkLst>
         </pc:spChg>
+        <pc:picChg chg="del">
+          <ac:chgData name="BOUCADAIR Mohamed INNOV/NET" userId="2acbca90-6db1-4111-98c4-832797dda751" providerId="ADAL" clId="{A64BD271-A47C-4266-84F7-4325E25623CE}" dt="2026-03-13T07:38:35.196" v="2649" actId="478"/>
+          <ac:picMkLst>
+            <pc:docMk/>
+            <pc:sldMk cId="0" sldId="259"/>
+            <ac:picMk id="14340" creationId="{FD52B565-0F63-2B46-0FC9-4D8E2FF2512B}"/>
+          </ac:picMkLst>
+        </pc:picChg>
       </pc:sldChg>
       <pc:sldChg chg="add del">
         <pc:chgData name="BOUCADAIR Mohamed INNOV/NET" userId="2acbca90-6db1-4111-98c4-832797dda751" providerId="ADAL" clId="{A64BD271-A47C-4266-84F7-4325E25623CE}" dt="2026-03-12T15:42:07.858" v="1708" actId="47"/>
@@ -335,7 +353,7 @@
         </pc:sldMkLst>
       </pc:sldChg>
       <pc:sldChg chg="addSp delSp modSp new mod">
-        <pc:chgData name="BOUCADAIR Mohamed INNOV/NET" userId="2acbca90-6db1-4111-98c4-832797dda751" providerId="ADAL" clId="{A64BD271-A47C-4266-84F7-4325E25623CE}" dt="2026-03-12T15:39:24.616" v="1647" actId="478"/>
+        <pc:chgData name="BOUCADAIR Mohamed INNOV/NET" userId="2acbca90-6db1-4111-98c4-832797dda751" providerId="ADAL" clId="{A64BD271-A47C-4266-84F7-4325E25623CE}" dt="2026-03-13T07:40:50.226" v="2678" actId="114"/>
         <pc:sldMkLst>
           <pc:docMk/>
           <pc:sldMk cId="305012172" sldId="265"/>
@@ -349,7 +367,7 @@
           </ac:spMkLst>
         </pc:spChg>
         <pc:spChg chg="mod">
-          <ac:chgData name="BOUCADAIR Mohamed INNOV/NET" userId="2acbca90-6db1-4111-98c4-832797dda751" providerId="ADAL" clId="{A64BD271-A47C-4266-84F7-4325E25623CE}" dt="2026-03-12T15:34:01.445" v="1455" actId="12"/>
+          <ac:chgData name="BOUCADAIR Mohamed INNOV/NET" userId="2acbca90-6db1-4111-98c4-832797dda751" providerId="ADAL" clId="{A64BD271-A47C-4266-84F7-4325E25623CE}" dt="2026-03-13T07:40:50.226" v="2678" actId="114"/>
           <ac:spMkLst>
             <pc:docMk/>
             <pc:sldMk cId="305012172" sldId="265"/>
@@ -444,14 +462,14 @@
           </ac:spMkLst>
         </pc:spChg>
       </pc:sldChg>
-      <pc:sldChg chg="addSp delSp modSp add mod">
-        <pc:chgData name="BOUCADAIR Mohamed INNOV/NET" userId="2acbca90-6db1-4111-98c4-832797dda751" providerId="ADAL" clId="{A64BD271-A47C-4266-84F7-4325E25623CE}" dt="2026-03-12T15:57:08.530" v="2139" actId="167"/>
+      <pc:sldChg chg="addSp delSp modSp add mod modAnim">
+        <pc:chgData name="BOUCADAIR Mohamed INNOV/NET" userId="2acbca90-6db1-4111-98c4-832797dda751" providerId="ADAL" clId="{A64BD271-A47C-4266-84F7-4325E25623CE}" dt="2026-03-13T07:52:53.909" v="3535"/>
         <pc:sldMkLst>
           <pc:docMk/>
           <pc:sldMk cId="760348924" sldId="266"/>
         </pc:sldMkLst>
         <pc:spChg chg="add del mod">
-          <ac:chgData name="BOUCADAIR Mohamed INNOV/NET" userId="2acbca90-6db1-4111-98c4-832797dda751" providerId="ADAL" clId="{A64BD271-A47C-4266-84F7-4325E25623CE}" dt="2026-03-12T15:42:03.235" v="1707"/>
+          <ac:chgData name="BOUCADAIR Mohamed INNOV/NET" userId="2acbca90-6db1-4111-98c4-832797dda751" providerId="ADAL" clId="{A64BD271-A47C-4266-84F7-4325E25623CE}" dt="2026-03-13T07:50:51.998" v="3481" actId="20577"/>
           <ac:spMkLst>
             <pc:docMk/>
             <pc:sldMk cId="760348924" sldId="266"/>
@@ -579,7 +597,7 @@
           </ac:spMkLst>
         </pc:spChg>
         <pc:grpChg chg="add mod ord">
-          <ac:chgData name="BOUCADAIR Mohamed INNOV/NET" userId="2acbca90-6db1-4111-98c4-832797dda751" providerId="ADAL" clId="{A64BD271-A47C-4266-84F7-4325E25623CE}" dt="2026-03-12T15:55:59.792" v="2133" actId="167"/>
+          <ac:chgData name="BOUCADAIR Mohamed INNOV/NET" userId="2acbca90-6db1-4111-98c4-832797dda751" providerId="ADAL" clId="{A64BD271-A47C-4266-84F7-4325E25623CE}" dt="2026-03-13T07:52:19.688" v="3530" actId="14100"/>
           <ac:grpSpMkLst>
             <pc:docMk/>
             <pc:sldMk cId="760348924" sldId="266"/>
@@ -604,13 +622,13 @@
         </pc:grpChg>
       </pc:sldChg>
       <pc:sldChg chg="delSp modSp new mod">
-        <pc:chgData name="BOUCADAIR Mohamed INNOV/NET" userId="2acbca90-6db1-4111-98c4-832797dda751" providerId="ADAL" clId="{A64BD271-A47C-4266-84F7-4325E25623CE}" dt="2026-03-12T15:58:37.769" v="2355" actId="790"/>
+        <pc:chgData name="BOUCADAIR Mohamed INNOV/NET" userId="2acbca90-6db1-4111-98c4-832797dda751" providerId="ADAL" clId="{A64BD271-A47C-4266-84F7-4325E25623CE}" dt="2026-03-13T07:51:38.704" v="3528" actId="20577"/>
         <pc:sldMkLst>
           <pc:docMk/>
           <pc:sldMk cId="275912104" sldId="267"/>
         </pc:sldMkLst>
         <pc:spChg chg="mod">
-          <ac:chgData name="BOUCADAIR Mohamed INNOV/NET" userId="2acbca90-6db1-4111-98c4-832797dda751" providerId="ADAL" clId="{A64BD271-A47C-4266-84F7-4325E25623CE}" dt="2026-03-12T15:45:00.467" v="1768" actId="20577"/>
+          <ac:chgData name="BOUCADAIR Mohamed INNOV/NET" userId="2acbca90-6db1-4111-98c4-832797dda751" providerId="ADAL" clId="{A64BD271-A47C-4266-84F7-4325E25623CE}" dt="2026-03-13T07:51:38.704" v="3528" actId="20577"/>
           <ac:spMkLst>
             <pc:docMk/>
             <pc:sldMk cId="275912104" sldId="267"/>
@@ -618,7 +636,7 @@
           </ac:spMkLst>
         </pc:spChg>
         <pc:spChg chg="mod">
-          <ac:chgData name="BOUCADAIR Mohamed INNOV/NET" userId="2acbca90-6db1-4111-98c4-832797dda751" providerId="ADAL" clId="{A64BD271-A47C-4266-84F7-4325E25623CE}" dt="2026-03-12T15:58:37.769" v="2355" actId="790"/>
+          <ac:chgData name="BOUCADAIR Mohamed INNOV/NET" userId="2acbca90-6db1-4111-98c4-832797dda751" providerId="ADAL" clId="{A64BD271-A47C-4266-84F7-4325E25623CE}" dt="2026-03-13T07:42:19.681" v="2705" actId="14"/>
           <ac:spMkLst>
             <pc:docMk/>
             <pc:sldMk cId="275912104" sldId="267"/>
@@ -641,6 +659,273 @@
             <ac:spMk id="5" creationId="{FF300894-EDD2-7DE6-D8D2-63BCE5D72363}"/>
           </ac:spMkLst>
         </pc:spChg>
+      </pc:sldChg>
+      <pc:sldChg chg="addSp delSp modSp add mod">
+        <pc:chgData name="BOUCADAIR Mohamed INNOV/NET" userId="2acbca90-6db1-4111-98c4-832797dda751" providerId="ADAL" clId="{A64BD271-A47C-4266-84F7-4325E25623CE}" dt="2026-03-13T07:39:15.186" v="2651" actId="207"/>
+        <pc:sldMkLst>
+          <pc:docMk/>
+          <pc:sldMk cId="1944734218" sldId="268"/>
+        </pc:sldMkLst>
+        <pc:spChg chg="mod">
+          <ac:chgData name="BOUCADAIR Mohamed INNOV/NET" userId="2acbca90-6db1-4111-98c4-832797dda751" providerId="ADAL" clId="{A64BD271-A47C-4266-84F7-4325E25623CE}" dt="2026-03-13T07:33:35.256" v="2444" actId="20577"/>
+          <ac:spMkLst>
+            <pc:docMk/>
+            <pc:sldMk cId="1944734218" sldId="268"/>
+            <ac:spMk id="2" creationId="{C2745677-F836-D5CE-6178-AD3C5A01D790}"/>
+          </ac:spMkLst>
+        </pc:spChg>
+        <pc:spChg chg="mod">
+          <ac:chgData name="BOUCADAIR Mohamed INNOV/NET" userId="2acbca90-6db1-4111-98c4-832797dda751" providerId="ADAL" clId="{A64BD271-A47C-4266-84F7-4325E25623CE}" dt="2026-03-13T07:39:15.186" v="2651" actId="207"/>
+          <ac:spMkLst>
+            <pc:docMk/>
+            <pc:sldMk cId="1944734218" sldId="268"/>
+            <ac:spMk id="3" creationId="{8A7BAFF8-4E53-1413-263B-7F94C9A1F28C}"/>
+          </ac:spMkLst>
+        </pc:spChg>
+        <pc:spChg chg="add mod ord">
+          <ac:chgData name="BOUCADAIR Mohamed INNOV/NET" userId="2acbca90-6db1-4111-98c4-832797dda751" providerId="ADAL" clId="{A64BD271-A47C-4266-84F7-4325E25623CE}" dt="2026-03-13T07:32:09.908" v="2361" actId="14100"/>
+          <ac:spMkLst>
+            <pc:docMk/>
+            <pc:sldMk cId="1944734218" sldId="268"/>
+            <ac:spMk id="4" creationId="{47915B8B-6719-66E6-3F1F-014DB271DB52}"/>
+          </ac:spMkLst>
+        </pc:spChg>
+        <pc:spChg chg="del">
+          <ac:chgData name="BOUCADAIR Mohamed INNOV/NET" userId="2acbca90-6db1-4111-98c4-832797dda751" providerId="ADAL" clId="{A64BD271-A47C-4266-84F7-4325E25623CE}" dt="2026-03-13T07:33:02.865" v="2367" actId="478"/>
+          <ac:spMkLst>
+            <pc:docMk/>
+            <pc:sldMk cId="1944734218" sldId="268"/>
+            <ac:spMk id="9" creationId="{333B56FA-9914-FA8B-9AC9-DA2279079B81}"/>
+          </ac:spMkLst>
+        </pc:spChg>
+        <pc:spChg chg="del">
+          <ac:chgData name="BOUCADAIR Mohamed INNOV/NET" userId="2acbca90-6db1-4111-98c4-832797dda751" providerId="ADAL" clId="{A64BD271-A47C-4266-84F7-4325E25623CE}" dt="2026-03-13T07:32:58.354" v="2366" actId="478"/>
+          <ac:spMkLst>
+            <pc:docMk/>
+            <pc:sldMk cId="1944734218" sldId="268"/>
+            <ac:spMk id="10" creationId="{4F5CACBA-8E86-5A00-FA0E-30E723F4E35B}"/>
+          </ac:spMkLst>
+        </pc:spChg>
+        <pc:picChg chg="del">
+          <ac:chgData name="BOUCADAIR Mohamed INNOV/NET" userId="2acbca90-6db1-4111-98c4-832797dda751" providerId="ADAL" clId="{A64BD271-A47C-4266-84F7-4325E25623CE}" dt="2026-03-13T07:32:58.354" v="2366" actId="478"/>
+          <ac:picMkLst>
+            <pc:docMk/>
+            <pc:sldMk cId="1944734218" sldId="268"/>
+            <ac:picMk id="8" creationId="{C1144CF5-0AE6-E0BA-273B-BAF05AAC0CF8}"/>
+          </ac:picMkLst>
+        </pc:picChg>
+        <pc:picChg chg="add mod">
+          <ac:chgData name="BOUCADAIR Mohamed INNOV/NET" userId="2acbca90-6db1-4111-98c4-832797dda751" providerId="ADAL" clId="{A64BD271-A47C-4266-84F7-4325E25623CE}" dt="2026-03-13T07:34:58.036" v="2451" actId="14100"/>
+          <ac:picMkLst>
+            <pc:docMk/>
+            <pc:sldMk cId="1944734218" sldId="268"/>
+            <ac:picMk id="27" creationId="{6C72CC5E-CBBB-3952-E15C-7E274FE0912B}"/>
+          </ac:picMkLst>
+        </pc:picChg>
+        <pc:inkChg chg="del">
+          <ac:chgData name="BOUCADAIR Mohamed INNOV/NET" userId="2acbca90-6db1-4111-98c4-832797dda751" providerId="ADAL" clId="{A64BD271-A47C-4266-84F7-4325E25623CE}" dt="2026-03-13T07:33:02.865" v="2367" actId="478"/>
+          <ac:inkMkLst>
+            <pc:docMk/>
+            <pc:sldMk cId="1944734218" sldId="268"/>
+            <ac:inkMk id="11" creationId="{F41749A6-E93E-AD1A-B694-360DB6FDAED1}"/>
+          </ac:inkMkLst>
+        </pc:inkChg>
+        <pc:inkChg chg="del">
+          <ac:chgData name="BOUCADAIR Mohamed INNOV/NET" userId="2acbca90-6db1-4111-98c4-832797dda751" providerId="ADAL" clId="{A64BD271-A47C-4266-84F7-4325E25623CE}" dt="2026-03-13T07:33:02.865" v="2367" actId="478"/>
+          <ac:inkMkLst>
+            <pc:docMk/>
+            <pc:sldMk cId="1944734218" sldId="268"/>
+            <ac:inkMk id="14" creationId="{6229379A-4F53-97DC-1EFC-8A957FA66252}"/>
+          </ac:inkMkLst>
+        </pc:inkChg>
+        <pc:inkChg chg="del">
+          <ac:chgData name="BOUCADAIR Mohamed INNOV/NET" userId="2acbca90-6db1-4111-98c4-832797dda751" providerId="ADAL" clId="{A64BD271-A47C-4266-84F7-4325E25623CE}" dt="2026-03-13T07:33:02.865" v="2367" actId="478"/>
+          <ac:inkMkLst>
+            <pc:docMk/>
+            <pc:sldMk cId="1944734218" sldId="268"/>
+            <ac:inkMk id="16" creationId="{065FD94B-5A7A-085C-8BB5-5573D6AFBBD0}"/>
+          </ac:inkMkLst>
+        </pc:inkChg>
+        <pc:inkChg chg="del">
+          <ac:chgData name="BOUCADAIR Mohamed INNOV/NET" userId="2acbca90-6db1-4111-98c4-832797dda751" providerId="ADAL" clId="{A64BD271-A47C-4266-84F7-4325E25623CE}" dt="2026-03-13T07:33:02.865" v="2367" actId="478"/>
+          <ac:inkMkLst>
+            <pc:docMk/>
+            <pc:sldMk cId="1944734218" sldId="268"/>
+            <ac:inkMk id="17" creationId="{E2FED48B-1F98-9577-74C5-0F59ACC3E3AE}"/>
+          </ac:inkMkLst>
+        </pc:inkChg>
+        <pc:inkChg chg="del">
+          <ac:chgData name="BOUCADAIR Mohamed INNOV/NET" userId="2acbca90-6db1-4111-98c4-832797dda751" providerId="ADAL" clId="{A64BD271-A47C-4266-84F7-4325E25623CE}" dt="2026-03-13T07:33:02.865" v="2367" actId="478"/>
+          <ac:inkMkLst>
+            <pc:docMk/>
+            <pc:sldMk cId="1944734218" sldId="268"/>
+            <ac:inkMk id="19" creationId="{1C8535BB-3EDB-9AD8-4AF5-B384289CF8E3}"/>
+          </ac:inkMkLst>
+        </pc:inkChg>
+        <pc:inkChg chg="del">
+          <ac:chgData name="BOUCADAIR Mohamed INNOV/NET" userId="2acbca90-6db1-4111-98c4-832797dda751" providerId="ADAL" clId="{A64BD271-A47C-4266-84F7-4325E25623CE}" dt="2026-03-13T07:33:02.865" v="2367" actId="478"/>
+          <ac:inkMkLst>
+            <pc:docMk/>
+            <pc:sldMk cId="1944734218" sldId="268"/>
+            <ac:inkMk id="20" creationId="{391B9C7D-5524-714D-4539-A41C3A859580}"/>
+          </ac:inkMkLst>
+        </pc:inkChg>
+        <pc:inkChg chg="del">
+          <ac:chgData name="BOUCADAIR Mohamed INNOV/NET" userId="2acbca90-6db1-4111-98c4-832797dda751" providerId="ADAL" clId="{A64BD271-A47C-4266-84F7-4325E25623CE}" dt="2026-03-13T07:33:02.865" v="2367" actId="478"/>
+          <ac:inkMkLst>
+            <pc:docMk/>
+            <pc:sldMk cId="1944734218" sldId="268"/>
+            <ac:inkMk id="23" creationId="{2795F597-89A1-52BB-7BC5-0BE3E0037873}"/>
+          </ac:inkMkLst>
+        </pc:inkChg>
+        <pc:inkChg chg="del">
+          <ac:chgData name="BOUCADAIR Mohamed INNOV/NET" userId="2acbca90-6db1-4111-98c4-832797dda751" providerId="ADAL" clId="{A64BD271-A47C-4266-84F7-4325E25623CE}" dt="2026-03-13T07:33:02.865" v="2367" actId="478"/>
+          <ac:inkMkLst>
+            <pc:docMk/>
+            <pc:sldMk cId="1944734218" sldId="268"/>
+            <ac:inkMk id="25" creationId="{8066FFC1-0F1A-85BF-180D-68B9AF8C8916}"/>
+          </ac:inkMkLst>
+        </pc:inkChg>
+        <pc:inkChg chg="del">
+          <ac:chgData name="BOUCADAIR Mohamed INNOV/NET" userId="2acbca90-6db1-4111-98c4-832797dda751" providerId="ADAL" clId="{A64BD271-A47C-4266-84F7-4325E25623CE}" dt="2026-03-13T07:33:02.865" v="2367" actId="478"/>
+          <ac:inkMkLst>
+            <pc:docMk/>
+            <pc:sldMk cId="1944734218" sldId="268"/>
+            <ac:inkMk id="26" creationId="{15AF8AEE-9770-AB03-CE37-ED7661663602}"/>
+          </ac:inkMkLst>
+        </pc:inkChg>
+        <pc:cxnChg chg="add mod">
+          <ac:chgData name="BOUCADAIR Mohamed INNOV/NET" userId="2acbca90-6db1-4111-98c4-832797dda751" providerId="ADAL" clId="{A64BD271-A47C-4266-84F7-4325E25623CE}" dt="2026-03-13T07:35:25.255" v="2453" actId="208"/>
+          <ac:cxnSpMkLst>
+            <pc:docMk/>
+            <pc:sldMk cId="1944734218" sldId="268"/>
+            <ac:cxnSpMk id="29" creationId="{E987A688-E79B-C03A-FE8D-E04A16177884}"/>
+          </ac:cxnSpMkLst>
+        </pc:cxnChg>
+      </pc:sldChg>
+      <pc:sldChg chg="add del">
+        <pc:chgData name="BOUCADAIR Mohamed INNOV/NET" userId="2acbca90-6db1-4111-98c4-832797dda751" providerId="ADAL" clId="{A64BD271-A47C-4266-84F7-4325E25623CE}" dt="2026-03-13T07:32:23.835" v="2363"/>
+        <pc:sldMkLst>
+          <pc:docMk/>
+          <pc:sldMk cId="381259777" sldId="269"/>
+        </pc:sldMkLst>
+      </pc:sldChg>
+      <pc:sldChg chg="modSp add del mod">
+        <pc:chgData name="BOUCADAIR Mohamed INNOV/NET" userId="2acbca90-6db1-4111-98c4-832797dda751" providerId="ADAL" clId="{A64BD271-A47C-4266-84F7-4325E25623CE}" dt="2026-03-13T07:47:50.731" v="3348" actId="47"/>
+        <pc:sldMkLst>
+          <pc:docMk/>
+          <pc:sldMk cId="738014154" sldId="269"/>
+        </pc:sldMkLst>
+        <pc:spChg chg="mod">
+          <ac:chgData name="BOUCADAIR Mohamed INNOV/NET" userId="2acbca90-6db1-4111-98c4-832797dda751" providerId="ADAL" clId="{A64BD271-A47C-4266-84F7-4325E25623CE}" dt="2026-03-13T07:43:46.266" v="2841" actId="20577"/>
+          <ac:spMkLst>
+            <pc:docMk/>
+            <pc:sldMk cId="738014154" sldId="269"/>
+            <ac:spMk id="2" creationId="{28800241-420C-8026-E7A1-91723AEA3D21}"/>
+          </ac:spMkLst>
+        </pc:spChg>
+        <pc:spChg chg="mod">
+          <ac:chgData name="BOUCADAIR Mohamed INNOV/NET" userId="2acbca90-6db1-4111-98c4-832797dda751" providerId="ADAL" clId="{A64BD271-A47C-4266-84F7-4325E25623CE}" dt="2026-03-13T07:44:23.948" v="2980" actId="20577"/>
+          <ac:spMkLst>
+            <pc:docMk/>
+            <pc:sldMk cId="738014154" sldId="269"/>
+            <ac:spMk id="3" creationId="{C7DE4B18-94E9-9C14-791C-ACD09BEAD563}"/>
+          </ac:spMkLst>
+        </pc:spChg>
+      </pc:sldChg>
+      <pc:sldChg chg="modSp add del mod">
+        <pc:chgData name="BOUCADAIR Mohamed INNOV/NET" userId="2acbca90-6db1-4111-98c4-832797dda751" providerId="ADAL" clId="{A64BD271-A47C-4266-84F7-4325E25623CE}" dt="2026-03-13T07:40:07.310" v="2668" actId="47"/>
+        <pc:sldMkLst>
+          <pc:docMk/>
+          <pc:sldMk cId="1149119996" sldId="269"/>
+        </pc:sldMkLst>
+        <pc:spChg chg="mod">
+          <ac:chgData name="BOUCADAIR Mohamed INNOV/NET" userId="2acbca90-6db1-4111-98c4-832797dda751" providerId="ADAL" clId="{A64BD271-A47C-4266-84F7-4325E25623CE}" dt="2026-03-13T07:39:54.408" v="2667" actId="6549"/>
+          <ac:spMkLst>
+            <pc:docMk/>
+            <pc:sldMk cId="1149119996" sldId="269"/>
+            <ac:spMk id="3" creationId="{367DDA68-0B28-6254-6711-C04E190A1DBA}"/>
+          </ac:spMkLst>
+        </pc:spChg>
+      </pc:sldChg>
+      <pc:sldChg chg="addSp delSp modSp add mod">
+        <pc:chgData name="BOUCADAIR Mohamed INNOV/NET" userId="2acbca90-6db1-4111-98c4-832797dda751" providerId="ADAL" clId="{A64BD271-A47C-4266-84F7-4325E25623CE}" dt="2026-03-13T07:51:28.949" v="3517" actId="20577"/>
+        <pc:sldMkLst>
+          <pc:docMk/>
+          <pc:sldMk cId="623479167" sldId="270"/>
+        </pc:sldMkLst>
+        <pc:spChg chg="mod">
+          <ac:chgData name="BOUCADAIR Mohamed INNOV/NET" userId="2acbca90-6db1-4111-98c4-832797dda751" providerId="ADAL" clId="{A64BD271-A47C-4266-84F7-4325E25623CE}" dt="2026-03-13T07:45:08.654" v="3000" actId="20577"/>
+          <ac:spMkLst>
+            <pc:docMk/>
+            <pc:sldMk cId="623479167" sldId="270"/>
+            <ac:spMk id="2" creationId="{DDE1A45F-2FC1-771A-6B0F-370B1DDFD7AB}"/>
+          </ac:spMkLst>
+        </pc:spChg>
+        <pc:spChg chg="del">
+          <ac:chgData name="BOUCADAIR Mohamed INNOV/NET" userId="2acbca90-6db1-4111-98c4-832797dda751" providerId="ADAL" clId="{A64BD271-A47C-4266-84F7-4325E25623CE}" dt="2026-03-13T07:45:19.860" v="3002" actId="478"/>
+          <ac:spMkLst>
+            <pc:docMk/>
+            <pc:sldMk cId="623479167" sldId="270"/>
+            <ac:spMk id="3" creationId="{60069CAD-CA30-97D7-C6E3-A82E515A796F}"/>
+          </ac:spMkLst>
+        </pc:spChg>
+        <pc:spChg chg="del">
+          <ac:chgData name="BOUCADAIR Mohamed INNOV/NET" userId="2acbca90-6db1-4111-98c4-832797dda751" providerId="ADAL" clId="{A64BD271-A47C-4266-84F7-4325E25623CE}" dt="2026-03-13T07:44:59.512" v="2982" actId="478"/>
+          <ac:spMkLst>
+            <pc:docMk/>
+            <pc:sldMk cId="623479167" sldId="270"/>
+            <ac:spMk id="4" creationId="{1BCEF2E1-C3AC-4EB5-6C8B-9EE329F0D7ED}"/>
+          </ac:spMkLst>
+        </pc:spChg>
+        <pc:spChg chg="add del mod">
+          <ac:chgData name="BOUCADAIR Mohamed INNOV/NET" userId="2acbca90-6db1-4111-98c4-832797dda751" providerId="ADAL" clId="{A64BD271-A47C-4266-84F7-4325E25623CE}" dt="2026-03-13T07:45:22.757" v="3003" actId="478"/>
+          <ac:spMkLst>
+            <pc:docMk/>
+            <pc:sldMk cId="623479167" sldId="270"/>
+            <ac:spMk id="5" creationId="{F97E2F0B-36D9-871B-E146-1E5838DA8C9D}"/>
+          </ac:spMkLst>
+        </pc:spChg>
+        <pc:spChg chg="add mod">
+          <ac:chgData name="BOUCADAIR Mohamed INNOV/NET" userId="2acbca90-6db1-4111-98c4-832797dda751" providerId="ADAL" clId="{A64BD271-A47C-4266-84F7-4325E25623CE}" dt="2026-03-13T07:45:27.226" v="3005" actId="207"/>
+          <ac:spMkLst>
+            <pc:docMk/>
+            <pc:sldMk cId="623479167" sldId="270"/>
+            <ac:spMk id="8" creationId="{2216BE0F-76BD-1BFD-E782-6B3B1F750DC9}"/>
+          </ac:spMkLst>
+        </pc:spChg>
+        <pc:spChg chg="add mod">
+          <ac:chgData name="BOUCADAIR Mohamed INNOV/NET" userId="2acbca90-6db1-4111-98c4-832797dda751" providerId="ADAL" clId="{A64BD271-A47C-4266-84F7-4325E25623CE}" dt="2026-03-13T07:51:28.949" v="3517" actId="20577"/>
+          <ac:spMkLst>
+            <pc:docMk/>
+            <pc:sldMk cId="623479167" sldId="270"/>
+            <ac:spMk id="9" creationId="{A9559994-3175-1FB4-EE8B-86007FE43845}"/>
+          </ac:spMkLst>
+        </pc:spChg>
+        <pc:spChg chg="add mod ord">
+          <ac:chgData name="BOUCADAIR Mohamed INNOV/NET" userId="2acbca90-6db1-4111-98c4-832797dda751" providerId="ADAL" clId="{A64BD271-A47C-4266-84F7-4325E25623CE}" dt="2026-03-13T07:49:09.136" v="3359" actId="207"/>
+          <ac:spMkLst>
+            <pc:docMk/>
+            <pc:sldMk cId="623479167" sldId="270"/>
+            <ac:spMk id="10" creationId="{A6CC4B4B-6138-3988-9F6A-42F6B0D9A7B3}"/>
+          </ac:spMkLst>
+        </pc:spChg>
+        <pc:picChg chg="del">
+          <ac:chgData name="BOUCADAIR Mohamed INNOV/NET" userId="2acbca90-6db1-4111-98c4-832797dda751" providerId="ADAL" clId="{A64BD271-A47C-4266-84F7-4325E25623CE}" dt="2026-03-13T07:45:11.213" v="3001" actId="478"/>
+          <ac:picMkLst>
+            <pc:docMk/>
+            <pc:sldMk cId="623479167" sldId="270"/>
+            <ac:picMk id="27" creationId="{D5645064-7795-AAEB-50CC-AEC7272885B2}"/>
+          </ac:picMkLst>
+        </pc:picChg>
+        <pc:cxnChg chg="del mod">
+          <ac:chgData name="BOUCADAIR Mohamed INNOV/NET" userId="2acbca90-6db1-4111-98c4-832797dda751" providerId="ADAL" clId="{A64BD271-A47C-4266-84F7-4325E25623CE}" dt="2026-03-13T07:45:01.828" v="2983" actId="478"/>
+          <ac:cxnSpMkLst>
+            <pc:docMk/>
+            <pc:sldMk cId="623479167" sldId="270"/>
+            <ac:cxnSpMk id="29" creationId="{A688CB3B-412C-B147-6EB4-E93C41505138}"/>
+          </ac:cxnSpMkLst>
+        </pc:cxnChg>
       </pc:sldChg>
       <pc:sldMasterChg chg="addSp delSp mod">
         <pc:chgData name="BOUCADAIR Mohamed INNOV/NET" userId="2acbca90-6db1-4111-98c4-832797dda751" providerId="ADAL" clId="{A64BD271-A47C-4266-84F7-4325E25623CE}" dt="2026-03-09T12:36:35.125" v="3" actId="33475"/>
@@ -4814,7 +5099,7 @@
               <a:defRPr/>
             </a:pPr>
             <a:r>
-              <a:rPr lang="en-US" sz="4800" noProof="0" dirty="0"/>
+              <a:rPr lang="en-US" sz="5300" noProof="0" dirty="0"/>
               <a:t>An Update of Operators Requirements on Network Management Protocols and Modelling</a:t>
             </a:r>
             <a:br>
@@ -4970,66 +5255,6 @@
           </a:p>
         </p:txBody>
       </p:sp>
-      <p:pic>
-        <p:nvPicPr>
-          <p:cNvPr id="14340" name="Picture 4" descr="ietflogotrans">
-            <a:extLst>
-              <a:ext uri="{FF2B5EF4-FFF2-40B4-BE49-F238E27FC236}">
-                <a16:creationId xmlns:a16="http://schemas.microsoft.com/office/drawing/2014/main" id="{FD52B565-0F63-2B46-0FC9-4D8E2FF2512B}"/>
-              </a:ext>
-            </a:extLst>
-          </p:cNvPr>
-          <p:cNvPicPr>
-            <a:picLocks noChangeAspect="1" noChangeArrowheads="1"/>
-          </p:cNvPicPr>
-          <p:nvPr/>
-        </p:nvPicPr>
-        <p:blipFill>
-          <a:blip r:embed="rId2">
-            <a:extLst>
-              <a:ext uri="{28A0092B-C50C-407E-A947-70E740481C1C}">
-                <a14:useLocalDpi xmlns:a14="http://schemas.microsoft.com/office/drawing/2010/main" val="0"/>
-              </a:ext>
-            </a:extLst>
-          </a:blip>
-          <a:srcRect/>
-          <a:stretch>
-            <a:fillRect/>
-          </a:stretch>
-        </p:blipFill>
-        <p:spPr bwMode="auto">
-          <a:xfrm>
-            <a:off x="4757738" y="242888"/>
-            <a:ext cx="2667000" cy="1419225"/>
-          </a:xfrm>
-          <a:prstGeom prst="rect">
-            <a:avLst/>
-          </a:prstGeom>
-          <a:noFill/>
-          <a:ln>
-            <a:noFill/>
-          </a:ln>
-          <a:extLst>
-            <a:ext uri="{909E8E84-426E-40DD-AFC4-6F175D3DCCD1}">
-              <a14:hiddenFill xmlns:a14="http://schemas.microsoft.com/office/drawing/2010/main">
-                <a:solidFill>
-                  <a:srgbClr val="FFFFFF"/>
-                </a:solidFill>
-              </a14:hiddenFill>
-            </a:ext>
-            <a:ext uri="{91240B29-F687-4F45-9708-019B960494DF}">
-              <a14:hiddenLine xmlns:a14="http://schemas.microsoft.com/office/drawing/2010/main" w="9525">
-                <a:solidFill>
-                  <a:srgbClr val="000000"/>
-                </a:solidFill>
-                <a:miter lim="800000"/>
-                <a:headEnd/>
-                <a:tailEnd/>
-              </a14:hiddenLine>
-            </a:ext>
-          </a:extLst>
-        </p:spPr>
-      </p:pic>
     </p:spTree>
   </p:cSld>
   <p:clrMapOvr>
@@ -5698,8 +5923,8 @@
           </a:p>
         </p:txBody>
       </p:sp>
-      <mc:AlternateContent xmlns:mc="http://schemas.openxmlformats.org/markup-compatibility/2006">
-        <mc:Choice xmlns:p14="http://schemas.microsoft.com/office/powerpoint/2010/main" Requires="p14">
+      <mc:AlternateContent xmlns:mc="http://schemas.openxmlformats.org/markup-compatibility/2006" xmlns:p14="http://schemas.microsoft.com/office/powerpoint/2010/main">
+        <mc:Choice Requires="p14">
           <p:contentPart p14:bwMode="auto" r:id="rId3">
             <p14:nvContentPartPr>
               <p14:cNvPr id="11" name="Entrada de lápiz 24">
@@ -5718,7 +5943,7 @@
             </p14:xfrm>
           </p:contentPart>
         </mc:Choice>
-        <mc:Fallback>
+        <mc:Fallback xmlns="">
           <p:pic>
             <p:nvPicPr>
               <p:cNvPr id="11" name="Entrada de lápiz 24">
@@ -5749,8 +5974,8 @@
           </p:pic>
         </mc:Fallback>
       </mc:AlternateContent>
-      <mc:AlternateContent xmlns:mc="http://schemas.openxmlformats.org/markup-compatibility/2006">
-        <mc:Choice xmlns:p14="http://schemas.microsoft.com/office/powerpoint/2010/main" Requires="p14">
+      <mc:AlternateContent xmlns:mc="http://schemas.openxmlformats.org/markup-compatibility/2006" xmlns:p14="http://schemas.microsoft.com/office/powerpoint/2010/main">
+        <mc:Choice Requires="p14">
           <p:contentPart p14:bwMode="auto" r:id="rId5">
             <p14:nvContentPartPr>
               <p14:cNvPr id="12" name="Entrada de lápiz 25">
@@ -5769,7 +5994,7 @@
             </p14:xfrm>
           </p:contentPart>
         </mc:Choice>
-        <mc:Fallback>
+        <mc:Fallback xmlns="">
           <p:pic>
             <p:nvPicPr>
               <p:cNvPr id="12" name="Entrada de lápiz 25">
@@ -5800,8 +6025,8 @@
           </p:pic>
         </mc:Fallback>
       </mc:AlternateContent>
-      <mc:AlternateContent xmlns:mc="http://schemas.openxmlformats.org/markup-compatibility/2006">
-        <mc:Choice xmlns:p14="http://schemas.microsoft.com/office/powerpoint/2010/main" Requires="p14">
+      <mc:AlternateContent xmlns:mc="http://schemas.openxmlformats.org/markup-compatibility/2006" xmlns:p14="http://schemas.microsoft.com/office/powerpoint/2010/main">
+        <mc:Choice Requires="p14">
           <p:contentPart p14:bwMode="auto" r:id="rId6">
             <p14:nvContentPartPr>
               <p14:cNvPr id="13" name="Entrada de lápiz 26">
@@ -5820,7 +6045,7 @@
             </p14:xfrm>
           </p:contentPart>
         </mc:Choice>
-        <mc:Fallback>
+        <mc:Fallback xmlns="">
           <p:pic>
             <p:nvPicPr>
               <p:cNvPr id="13" name="Entrada de lápiz 26">
@@ -5851,8 +6076,8 @@
           </p:pic>
         </mc:Fallback>
       </mc:AlternateContent>
-      <mc:AlternateContent xmlns:mc="http://schemas.openxmlformats.org/markup-compatibility/2006">
-        <mc:Choice xmlns:p14="http://schemas.microsoft.com/office/powerpoint/2010/main" Requires="p14">
+      <mc:AlternateContent xmlns:mc="http://schemas.openxmlformats.org/markup-compatibility/2006" xmlns:p14="http://schemas.microsoft.com/office/powerpoint/2010/main">
+        <mc:Choice Requires="p14">
           <p:contentPart p14:bwMode="auto" r:id="rId7">
             <p14:nvContentPartPr>
               <p14:cNvPr id="14" name="Entrada de lápiz 27">
@@ -5871,7 +6096,7 @@
             </p14:xfrm>
           </p:contentPart>
         </mc:Choice>
-        <mc:Fallback>
+        <mc:Fallback xmlns="">
           <p:pic>
             <p:nvPicPr>
               <p:cNvPr id="14" name="Entrada de lápiz 27">
@@ -5902,8 +6127,8 @@
           </p:pic>
         </mc:Fallback>
       </mc:AlternateContent>
-      <mc:AlternateContent xmlns:mc="http://schemas.openxmlformats.org/markup-compatibility/2006">
-        <mc:Choice xmlns:p14="http://schemas.microsoft.com/office/powerpoint/2010/main" Requires="p14">
+      <mc:AlternateContent xmlns:mc="http://schemas.openxmlformats.org/markup-compatibility/2006" xmlns:p14="http://schemas.microsoft.com/office/powerpoint/2010/main">
+        <mc:Choice Requires="p14">
           <p:contentPart p14:bwMode="auto" r:id="rId8">
             <p14:nvContentPartPr>
               <p14:cNvPr id="15" name="Entrada de lápiz 28">
@@ -5922,7 +6147,7 @@
             </p14:xfrm>
           </p:contentPart>
         </mc:Choice>
-        <mc:Fallback>
+        <mc:Fallback xmlns="">
           <p:pic>
             <p:nvPicPr>
               <p:cNvPr id="15" name="Entrada de lápiz 28">
@@ -5953,8 +6178,8 @@
           </p:pic>
         </mc:Fallback>
       </mc:AlternateContent>
-      <mc:AlternateContent xmlns:mc="http://schemas.openxmlformats.org/markup-compatibility/2006">
-        <mc:Choice xmlns:p14="http://schemas.microsoft.com/office/powerpoint/2010/main" Requires="p14">
+      <mc:AlternateContent xmlns:mc="http://schemas.openxmlformats.org/markup-compatibility/2006" xmlns:p14="http://schemas.microsoft.com/office/powerpoint/2010/main">
+        <mc:Choice Requires="p14">
           <p:contentPart p14:bwMode="auto" r:id="rId9">
             <p14:nvContentPartPr>
               <p14:cNvPr id="16" name="Entrada de lápiz 29">
@@ -5973,7 +6198,7 @@
             </p14:xfrm>
           </p:contentPart>
         </mc:Choice>
-        <mc:Fallback>
+        <mc:Fallback xmlns="">
           <p:pic>
             <p:nvPicPr>
               <p:cNvPr id="16" name="Entrada de lápiz 29">
@@ -6004,8 +6229,8 @@
           </p:pic>
         </mc:Fallback>
       </mc:AlternateContent>
-      <mc:AlternateContent xmlns:mc="http://schemas.openxmlformats.org/markup-compatibility/2006">
-        <mc:Choice xmlns:p14="http://schemas.microsoft.com/office/powerpoint/2010/main" Requires="p14">
+      <mc:AlternateContent xmlns:mc="http://schemas.openxmlformats.org/markup-compatibility/2006" xmlns:p14="http://schemas.microsoft.com/office/powerpoint/2010/main">
+        <mc:Choice Requires="p14">
           <p:contentPart p14:bwMode="auto" r:id="rId10">
             <p14:nvContentPartPr>
               <p14:cNvPr id="17" name="Entrada de lápiz 30">
@@ -6024,7 +6249,7 @@
             </p14:xfrm>
           </p:contentPart>
         </mc:Choice>
-        <mc:Fallback>
+        <mc:Fallback xmlns="">
           <p:pic>
             <p:nvPicPr>
               <p:cNvPr id="17" name="Entrada de lápiz 30">
@@ -6055,8 +6280,8 @@
           </p:pic>
         </mc:Fallback>
       </mc:AlternateContent>
-      <mc:AlternateContent xmlns:mc="http://schemas.openxmlformats.org/markup-compatibility/2006">
-        <mc:Choice xmlns:p14="http://schemas.microsoft.com/office/powerpoint/2010/main" Requires="p14">
+      <mc:AlternateContent xmlns:mc="http://schemas.openxmlformats.org/markup-compatibility/2006" xmlns:p14="http://schemas.microsoft.com/office/powerpoint/2010/main">
+        <mc:Choice Requires="p14">
           <p:contentPart p14:bwMode="auto" r:id="rId11">
             <p14:nvContentPartPr>
               <p14:cNvPr id="18" name="Entrada de lápiz 31">
@@ -6075,7 +6300,7 @@
             </p14:xfrm>
           </p:contentPart>
         </mc:Choice>
-        <mc:Fallback>
+        <mc:Fallback xmlns="">
           <p:pic>
             <p:nvPicPr>
               <p:cNvPr id="18" name="Entrada de lápiz 31">
@@ -6106,8 +6331,8 @@
           </p:pic>
         </mc:Fallback>
       </mc:AlternateContent>
-      <mc:AlternateContent xmlns:mc="http://schemas.openxmlformats.org/markup-compatibility/2006">
-        <mc:Choice xmlns:p14="http://schemas.microsoft.com/office/powerpoint/2010/main" Requires="p14">
+      <mc:AlternateContent xmlns:mc="http://schemas.openxmlformats.org/markup-compatibility/2006" xmlns:p14="http://schemas.microsoft.com/office/powerpoint/2010/main">
+        <mc:Choice Requires="p14">
           <p:contentPart p14:bwMode="auto" r:id="rId12">
             <p14:nvContentPartPr>
               <p14:cNvPr id="19" name="Entrada de lápiz 32">
@@ -6126,7 +6351,7 @@
             </p14:xfrm>
           </p:contentPart>
         </mc:Choice>
-        <mc:Fallback>
+        <mc:Fallback xmlns="">
           <p:pic>
             <p:nvPicPr>
               <p:cNvPr id="19" name="Entrada de lápiz 32">
@@ -6157,8 +6382,8 @@
           </p:pic>
         </mc:Fallback>
       </mc:AlternateContent>
-      <mc:AlternateContent xmlns:mc="http://schemas.openxmlformats.org/markup-compatibility/2006">
-        <mc:Choice xmlns:p14="http://schemas.microsoft.com/office/powerpoint/2010/main" Requires="p14">
+      <mc:AlternateContent xmlns:mc="http://schemas.openxmlformats.org/markup-compatibility/2006" xmlns:p14="http://schemas.microsoft.com/office/powerpoint/2010/main">
+        <mc:Choice Requires="p14">
           <p:contentPart p14:bwMode="auto" r:id="rId13">
             <p14:nvContentPartPr>
               <p14:cNvPr id="20" name="Entrada de lápiz 33">
@@ -6177,7 +6402,7 @@
             </p14:xfrm>
           </p:contentPart>
         </mc:Choice>
-        <mc:Fallback>
+        <mc:Fallback xmlns="">
           <p:pic>
             <p:nvPicPr>
               <p:cNvPr id="20" name="Entrada de lápiz 33">
@@ -6208,8 +6433,8 @@
           </p:pic>
         </mc:Fallback>
       </mc:AlternateContent>
-      <mc:AlternateContent xmlns:mc="http://schemas.openxmlformats.org/markup-compatibility/2006">
-        <mc:Choice xmlns:p14="http://schemas.microsoft.com/office/powerpoint/2010/main" Requires="p14">
+      <mc:AlternateContent xmlns:mc="http://schemas.openxmlformats.org/markup-compatibility/2006" xmlns:p14="http://schemas.microsoft.com/office/powerpoint/2010/main">
+        <mc:Choice Requires="p14">
           <p:contentPart p14:bwMode="auto" r:id="rId14">
             <p14:nvContentPartPr>
               <p14:cNvPr id="21" name="Entrada de lápiz 34">
@@ -6228,7 +6453,7 @@
             </p14:xfrm>
           </p:contentPart>
         </mc:Choice>
-        <mc:Fallback>
+        <mc:Fallback xmlns="">
           <p:pic>
             <p:nvPicPr>
               <p:cNvPr id="21" name="Entrada de lápiz 34">
@@ -6259,8 +6484,8 @@
           </p:pic>
         </mc:Fallback>
       </mc:AlternateContent>
-      <mc:AlternateContent xmlns:mc="http://schemas.openxmlformats.org/markup-compatibility/2006">
-        <mc:Choice xmlns:p14="http://schemas.microsoft.com/office/powerpoint/2010/main" Requires="p14">
+      <mc:AlternateContent xmlns:mc="http://schemas.openxmlformats.org/markup-compatibility/2006" xmlns:p14="http://schemas.microsoft.com/office/powerpoint/2010/main">
+        <mc:Choice Requires="p14">
           <p:contentPart p14:bwMode="auto" r:id="rId15">
             <p14:nvContentPartPr>
               <p14:cNvPr id="22" name="Entrada de lápiz 35">
@@ -6279,7 +6504,7 @@
             </p14:xfrm>
           </p:contentPart>
         </mc:Choice>
-        <mc:Fallback>
+        <mc:Fallback xmlns="">
           <p:pic>
             <p:nvPicPr>
               <p:cNvPr id="22" name="Entrada de lápiz 35">
@@ -6310,8 +6535,8 @@
           </p:pic>
         </mc:Fallback>
       </mc:AlternateContent>
-      <mc:AlternateContent xmlns:mc="http://schemas.openxmlformats.org/markup-compatibility/2006">
-        <mc:Choice xmlns:p14="http://schemas.microsoft.com/office/powerpoint/2010/main" Requires="p14">
+      <mc:AlternateContent xmlns:mc="http://schemas.openxmlformats.org/markup-compatibility/2006" xmlns:p14="http://schemas.microsoft.com/office/powerpoint/2010/main">
+        <mc:Choice Requires="p14">
           <p:contentPart p14:bwMode="auto" r:id="rId16">
             <p14:nvContentPartPr>
               <p14:cNvPr id="23" name="Entrada de lápiz 36">
@@ -6330,7 +6555,7 @@
             </p14:xfrm>
           </p:contentPart>
         </mc:Choice>
-        <mc:Fallback>
+        <mc:Fallback xmlns="">
           <p:pic>
             <p:nvPicPr>
               <p:cNvPr id="23" name="Entrada de lápiz 36">
@@ -6361,8 +6586,8 @@
           </p:pic>
         </mc:Fallback>
       </mc:AlternateContent>
-      <mc:AlternateContent xmlns:mc="http://schemas.openxmlformats.org/markup-compatibility/2006">
-        <mc:Choice xmlns:p14="http://schemas.microsoft.com/office/powerpoint/2010/main" Requires="p14">
+      <mc:AlternateContent xmlns:mc="http://schemas.openxmlformats.org/markup-compatibility/2006" xmlns:p14="http://schemas.microsoft.com/office/powerpoint/2010/main">
+        <mc:Choice Requires="p14">
           <p:contentPart p14:bwMode="auto" r:id="rId17">
             <p14:nvContentPartPr>
               <p14:cNvPr id="24" name="Entrada de lápiz 37">
@@ -6381,7 +6606,7 @@
             </p14:xfrm>
           </p:contentPart>
         </mc:Choice>
-        <mc:Fallback>
+        <mc:Fallback xmlns="">
           <p:pic>
             <p:nvPicPr>
               <p:cNvPr id="24" name="Entrada de lápiz 37">
@@ -6412,8 +6637,8 @@
           </p:pic>
         </mc:Fallback>
       </mc:AlternateContent>
-      <mc:AlternateContent xmlns:mc="http://schemas.openxmlformats.org/markup-compatibility/2006">
-        <mc:Choice xmlns:p14="http://schemas.microsoft.com/office/powerpoint/2010/main" Requires="p14">
+      <mc:AlternateContent xmlns:mc="http://schemas.openxmlformats.org/markup-compatibility/2006" xmlns:p14="http://schemas.microsoft.com/office/powerpoint/2010/main">
+        <mc:Choice Requires="p14">
           <p:contentPart p14:bwMode="auto" r:id="rId18">
             <p14:nvContentPartPr>
               <p14:cNvPr id="25" name="Entrada de lápiz 38">
@@ -6432,7 +6657,7 @@
             </p14:xfrm>
           </p:contentPart>
         </mc:Choice>
-        <mc:Fallback>
+        <mc:Fallback xmlns="">
           <p:pic>
             <p:nvPicPr>
               <p:cNvPr id="25" name="Entrada de lápiz 38">
@@ -6463,8 +6688,8 @@
           </p:pic>
         </mc:Fallback>
       </mc:AlternateContent>
-      <mc:AlternateContent xmlns:mc="http://schemas.openxmlformats.org/markup-compatibility/2006">
-        <mc:Choice xmlns:p14="http://schemas.microsoft.com/office/powerpoint/2010/main" Requires="p14">
+      <mc:AlternateContent xmlns:mc="http://schemas.openxmlformats.org/markup-compatibility/2006" xmlns:p14="http://schemas.microsoft.com/office/powerpoint/2010/main">
+        <mc:Choice Requires="p14">
           <p:contentPart p14:bwMode="auto" r:id="rId19">
             <p14:nvContentPartPr>
               <p14:cNvPr id="26" name="Entrada de lápiz 39">
@@ -6483,7 +6708,7 @@
             </p14:xfrm>
           </p:contentPart>
         </mc:Choice>
-        <mc:Fallback>
+        <mc:Fallback xmlns="">
           <p:pic>
             <p:nvPicPr>
               <p:cNvPr id="26" name="Entrada de lápiz 39">
@@ -6532,6 +6757,3508 @@
   <p:cSld>
     <p:spTree>
       <p:nvGrpSpPr>
+        <p:cNvPr id="1" name="">
+          <a:extLst>
+            <a:ext uri="{FF2B5EF4-FFF2-40B4-BE49-F238E27FC236}">
+              <a16:creationId xmlns:a16="http://schemas.microsoft.com/office/drawing/2014/main" id="{C8217632-5121-2C34-0DE6-CD7745019C4F}"/>
+            </a:ext>
+          </a:extLst>
+        </p:cNvPr>
+        <p:cNvGrpSpPr/>
+        <p:nvPr/>
+      </p:nvGrpSpPr>
+      <p:grpSpPr>
+        <a:xfrm>
+          <a:off x="0" y="0"/>
+          <a:ext cx="0" cy="0"/>
+          <a:chOff x="0" y="0"/>
+          <a:chExt cx="0" cy="0"/>
+        </a:xfrm>
+      </p:grpSpPr>
+      <p:sp>
+        <p:nvSpPr>
+          <p:cNvPr id="4" name="Rectangle 3">
+            <a:extLst>
+              <a:ext uri="{FF2B5EF4-FFF2-40B4-BE49-F238E27FC236}">
+                <a16:creationId xmlns:a16="http://schemas.microsoft.com/office/drawing/2014/main" id="{47915B8B-6719-66E6-3F1F-014DB271DB52}"/>
+              </a:ext>
+            </a:extLst>
+          </p:cNvPr>
+          <p:cNvSpPr/>
+          <p:nvPr/>
+        </p:nvSpPr>
+        <p:spPr>
+          <a:xfrm>
+            <a:off x="433136" y="1481327"/>
+            <a:ext cx="8866183" cy="2013760"/>
+          </a:xfrm>
+          <a:custGeom>
+            <a:avLst/>
+            <a:gdLst>
+              <a:gd name="connsiteX0" fmla="*/ 0 w 8866183"/>
+              <a:gd name="connsiteY0" fmla="*/ 0 h 2013760"/>
+              <a:gd name="connsiteX1" fmla="*/ 502417 w 8866183"/>
+              <a:gd name="connsiteY1" fmla="*/ 0 h 2013760"/>
+              <a:gd name="connsiteX2" fmla="*/ 1093496 w 8866183"/>
+              <a:gd name="connsiteY2" fmla="*/ 0 h 2013760"/>
+              <a:gd name="connsiteX3" fmla="*/ 1684575 w 8866183"/>
+              <a:gd name="connsiteY3" fmla="*/ 0 h 2013760"/>
+              <a:gd name="connsiteX4" fmla="*/ 2452977 w 8866183"/>
+              <a:gd name="connsiteY4" fmla="*/ 0 h 2013760"/>
+              <a:gd name="connsiteX5" fmla="*/ 3044056 w 8866183"/>
+              <a:gd name="connsiteY5" fmla="*/ 0 h 2013760"/>
+              <a:gd name="connsiteX6" fmla="*/ 3635135 w 8866183"/>
+              <a:gd name="connsiteY6" fmla="*/ 0 h 2013760"/>
+              <a:gd name="connsiteX7" fmla="*/ 4226214 w 8866183"/>
+              <a:gd name="connsiteY7" fmla="*/ 0 h 2013760"/>
+              <a:gd name="connsiteX8" fmla="*/ 4817293 w 8866183"/>
+              <a:gd name="connsiteY8" fmla="*/ 0 h 2013760"/>
+              <a:gd name="connsiteX9" fmla="*/ 5585695 w 8866183"/>
+              <a:gd name="connsiteY9" fmla="*/ 0 h 2013760"/>
+              <a:gd name="connsiteX10" fmla="*/ 6265436 w 8866183"/>
+              <a:gd name="connsiteY10" fmla="*/ 0 h 2013760"/>
+              <a:gd name="connsiteX11" fmla="*/ 6590529 w 8866183"/>
+              <a:gd name="connsiteY11" fmla="*/ 0 h 2013760"/>
+              <a:gd name="connsiteX12" fmla="*/ 7270270 w 8866183"/>
+              <a:gd name="connsiteY12" fmla="*/ 0 h 2013760"/>
+              <a:gd name="connsiteX13" fmla="*/ 7950011 w 8866183"/>
+              <a:gd name="connsiteY13" fmla="*/ 0 h 2013760"/>
+              <a:gd name="connsiteX14" fmla="*/ 8866183 w 8866183"/>
+              <a:gd name="connsiteY14" fmla="*/ 0 h 2013760"/>
+              <a:gd name="connsiteX15" fmla="*/ 8866183 w 8866183"/>
+              <a:gd name="connsiteY15" fmla="*/ 443027 h 2013760"/>
+              <a:gd name="connsiteX16" fmla="*/ 8866183 w 8866183"/>
+              <a:gd name="connsiteY16" fmla="*/ 926330 h 2013760"/>
+              <a:gd name="connsiteX17" fmla="*/ 8866183 w 8866183"/>
+              <a:gd name="connsiteY17" fmla="*/ 1449907 h 2013760"/>
+              <a:gd name="connsiteX18" fmla="*/ 8866183 w 8866183"/>
+              <a:gd name="connsiteY18" fmla="*/ 2013760 h 2013760"/>
+              <a:gd name="connsiteX19" fmla="*/ 8541090 w 8866183"/>
+              <a:gd name="connsiteY19" fmla="*/ 2013760 h 2013760"/>
+              <a:gd name="connsiteX20" fmla="*/ 7772687 w 8866183"/>
+              <a:gd name="connsiteY20" fmla="*/ 2013760 h 2013760"/>
+              <a:gd name="connsiteX21" fmla="*/ 7092946 w 8866183"/>
+              <a:gd name="connsiteY21" fmla="*/ 2013760 h 2013760"/>
+              <a:gd name="connsiteX22" fmla="*/ 6413206 w 8866183"/>
+              <a:gd name="connsiteY22" fmla="*/ 2013760 h 2013760"/>
+              <a:gd name="connsiteX23" fmla="*/ 5733465 w 8866183"/>
+              <a:gd name="connsiteY23" fmla="*/ 2013760 h 2013760"/>
+              <a:gd name="connsiteX24" fmla="*/ 4965062 w 8866183"/>
+              <a:gd name="connsiteY24" fmla="*/ 2013760 h 2013760"/>
+              <a:gd name="connsiteX25" fmla="*/ 4551307 w 8866183"/>
+              <a:gd name="connsiteY25" fmla="*/ 2013760 h 2013760"/>
+              <a:gd name="connsiteX26" fmla="*/ 3960228 w 8866183"/>
+              <a:gd name="connsiteY26" fmla="*/ 2013760 h 2013760"/>
+              <a:gd name="connsiteX27" fmla="*/ 3280488 w 8866183"/>
+              <a:gd name="connsiteY27" fmla="*/ 2013760 h 2013760"/>
+              <a:gd name="connsiteX28" fmla="*/ 2866733 w 8866183"/>
+              <a:gd name="connsiteY28" fmla="*/ 2013760 h 2013760"/>
+              <a:gd name="connsiteX29" fmla="*/ 2275654 w 8866183"/>
+              <a:gd name="connsiteY29" fmla="*/ 2013760 h 2013760"/>
+              <a:gd name="connsiteX30" fmla="*/ 1595913 w 8866183"/>
+              <a:gd name="connsiteY30" fmla="*/ 2013760 h 2013760"/>
+              <a:gd name="connsiteX31" fmla="*/ 827510 w 8866183"/>
+              <a:gd name="connsiteY31" fmla="*/ 2013760 h 2013760"/>
+              <a:gd name="connsiteX32" fmla="*/ 502417 w 8866183"/>
+              <a:gd name="connsiteY32" fmla="*/ 2013760 h 2013760"/>
+              <a:gd name="connsiteX33" fmla="*/ 0 w 8866183"/>
+              <a:gd name="connsiteY33" fmla="*/ 2013760 h 2013760"/>
+              <a:gd name="connsiteX34" fmla="*/ 0 w 8866183"/>
+              <a:gd name="connsiteY34" fmla="*/ 1570733 h 2013760"/>
+              <a:gd name="connsiteX35" fmla="*/ 0 w 8866183"/>
+              <a:gd name="connsiteY35" fmla="*/ 1027018 h 2013760"/>
+              <a:gd name="connsiteX36" fmla="*/ 0 w 8866183"/>
+              <a:gd name="connsiteY36" fmla="*/ 583990 h 2013760"/>
+              <a:gd name="connsiteX37" fmla="*/ 0 w 8866183"/>
+              <a:gd name="connsiteY37" fmla="*/ 0 h 2013760"/>
+            </a:gdLst>
+            <a:ahLst/>
+            <a:cxnLst>
+              <a:cxn ang="0">
+                <a:pos x="connsiteX0" y="connsiteY0"/>
+              </a:cxn>
+              <a:cxn ang="0">
+                <a:pos x="connsiteX1" y="connsiteY1"/>
+              </a:cxn>
+              <a:cxn ang="0">
+                <a:pos x="connsiteX2" y="connsiteY2"/>
+              </a:cxn>
+              <a:cxn ang="0">
+                <a:pos x="connsiteX3" y="connsiteY3"/>
+              </a:cxn>
+              <a:cxn ang="0">
+                <a:pos x="connsiteX4" y="connsiteY4"/>
+              </a:cxn>
+              <a:cxn ang="0">
+                <a:pos x="connsiteX5" y="connsiteY5"/>
+              </a:cxn>
+              <a:cxn ang="0">
+                <a:pos x="connsiteX6" y="connsiteY6"/>
+              </a:cxn>
+              <a:cxn ang="0">
+                <a:pos x="connsiteX7" y="connsiteY7"/>
+              </a:cxn>
+              <a:cxn ang="0">
+                <a:pos x="connsiteX8" y="connsiteY8"/>
+              </a:cxn>
+              <a:cxn ang="0">
+                <a:pos x="connsiteX9" y="connsiteY9"/>
+              </a:cxn>
+              <a:cxn ang="0">
+                <a:pos x="connsiteX10" y="connsiteY10"/>
+              </a:cxn>
+              <a:cxn ang="0">
+                <a:pos x="connsiteX11" y="connsiteY11"/>
+              </a:cxn>
+              <a:cxn ang="0">
+                <a:pos x="connsiteX12" y="connsiteY12"/>
+              </a:cxn>
+              <a:cxn ang="0">
+                <a:pos x="connsiteX13" y="connsiteY13"/>
+              </a:cxn>
+              <a:cxn ang="0">
+                <a:pos x="connsiteX14" y="connsiteY14"/>
+              </a:cxn>
+              <a:cxn ang="0">
+                <a:pos x="connsiteX15" y="connsiteY15"/>
+              </a:cxn>
+              <a:cxn ang="0">
+                <a:pos x="connsiteX16" y="connsiteY16"/>
+              </a:cxn>
+              <a:cxn ang="0">
+                <a:pos x="connsiteX17" y="connsiteY17"/>
+              </a:cxn>
+              <a:cxn ang="0">
+                <a:pos x="connsiteX18" y="connsiteY18"/>
+              </a:cxn>
+              <a:cxn ang="0">
+                <a:pos x="connsiteX19" y="connsiteY19"/>
+              </a:cxn>
+              <a:cxn ang="0">
+                <a:pos x="connsiteX20" y="connsiteY20"/>
+              </a:cxn>
+              <a:cxn ang="0">
+                <a:pos x="connsiteX21" y="connsiteY21"/>
+              </a:cxn>
+              <a:cxn ang="0">
+                <a:pos x="connsiteX22" y="connsiteY22"/>
+              </a:cxn>
+              <a:cxn ang="0">
+                <a:pos x="connsiteX23" y="connsiteY23"/>
+              </a:cxn>
+              <a:cxn ang="0">
+                <a:pos x="connsiteX24" y="connsiteY24"/>
+              </a:cxn>
+              <a:cxn ang="0">
+                <a:pos x="connsiteX25" y="connsiteY25"/>
+              </a:cxn>
+              <a:cxn ang="0">
+                <a:pos x="connsiteX26" y="connsiteY26"/>
+              </a:cxn>
+              <a:cxn ang="0">
+                <a:pos x="connsiteX27" y="connsiteY27"/>
+              </a:cxn>
+              <a:cxn ang="0">
+                <a:pos x="connsiteX28" y="connsiteY28"/>
+              </a:cxn>
+              <a:cxn ang="0">
+                <a:pos x="connsiteX29" y="connsiteY29"/>
+              </a:cxn>
+              <a:cxn ang="0">
+                <a:pos x="connsiteX30" y="connsiteY30"/>
+              </a:cxn>
+              <a:cxn ang="0">
+                <a:pos x="connsiteX31" y="connsiteY31"/>
+              </a:cxn>
+              <a:cxn ang="0">
+                <a:pos x="connsiteX32" y="connsiteY32"/>
+              </a:cxn>
+              <a:cxn ang="0">
+                <a:pos x="connsiteX33" y="connsiteY33"/>
+              </a:cxn>
+              <a:cxn ang="0">
+                <a:pos x="connsiteX34" y="connsiteY34"/>
+              </a:cxn>
+              <a:cxn ang="0">
+                <a:pos x="connsiteX35" y="connsiteY35"/>
+              </a:cxn>
+              <a:cxn ang="0">
+                <a:pos x="connsiteX36" y="connsiteY36"/>
+              </a:cxn>
+              <a:cxn ang="0">
+                <a:pos x="connsiteX37" y="connsiteY37"/>
+              </a:cxn>
+            </a:cxnLst>
+            <a:rect l="l" t="t" r="r" b="b"/>
+            <a:pathLst>
+              <a:path w="8866183" h="2013760" fill="none" extrusionOk="0">
+                <a:moveTo>
+                  <a:pt x="0" y="0"/>
+                </a:moveTo>
+                <a:cubicBezTo>
+                  <a:pt x="154593" y="-10249"/>
+                  <a:pt x="346300" y="24713"/>
+                  <a:pt x="502417" y="0"/>
+                </a:cubicBezTo>
+                <a:cubicBezTo>
+                  <a:pt x="658534" y="-24713"/>
+                  <a:pt x="855723" y="3112"/>
+                  <a:pt x="1093496" y="0"/>
+                </a:cubicBezTo>
+                <a:cubicBezTo>
+                  <a:pt x="1331269" y="-3112"/>
+                  <a:pt x="1443343" y="22955"/>
+                  <a:pt x="1684575" y="0"/>
+                </a:cubicBezTo>
+                <a:cubicBezTo>
+                  <a:pt x="1925807" y="-22955"/>
+                  <a:pt x="2209372" y="16466"/>
+                  <a:pt x="2452977" y="0"/>
+                </a:cubicBezTo>
+                <a:cubicBezTo>
+                  <a:pt x="2696582" y="-16466"/>
+                  <a:pt x="2889761" y="48819"/>
+                  <a:pt x="3044056" y="0"/>
+                </a:cubicBezTo>
+                <a:cubicBezTo>
+                  <a:pt x="3198351" y="-48819"/>
+                  <a:pt x="3457437" y="22380"/>
+                  <a:pt x="3635135" y="0"/>
+                </a:cubicBezTo>
+                <a:cubicBezTo>
+                  <a:pt x="3812833" y="-22380"/>
+                  <a:pt x="3934481" y="70846"/>
+                  <a:pt x="4226214" y="0"/>
+                </a:cubicBezTo>
+                <a:cubicBezTo>
+                  <a:pt x="4517947" y="-70846"/>
+                  <a:pt x="4632779" y="25413"/>
+                  <a:pt x="4817293" y="0"/>
+                </a:cubicBezTo>
+                <a:cubicBezTo>
+                  <a:pt x="5001807" y="-25413"/>
+                  <a:pt x="5358023" y="38261"/>
+                  <a:pt x="5585695" y="0"/>
+                </a:cubicBezTo>
+                <a:cubicBezTo>
+                  <a:pt x="5813367" y="-38261"/>
+                  <a:pt x="6066646" y="52975"/>
+                  <a:pt x="6265436" y="0"/>
+                </a:cubicBezTo>
+                <a:cubicBezTo>
+                  <a:pt x="6464226" y="-52975"/>
+                  <a:pt x="6458890" y="36045"/>
+                  <a:pt x="6590529" y="0"/>
+                </a:cubicBezTo>
+                <a:cubicBezTo>
+                  <a:pt x="6722168" y="-36045"/>
+                  <a:pt x="6976688" y="24415"/>
+                  <a:pt x="7270270" y="0"/>
+                </a:cubicBezTo>
+                <a:cubicBezTo>
+                  <a:pt x="7563852" y="-24415"/>
+                  <a:pt x="7799596" y="14603"/>
+                  <a:pt x="7950011" y="0"/>
+                </a:cubicBezTo>
+                <a:cubicBezTo>
+                  <a:pt x="8100426" y="-14603"/>
+                  <a:pt x="8416115" y="87800"/>
+                  <a:pt x="8866183" y="0"/>
+                </a:cubicBezTo>
+                <a:cubicBezTo>
+                  <a:pt x="8868781" y="191472"/>
+                  <a:pt x="8822913" y="273921"/>
+                  <a:pt x="8866183" y="443027"/>
+                </a:cubicBezTo>
+                <a:cubicBezTo>
+                  <a:pt x="8909453" y="612133"/>
+                  <a:pt x="8813195" y="821806"/>
+                  <a:pt x="8866183" y="926330"/>
+                </a:cubicBezTo>
+                <a:cubicBezTo>
+                  <a:pt x="8919171" y="1030854"/>
+                  <a:pt x="8833876" y="1332275"/>
+                  <a:pt x="8866183" y="1449907"/>
+                </a:cubicBezTo>
+                <a:cubicBezTo>
+                  <a:pt x="8898490" y="1567539"/>
+                  <a:pt x="8799580" y="1844997"/>
+                  <a:pt x="8866183" y="2013760"/>
+                </a:cubicBezTo>
+                <a:cubicBezTo>
+                  <a:pt x="8764332" y="2035574"/>
+                  <a:pt x="8652228" y="2009931"/>
+                  <a:pt x="8541090" y="2013760"/>
+                </a:cubicBezTo>
+                <a:cubicBezTo>
+                  <a:pt x="8429952" y="2017589"/>
+                  <a:pt x="7955674" y="1935934"/>
+                  <a:pt x="7772687" y="2013760"/>
+                </a:cubicBezTo>
+                <a:cubicBezTo>
+                  <a:pt x="7589700" y="2091586"/>
+                  <a:pt x="7417540" y="1951866"/>
+                  <a:pt x="7092946" y="2013760"/>
+                </a:cubicBezTo>
+                <a:cubicBezTo>
+                  <a:pt x="6768352" y="2075654"/>
+                  <a:pt x="6601480" y="1962616"/>
+                  <a:pt x="6413206" y="2013760"/>
+                </a:cubicBezTo>
+                <a:cubicBezTo>
+                  <a:pt x="6224932" y="2064904"/>
+                  <a:pt x="5945472" y="2007829"/>
+                  <a:pt x="5733465" y="2013760"/>
+                </a:cubicBezTo>
+                <a:cubicBezTo>
+                  <a:pt x="5521458" y="2019691"/>
+                  <a:pt x="5317621" y="1931450"/>
+                  <a:pt x="4965062" y="2013760"/>
+                </a:cubicBezTo>
+                <a:cubicBezTo>
+                  <a:pt x="4612503" y="2096070"/>
+                  <a:pt x="4756180" y="1971095"/>
+                  <a:pt x="4551307" y="2013760"/>
+                </a:cubicBezTo>
+                <a:cubicBezTo>
+                  <a:pt x="4346434" y="2056425"/>
+                  <a:pt x="4231966" y="1984456"/>
+                  <a:pt x="3960228" y="2013760"/>
+                </a:cubicBezTo>
+                <a:cubicBezTo>
+                  <a:pt x="3688490" y="2043064"/>
+                  <a:pt x="3483388" y="2005725"/>
+                  <a:pt x="3280488" y="2013760"/>
+                </a:cubicBezTo>
+                <a:cubicBezTo>
+                  <a:pt x="3077588" y="2021795"/>
+                  <a:pt x="3036457" y="1968360"/>
+                  <a:pt x="2866733" y="2013760"/>
+                </a:cubicBezTo>
+                <a:cubicBezTo>
+                  <a:pt x="2697010" y="2059160"/>
+                  <a:pt x="2476634" y="2006046"/>
+                  <a:pt x="2275654" y="2013760"/>
+                </a:cubicBezTo>
+                <a:cubicBezTo>
+                  <a:pt x="2074674" y="2021474"/>
+                  <a:pt x="1857456" y="1976127"/>
+                  <a:pt x="1595913" y="2013760"/>
+                </a:cubicBezTo>
+                <a:cubicBezTo>
+                  <a:pt x="1334370" y="2051393"/>
+                  <a:pt x="1029555" y="2010083"/>
+                  <a:pt x="827510" y="2013760"/>
+                </a:cubicBezTo>
+                <a:cubicBezTo>
+                  <a:pt x="625465" y="2017437"/>
+                  <a:pt x="582691" y="1976217"/>
+                  <a:pt x="502417" y="2013760"/>
+                </a:cubicBezTo>
+                <a:cubicBezTo>
+                  <a:pt x="422143" y="2051303"/>
+                  <a:pt x="138314" y="1981416"/>
+                  <a:pt x="0" y="2013760"/>
+                </a:cubicBezTo>
+                <a:cubicBezTo>
+                  <a:pt x="-9349" y="1845953"/>
+                  <a:pt x="440" y="1680529"/>
+                  <a:pt x="0" y="1570733"/>
+                </a:cubicBezTo>
+                <a:cubicBezTo>
+                  <a:pt x="-440" y="1460937"/>
+                  <a:pt x="2363" y="1176338"/>
+                  <a:pt x="0" y="1027018"/>
+                </a:cubicBezTo>
+                <a:cubicBezTo>
+                  <a:pt x="-2363" y="877699"/>
+                  <a:pt x="33890" y="758914"/>
+                  <a:pt x="0" y="583990"/>
+                </a:cubicBezTo>
+                <a:cubicBezTo>
+                  <a:pt x="-33890" y="409066"/>
+                  <a:pt x="23977" y="160557"/>
+                  <a:pt x="0" y="0"/>
+                </a:cubicBezTo>
+                <a:close/>
+              </a:path>
+              <a:path w="8866183" h="2013760" stroke="0" extrusionOk="0">
+                <a:moveTo>
+                  <a:pt x="0" y="0"/>
+                </a:moveTo>
+                <a:cubicBezTo>
+                  <a:pt x="285616" y="-25692"/>
+                  <a:pt x="413557" y="33354"/>
+                  <a:pt x="768403" y="0"/>
+                </a:cubicBezTo>
+                <a:cubicBezTo>
+                  <a:pt x="1123249" y="-33354"/>
+                  <a:pt x="970185" y="25333"/>
+                  <a:pt x="1093496" y="0"/>
+                </a:cubicBezTo>
+                <a:cubicBezTo>
+                  <a:pt x="1216807" y="-25333"/>
+                  <a:pt x="1409654" y="3907"/>
+                  <a:pt x="1507251" y="0"/>
+                </a:cubicBezTo>
+                <a:cubicBezTo>
+                  <a:pt x="1604848" y="-3907"/>
+                  <a:pt x="2041975" y="44052"/>
+                  <a:pt x="2275654" y="0"/>
+                </a:cubicBezTo>
+                <a:cubicBezTo>
+                  <a:pt x="2509333" y="-44052"/>
+                  <a:pt x="2514927" y="31139"/>
+                  <a:pt x="2689409" y="0"/>
+                </a:cubicBezTo>
+                <a:cubicBezTo>
+                  <a:pt x="2863891" y="-31139"/>
+                  <a:pt x="3095439" y="51339"/>
+                  <a:pt x="3457811" y="0"/>
+                </a:cubicBezTo>
+                <a:cubicBezTo>
+                  <a:pt x="3820183" y="-51339"/>
+                  <a:pt x="3938918" y="14236"/>
+                  <a:pt x="4226214" y="0"/>
+                </a:cubicBezTo>
+                <a:cubicBezTo>
+                  <a:pt x="4513510" y="-14236"/>
+                  <a:pt x="4757708" y="29963"/>
+                  <a:pt x="4994616" y="0"/>
+                </a:cubicBezTo>
+                <a:cubicBezTo>
+                  <a:pt x="5231524" y="-29963"/>
+                  <a:pt x="5306661" y="59873"/>
+                  <a:pt x="5497033" y="0"/>
+                </a:cubicBezTo>
+                <a:cubicBezTo>
+                  <a:pt x="5687405" y="-59873"/>
+                  <a:pt x="5761866" y="21348"/>
+                  <a:pt x="5910789" y="0"/>
+                </a:cubicBezTo>
+                <a:cubicBezTo>
+                  <a:pt x="6059712" y="-21348"/>
+                  <a:pt x="6160664" y="17412"/>
+                  <a:pt x="6324544" y="0"/>
+                </a:cubicBezTo>
+                <a:cubicBezTo>
+                  <a:pt x="6488425" y="-17412"/>
+                  <a:pt x="6885867" y="70023"/>
+                  <a:pt x="7092946" y="0"/>
+                </a:cubicBezTo>
+                <a:cubicBezTo>
+                  <a:pt x="7300025" y="-70023"/>
+                  <a:pt x="7352816" y="25307"/>
+                  <a:pt x="7418040" y="0"/>
+                </a:cubicBezTo>
+                <a:cubicBezTo>
+                  <a:pt x="7483264" y="-25307"/>
+                  <a:pt x="7741600" y="46399"/>
+                  <a:pt x="7920457" y="0"/>
+                </a:cubicBezTo>
+                <a:cubicBezTo>
+                  <a:pt x="8099314" y="-46399"/>
+                  <a:pt x="8207844" y="30841"/>
+                  <a:pt x="8334212" y="0"/>
+                </a:cubicBezTo>
+                <a:cubicBezTo>
+                  <a:pt x="8460581" y="-30841"/>
+                  <a:pt x="8606117" y="17554"/>
+                  <a:pt x="8866183" y="0"/>
+                </a:cubicBezTo>
+                <a:cubicBezTo>
+                  <a:pt x="8868867" y="142933"/>
+                  <a:pt x="8813681" y="292845"/>
+                  <a:pt x="8866183" y="443027"/>
+                </a:cubicBezTo>
+                <a:cubicBezTo>
+                  <a:pt x="8918685" y="593209"/>
+                  <a:pt x="8841639" y="758513"/>
+                  <a:pt x="8866183" y="986742"/>
+                </a:cubicBezTo>
+                <a:cubicBezTo>
+                  <a:pt x="8890727" y="1214972"/>
+                  <a:pt x="8842299" y="1217269"/>
+                  <a:pt x="8866183" y="1429770"/>
+                </a:cubicBezTo>
+                <a:cubicBezTo>
+                  <a:pt x="8890067" y="1642271"/>
+                  <a:pt x="8852803" y="1727656"/>
+                  <a:pt x="8866183" y="2013760"/>
+                </a:cubicBezTo>
+                <a:cubicBezTo>
+                  <a:pt x="8729427" y="2070436"/>
+                  <a:pt x="8601758" y="1983592"/>
+                  <a:pt x="8363766" y="2013760"/>
+                </a:cubicBezTo>
+                <a:cubicBezTo>
+                  <a:pt x="8125774" y="2043928"/>
+                  <a:pt x="7927018" y="2011663"/>
+                  <a:pt x="7684025" y="2013760"/>
+                </a:cubicBezTo>
+                <a:cubicBezTo>
+                  <a:pt x="7441032" y="2015857"/>
+                  <a:pt x="7287314" y="1975653"/>
+                  <a:pt x="7181608" y="2013760"/>
+                </a:cubicBezTo>
+                <a:cubicBezTo>
+                  <a:pt x="7075902" y="2051867"/>
+                  <a:pt x="6946986" y="1982770"/>
+                  <a:pt x="6767853" y="2013760"/>
+                </a:cubicBezTo>
+                <a:cubicBezTo>
+                  <a:pt x="6588720" y="2044750"/>
+                  <a:pt x="6426696" y="1959921"/>
+                  <a:pt x="6265436" y="2013760"/>
+                </a:cubicBezTo>
+                <a:cubicBezTo>
+                  <a:pt x="6104176" y="2067599"/>
+                  <a:pt x="6007483" y="1997247"/>
+                  <a:pt x="5940343" y="2013760"/>
+                </a:cubicBezTo>
+                <a:cubicBezTo>
+                  <a:pt x="5873203" y="2030273"/>
+                  <a:pt x="5610422" y="1958911"/>
+                  <a:pt x="5437926" y="2013760"/>
+                </a:cubicBezTo>
+                <a:cubicBezTo>
+                  <a:pt x="5265430" y="2068609"/>
+                  <a:pt x="5039495" y="2003398"/>
+                  <a:pt x="4935509" y="2013760"/>
+                </a:cubicBezTo>
+                <a:cubicBezTo>
+                  <a:pt x="4831523" y="2024122"/>
+                  <a:pt x="4724752" y="1986435"/>
+                  <a:pt x="4521753" y="2013760"/>
+                </a:cubicBezTo>
+                <a:cubicBezTo>
+                  <a:pt x="4318754" y="2041085"/>
+                  <a:pt x="3991007" y="1962430"/>
+                  <a:pt x="3842013" y="2013760"/>
+                </a:cubicBezTo>
+                <a:cubicBezTo>
+                  <a:pt x="3693019" y="2065090"/>
+                  <a:pt x="3615230" y="2011378"/>
+                  <a:pt x="3428257" y="2013760"/>
+                </a:cubicBezTo>
+                <a:cubicBezTo>
+                  <a:pt x="3241284" y="2016142"/>
+                  <a:pt x="2961672" y="1985825"/>
+                  <a:pt x="2837179" y="2013760"/>
+                </a:cubicBezTo>
+                <a:cubicBezTo>
+                  <a:pt x="2712686" y="2041695"/>
+                  <a:pt x="2437462" y="1994469"/>
+                  <a:pt x="2246100" y="2013760"/>
+                </a:cubicBezTo>
+                <a:cubicBezTo>
+                  <a:pt x="2054738" y="2033051"/>
+                  <a:pt x="2035824" y="1977401"/>
+                  <a:pt x="1921006" y="2013760"/>
+                </a:cubicBezTo>
+                <a:cubicBezTo>
+                  <a:pt x="1806188" y="2050119"/>
+                  <a:pt x="1725597" y="2013442"/>
+                  <a:pt x="1595913" y="2013760"/>
+                </a:cubicBezTo>
+                <a:cubicBezTo>
+                  <a:pt x="1466229" y="2014078"/>
+                  <a:pt x="1332402" y="1987111"/>
+                  <a:pt x="1182158" y="2013760"/>
+                </a:cubicBezTo>
+                <a:cubicBezTo>
+                  <a:pt x="1031914" y="2040409"/>
+                  <a:pt x="668574" y="1937902"/>
+                  <a:pt x="502417" y="2013760"/>
+                </a:cubicBezTo>
+                <a:cubicBezTo>
+                  <a:pt x="336260" y="2089618"/>
+                  <a:pt x="237268" y="1997828"/>
+                  <a:pt x="0" y="2013760"/>
+                </a:cubicBezTo>
+                <a:cubicBezTo>
+                  <a:pt x="-2348" y="1840923"/>
+                  <a:pt x="43922" y="1694292"/>
+                  <a:pt x="0" y="1510320"/>
+                </a:cubicBezTo>
+                <a:cubicBezTo>
+                  <a:pt x="-43922" y="1326348"/>
+                  <a:pt x="30699" y="1152344"/>
+                  <a:pt x="0" y="1027018"/>
+                </a:cubicBezTo>
+                <a:cubicBezTo>
+                  <a:pt x="-30699" y="901692"/>
+                  <a:pt x="31654" y="627877"/>
+                  <a:pt x="0" y="503440"/>
+                </a:cubicBezTo>
+                <a:cubicBezTo>
+                  <a:pt x="-31654" y="379003"/>
+                  <a:pt x="54504" y="183645"/>
+                  <a:pt x="0" y="0"/>
+                </a:cubicBezTo>
+                <a:close/>
+              </a:path>
+            </a:pathLst>
+          </a:custGeom>
+          <a:solidFill>
+            <a:srgbClr val="92D050"/>
+          </a:solidFill>
+          <a:ln>
+            <a:extLst>
+              <a:ext uri="{C807C97D-BFC1-408E-A445-0C87EB9F89A2}">
+                <ask:lineSketchStyleProps xmlns:ask="http://schemas.microsoft.com/office/drawing/2018/sketchyshapes" sd="1715687224">
+                  <a:prstGeom prst="rect">
+                    <a:avLst/>
+                  </a:prstGeom>
+                  <ask:type>
+                    <ask:lineSketchScribble/>
+                  </ask:type>
+                </ask:lineSketchStyleProps>
+              </a:ext>
+            </a:extLst>
+          </a:ln>
+        </p:spPr>
+        <p:style>
+          <a:lnRef idx="2">
+            <a:schemeClr val="accent1">
+              <a:shade val="15000"/>
+            </a:schemeClr>
+          </a:lnRef>
+          <a:fillRef idx="1">
+            <a:schemeClr val="accent1"/>
+          </a:fillRef>
+          <a:effectRef idx="0">
+            <a:schemeClr val="accent1"/>
+          </a:effectRef>
+          <a:fontRef idx="minor">
+            <a:schemeClr val="lt1"/>
+          </a:fontRef>
+        </p:style>
+        <p:txBody>
+          <a:bodyPr rtlCol="0" anchor="ctr"/>
+          <a:lstStyle/>
+          <a:p>
+            <a:pPr algn="ctr"/>
+            <a:endParaRPr lang="fr-FR"/>
+          </a:p>
+        </p:txBody>
+      </p:sp>
+      <p:sp>
+        <p:nvSpPr>
+          <p:cNvPr id="2" name="Título 1">
+            <a:extLst>
+              <a:ext uri="{FF2B5EF4-FFF2-40B4-BE49-F238E27FC236}">
+                <a16:creationId xmlns:a16="http://schemas.microsoft.com/office/drawing/2014/main" id="{C2745677-F836-D5CE-6178-AD3C5A01D790}"/>
+              </a:ext>
+            </a:extLst>
+          </p:cNvPr>
+          <p:cNvSpPr>
+            <a:spLocks noGrp="1"/>
+          </p:cNvSpPr>
+          <p:nvPr>
+            <p:ph type="title"/>
+          </p:nvPr>
+        </p:nvSpPr>
+        <p:spPr/>
+        <p:txBody>
+          <a:bodyPr/>
+          <a:lstStyle/>
+          <a:p>
+            <a:r>
+              <a:rPr lang="en-US" dirty="0"/>
+              <a:t>Status vs. Expected Charter Item</a:t>
+            </a:r>
+            <a:endParaRPr lang="en-US" noProof="0" dirty="0"/>
+          </a:p>
+        </p:txBody>
+      </p:sp>
+      <p:sp>
+        <p:nvSpPr>
+          <p:cNvPr id="3" name="Marcador de contenido 2">
+            <a:extLst>
+              <a:ext uri="{FF2B5EF4-FFF2-40B4-BE49-F238E27FC236}">
+                <a16:creationId xmlns:a16="http://schemas.microsoft.com/office/drawing/2014/main" id="{8A7BAFF8-4E53-1413-263B-7F94C9A1F28C}"/>
+              </a:ext>
+            </a:extLst>
+          </p:cNvPr>
+          <p:cNvSpPr>
+            <a:spLocks noGrp="1"/>
+          </p:cNvSpPr>
+          <p:nvPr>
+            <p:ph idx="1"/>
+          </p:nvPr>
+        </p:nvSpPr>
+        <p:spPr>
+          <a:xfrm>
+            <a:off x="838200" y="1481327"/>
+            <a:ext cx="8056057" cy="5159771"/>
+          </a:xfrm>
+        </p:spPr>
+        <p:txBody>
+          <a:bodyPr/>
+          <a:lstStyle/>
+          <a:p>
+            <a:r>
+              <a:rPr lang="en-US" sz="3200" noProof="0" dirty="0"/>
+              <a:t>List of </a:t>
+            </a:r>
+            <a:r>
+              <a:rPr lang="en-US" sz="3200" b="1" i="1" noProof="0" dirty="0">
+                <a:solidFill>
+                  <a:srgbClr val="00B0F0"/>
+                </a:solidFill>
+              </a:rPr>
+              <a:t>updated operators</a:t>
+            </a:r>
+            <a:r>
+              <a:rPr lang="en-US" sz="3200" noProof="0" dirty="0"/>
+              <a:t>’ requirements is </a:t>
+            </a:r>
+            <a:r>
+              <a:rPr lang="en-US" sz="3200" b="1" i="1" noProof="0" dirty="0">
+                <a:solidFill>
+                  <a:srgbClr val="00B0F0"/>
+                </a:solidFill>
+              </a:rPr>
+              <a:t>stable</a:t>
+            </a:r>
+          </a:p>
+          <a:p>
+            <a:r>
+              <a:rPr lang="en-US" sz="3200" noProof="0" dirty="0"/>
+              <a:t>Operators’ </a:t>
+            </a:r>
+            <a:r>
+              <a:rPr lang="en-US" sz="3200" b="1" i="1" noProof="0" dirty="0">
+                <a:solidFill>
+                  <a:srgbClr val="00B0F0"/>
+                </a:solidFill>
+              </a:rPr>
+              <a:t>prioritization</a:t>
+            </a:r>
+            <a:r>
+              <a:rPr lang="en-US" sz="3200" noProof="0" dirty="0">
+                <a:solidFill>
+                  <a:srgbClr val="00B0F0"/>
+                </a:solidFill>
+              </a:rPr>
+              <a:t> </a:t>
+            </a:r>
+            <a:r>
+              <a:rPr lang="en-US" sz="3200" noProof="0" dirty="0"/>
+              <a:t>of that list (strong, nice-to-have) is </a:t>
+            </a:r>
+            <a:r>
+              <a:rPr lang="en-US" sz="3200" b="1" i="1" noProof="0" dirty="0">
+                <a:solidFill>
+                  <a:srgbClr val="00B0F0"/>
+                </a:solidFill>
+              </a:rPr>
+              <a:t>stable</a:t>
+            </a:r>
+            <a:r>
+              <a:rPr lang="en-US" sz="3200" noProof="0" dirty="0"/>
+              <a:t> as well</a:t>
+            </a:r>
+          </a:p>
+          <a:p>
+            <a:r>
+              <a:rPr lang="en-US" sz="3200" dirty="0">
+                <a:solidFill>
+                  <a:schemeClr val="bg1">
+                    <a:lumMod val="85000"/>
+                  </a:schemeClr>
+                </a:solidFill>
+              </a:rPr>
+              <a:t>These requirements need to be balanced to also take into account other views (vendors, etc.): collaborative requirements (</a:t>
+            </a:r>
+            <a:r>
+              <a:rPr lang="en-US" sz="3200" b="1" i="1" dirty="0">
+                <a:solidFill>
+                  <a:schemeClr val="bg1">
+                    <a:lumMod val="85000"/>
+                  </a:schemeClr>
+                </a:solidFill>
+              </a:rPr>
+              <a:t>In progress</a:t>
+            </a:r>
+            <a:r>
+              <a:rPr lang="en-US" sz="3200" dirty="0">
+                <a:solidFill>
+                  <a:schemeClr val="bg1">
+                    <a:lumMod val="85000"/>
+                  </a:schemeClr>
+                </a:solidFill>
+              </a:rPr>
+              <a:t>)</a:t>
+            </a:r>
+          </a:p>
+          <a:p>
+            <a:pPr lvl="1"/>
+            <a:r>
+              <a:rPr lang="en-US" sz="2800" dirty="0">
+                <a:solidFill>
+                  <a:schemeClr val="bg1">
+                    <a:lumMod val="85000"/>
+                  </a:schemeClr>
+                </a:solidFill>
+              </a:rPr>
+              <a:t>Build a very few set of actionable items that will be the focus of work in the IETF </a:t>
+            </a:r>
+          </a:p>
+          <a:p>
+            <a:pPr lvl="1"/>
+            <a:r>
+              <a:rPr lang="en-US" sz="2800" noProof="0" dirty="0">
+                <a:solidFill>
+                  <a:schemeClr val="bg1">
+                    <a:lumMod val="85000"/>
+                  </a:schemeClr>
+                </a:solidFill>
+              </a:rPr>
+              <a:t>Actionable by the IETF as a whole, including WGs, ADs, etc. Not specifically, NMOP</a:t>
+            </a:r>
+          </a:p>
+          <a:p>
+            <a:pPr lvl="1"/>
+            <a:endParaRPr lang="en-US" sz="2800" noProof="0" dirty="0"/>
+          </a:p>
+        </p:txBody>
+      </p:sp>
+      <p:sp>
+        <p:nvSpPr>
+          <p:cNvPr id="6" name="Marcador de número de diapositiva 5">
+            <a:extLst>
+              <a:ext uri="{FF2B5EF4-FFF2-40B4-BE49-F238E27FC236}">
+                <a16:creationId xmlns:a16="http://schemas.microsoft.com/office/drawing/2014/main" id="{EF48976B-D433-A055-5E67-39E614C7407E}"/>
+              </a:ext>
+            </a:extLst>
+          </p:cNvPr>
+          <p:cNvSpPr>
+            <a:spLocks noGrp="1"/>
+          </p:cNvSpPr>
+          <p:nvPr>
+            <p:ph type="sldNum" sz="quarter" idx="12"/>
+          </p:nvPr>
+        </p:nvSpPr>
+        <p:spPr/>
+        <p:txBody>
+          <a:bodyPr/>
+          <a:lstStyle/>
+          <a:p>
+            <a:pPr>
+              <a:defRPr/>
+            </a:pPr>
+            <a:fld id="{54AB3086-DE1C-4E19-8CD7-9E76252A0DD1}" type="slidenum">
+              <a:rPr lang="en-US" noProof="0" smtClean="0"/>
+              <a:pPr>
+                <a:defRPr/>
+              </a:pPr>
+              <a:t>3</a:t>
+            </a:fld>
+            <a:endParaRPr lang="en-US" noProof="0" dirty="0"/>
+          </a:p>
+        </p:txBody>
+      </p:sp>
+      <p:sp>
+        <p:nvSpPr>
+          <p:cNvPr id="7" name="Marcador de número de diapositiva 5">
+            <a:extLst>
+              <a:ext uri="{FF2B5EF4-FFF2-40B4-BE49-F238E27FC236}">
+                <a16:creationId xmlns:a16="http://schemas.microsoft.com/office/drawing/2014/main" id="{52E1A7A4-D438-F1D6-DB8F-01B136983329}"/>
+              </a:ext>
+            </a:extLst>
+          </p:cNvPr>
+          <p:cNvSpPr txBox="1">
+            <a:spLocks/>
+          </p:cNvSpPr>
+          <p:nvPr/>
+        </p:nvSpPr>
+        <p:spPr>
+          <a:xfrm>
+            <a:off x="8610600" y="6356350"/>
+            <a:ext cx="2743200" cy="365125"/>
+          </a:xfrm>
+          <a:prstGeom prst="rect">
+            <a:avLst/>
+          </a:prstGeom>
+        </p:spPr>
+        <p:txBody>
+          <a:bodyPr vert="horz" lIns="91440" tIns="45720" rIns="91440" bIns="45720" rtlCol="0" anchor="ctr"/>
+          <a:lstStyle>
+            <a:defPPr>
+              <a:defRPr lang="es-ES"/>
+            </a:defPPr>
+            <a:lvl1pPr marL="0" algn="r" defTabSz="914400" rtl="0" eaLnBrk="1" fontAlgn="auto" latinLnBrk="0" hangingPunct="1">
+              <a:spcBef>
+                <a:spcPts val="0"/>
+              </a:spcBef>
+              <a:spcAft>
+                <a:spcPts val="0"/>
+              </a:spcAft>
+              <a:defRPr sz="1200" kern="1200">
+                <a:solidFill>
+                  <a:schemeClr val="tx1">
+                    <a:tint val="75000"/>
+                  </a:schemeClr>
+                </a:solidFill>
+                <a:latin typeface="+mn-lt"/>
+                <a:ea typeface="+mn-ea"/>
+                <a:cs typeface="+mn-cs"/>
+              </a:defRPr>
+            </a:lvl1pPr>
+            <a:lvl2pPr marL="457200" algn="l" defTabSz="914400" rtl="0" eaLnBrk="1" latinLnBrk="0" hangingPunct="1">
+              <a:defRPr sz="1800" kern="1200">
+                <a:solidFill>
+                  <a:schemeClr val="tx1"/>
+                </a:solidFill>
+                <a:latin typeface="+mn-lt"/>
+                <a:ea typeface="+mn-ea"/>
+                <a:cs typeface="+mn-cs"/>
+              </a:defRPr>
+            </a:lvl2pPr>
+            <a:lvl3pPr marL="914400" algn="l" defTabSz="914400" rtl="0" eaLnBrk="1" latinLnBrk="0" hangingPunct="1">
+              <a:defRPr sz="1800" kern="1200">
+                <a:solidFill>
+                  <a:schemeClr val="tx1"/>
+                </a:solidFill>
+                <a:latin typeface="+mn-lt"/>
+                <a:ea typeface="+mn-ea"/>
+                <a:cs typeface="+mn-cs"/>
+              </a:defRPr>
+            </a:lvl3pPr>
+            <a:lvl4pPr marL="1371600" algn="l" defTabSz="914400" rtl="0" eaLnBrk="1" latinLnBrk="0" hangingPunct="1">
+              <a:defRPr sz="1800" kern="1200">
+                <a:solidFill>
+                  <a:schemeClr val="tx1"/>
+                </a:solidFill>
+                <a:latin typeface="+mn-lt"/>
+                <a:ea typeface="+mn-ea"/>
+                <a:cs typeface="+mn-cs"/>
+              </a:defRPr>
+            </a:lvl4pPr>
+            <a:lvl5pPr marL="1828800" algn="l" defTabSz="914400" rtl="0" eaLnBrk="1" latinLnBrk="0" hangingPunct="1">
+              <a:defRPr sz="1800" kern="1200">
+                <a:solidFill>
+                  <a:schemeClr val="tx1"/>
+                </a:solidFill>
+                <a:latin typeface="+mn-lt"/>
+                <a:ea typeface="+mn-ea"/>
+                <a:cs typeface="+mn-cs"/>
+              </a:defRPr>
+            </a:lvl5pPr>
+            <a:lvl6pPr marL="2286000" algn="l" defTabSz="914400" rtl="0" eaLnBrk="1" latinLnBrk="0" hangingPunct="1">
+              <a:defRPr sz="1800" kern="1200">
+                <a:solidFill>
+                  <a:schemeClr val="tx1"/>
+                </a:solidFill>
+                <a:latin typeface="+mn-lt"/>
+                <a:ea typeface="+mn-ea"/>
+                <a:cs typeface="+mn-cs"/>
+              </a:defRPr>
+            </a:lvl6pPr>
+            <a:lvl7pPr marL="2743200" algn="l" defTabSz="914400" rtl="0" eaLnBrk="1" latinLnBrk="0" hangingPunct="1">
+              <a:defRPr sz="1800" kern="1200">
+                <a:solidFill>
+                  <a:schemeClr val="tx1"/>
+                </a:solidFill>
+                <a:latin typeface="+mn-lt"/>
+                <a:ea typeface="+mn-ea"/>
+                <a:cs typeface="+mn-cs"/>
+              </a:defRPr>
+            </a:lvl7pPr>
+            <a:lvl8pPr marL="3200400" algn="l" defTabSz="914400" rtl="0" eaLnBrk="1" latinLnBrk="0" hangingPunct="1">
+              <a:defRPr sz="1800" kern="1200">
+                <a:solidFill>
+                  <a:schemeClr val="tx1"/>
+                </a:solidFill>
+                <a:latin typeface="+mn-lt"/>
+                <a:ea typeface="+mn-ea"/>
+                <a:cs typeface="+mn-cs"/>
+              </a:defRPr>
+            </a:lvl8pPr>
+            <a:lvl9pPr marL="3657600" algn="l" defTabSz="914400" rtl="0" eaLnBrk="1" latinLnBrk="0" hangingPunct="1">
+              <a:defRPr sz="1800" kern="1200">
+                <a:solidFill>
+                  <a:schemeClr val="tx1"/>
+                </a:solidFill>
+                <a:latin typeface="+mn-lt"/>
+                <a:ea typeface="+mn-ea"/>
+                <a:cs typeface="+mn-cs"/>
+              </a:defRPr>
+            </a:lvl9pPr>
+          </a:lstStyle>
+          <a:p>
+            <a:pPr>
+              <a:defRPr/>
+            </a:pPr>
+            <a:fld id="{54AB3086-DE1C-4E19-8CD7-9E76252A0DD1}" type="slidenum">
+              <a:rPr lang="en-US" smtClean="0"/>
+              <a:pPr>
+                <a:defRPr/>
+              </a:pPr>
+              <a:t>3</a:t>
+            </a:fld>
+            <a:endParaRPr lang="en-US" dirty="0"/>
+          </a:p>
+        </p:txBody>
+      </p:sp>
+      <p:pic>
+        <p:nvPicPr>
+          <p:cNvPr id="27" name="Image 26">
+            <a:extLst>
+              <a:ext uri="{FF2B5EF4-FFF2-40B4-BE49-F238E27FC236}">
+                <a16:creationId xmlns:a16="http://schemas.microsoft.com/office/drawing/2014/main" id="{6C72CC5E-CBBB-3952-E15C-7E274FE0912B}"/>
+              </a:ext>
+            </a:extLst>
+          </p:cNvPr>
+          <p:cNvPicPr>
+            <a:picLocks noChangeAspect="1"/>
+          </p:cNvPicPr>
+          <p:nvPr/>
+        </p:nvPicPr>
+        <p:blipFill>
+          <a:blip r:embed="rId2"/>
+          <a:stretch>
+            <a:fillRect/>
+          </a:stretch>
+        </p:blipFill>
+        <p:spPr>
+          <a:xfrm>
+            <a:off x="2929004" y="4132792"/>
+            <a:ext cx="8851885" cy="1103351"/>
+          </a:xfrm>
+          <a:custGeom>
+            <a:avLst/>
+            <a:gdLst>
+              <a:gd name="connsiteX0" fmla="*/ 0 w 8851885"/>
+              <a:gd name="connsiteY0" fmla="*/ 0 h 1103351"/>
+              <a:gd name="connsiteX1" fmla="*/ 590126 w 8851885"/>
+              <a:gd name="connsiteY1" fmla="*/ 0 h 1103351"/>
+              <a:gd name="connsiteX2" fmla="*/ 914695 w 8851885"/>
+              <a:gd name="connsiteY2" fmla="*/ 0 h 1103351"/>
+              <a:gd name="connsiteX3" fmla="*/ 1681858 w 8851885"/>
+              <a:gd name="connsiteY3" fmla="*/ 0 h 1103351"/>
+              <a:gd name="connsiteX4" fmla="*/ 2271984 w 8851885"/>
+              <a:gd name="connsiteY4" fmla="*/ 0 h 1103351"/>
+              <a:gd name="connsiteX5" fmla="*/ 2596553 w 8851885"/>
+              <a:gd name="connsiteY5" fmla="*/ 0 h 1103351"/>
+              <a:gd name="connsiteX6" fmla="*/ 3363716 w 8851885"/>
+              <a:gd name="connsiteY6" fmla="*/ 0 h 1103351"/>
+              <a:gd name="connsiteX7" fmla="*/ 3776804 w 8851885"/>
+              <a:gd name="connsiteY7" fmla="*/ 0 h 1103351"/>
+              <a:gd name="connsiteX8" fmla="*/ 4543968 w 8851885"/>
+              <a:gd name="connsiteY8" fmla="*/ 0 h 1103351"/>
+              <a:gd name="connsiteX9" fmla="*/ 4868537 w 8851885"/>
+              <a:gd name="connsiteY9" fmla="*/ 0 h 1103351"/>
+              <a:gd name="connsiteX10" fmla="*/ 5281625 w 8851885"/>
+              <a:gd name="connsiteY10" fmla="*/ 0 h 1103351"/>
+              <a:gd name="connsiteX11" fmla="*/ 5871750 w 8851885"/>
+              <a:gd name="connsiteY11" fmla="*/ 0 h 1103351"/>
+              <a:gd name="connsiteX12" fmla="*/ 6284838 w 8851885"/>
+              <a:gd name="connsiteY12" fmla="*/ 0 h 1103351"/>
+              <a:gd name="connsiteX13" fmla="*/ 6963483 w 8851885"/>
+              <a:gd name="connsiteY13" fmla="*/ 0 h 1103351"/>
+              <a:gd name="connsiteX14" fmla="*/ 7553609 w 8851885"/>
+              <a:gd name="connsiteY14" fmla="*/ 0 h 1103351"/>
+              <a:gd name="connsiteX15" fmla="*/ 7878178 w 8851885"/>
+              <a:gd name="connsiteY15" fmla="*/ 0 h 1103351"/>
+              <a:gd name="connsiteX16" fmla="*/ 8851885 w 8851885"/>
+              <a:gd name="connsiteY16" fmla="*/ 0 h 1103351"/>
+              <a:gd name="connsiteX17" fmla="*/ 8851885 w 8851885"/>
+              <a:gd name="connsiteY17" fmla="*/ 529608 h 1103351"/>
+              <a:gd name="connsiteX18" fmla="*/ 8851885 w 8851885"/>
+              <a:gd name="connsiteY18" fmla="*/ 1103351 h 1103351"/>
+              <a:gd name="connsiteX19" fmla="*/ 8084722 w 8851885"/>
+              <a:gd name="connsiteY19" fmla="*/ 1103351 h 1103351"/>
+              <a:gd name="connsiteX20" fmla="*/ 7583115 w 8851885"/>
+              <a:gd name="connsiteY20" fmla="*/ 1103351 h 1103351"/>
+              <a:gd name="connsiteX21" fmla="*/ 7170027 w 8851885"/>
+              <a:gd name="connsiteY21" fmla="*/ 1103351 h 1103351"/>
+              <a:gd name="connsiteX22" fmla="*/ 6579901 w 8851885"/>
+              <a:gd name="connsiteY22" fmla="*/ 1103351 h 1103351"/>
+              <a:gd name="connsiteX23" fmla="*/ 5901257 w 8851885"/>
+              <a:gd name="connsiteY23" fmla="*/ 1103351 h 1103351"/>
+              <a:gd name="connsiteX24" fmla="*/ 5311131 w 8851885"/>
+              <a:gd name="connsiteY24" fmla="*/ 1103351 h 1103351"/>
+              <a:gd name="connsiteX25" fmla="*/ 4632486 w 8851885"/>
+              <a:gd name="connsiteY25" fmla="*/ 1103351 h 1103351"/>
+              <a:gd name="connsiteX26" fmla="*/ 4307917 w 8851885"/>
+              <a:gd name="connsiteY26" fmla="*/ 1103351 h 1103351"/>
+              <a:gd name="connsiteX27" fmla="*/ 3806311 w 8851885"/>
+              <a:gd name="connsiteY27" fmla="*/ 1103351 h 1103351"/>
+              <a:gd name="connsiteX28" fmla="*/ 3039147 w 8851885"/>
+              <a:gd name="connsiteY28" fmla="*/ 1103351 h 1103351"/>
+              <a:gd name="connsiteX29" fmla="*/ 2271984 w 8851885"/>
+              <a:gd name="connsiteY29" fmla="*/ 1103351 h 1103351"/>
+              <a:gd name="connsiteX30" fmla="*/ 1770377 w 8851885"/>
+              <a:gd name="connsiteY30" fmla="*/ 1103351 h 1103351"/>
+              <a:gd name="connsiteX31" fmla="*/ 1268770 w 8851885"/>
+              <a:gd name="connsiteY31" fmla="*/ 1103351 h 1103351"/>
+              <a:gd name="connsiteX32" fmla="*/ 944201 w 8851885"/>
+              <a:gd name="connsiteY32" fmla="*/ 1103351 h 1103351"/>
+              <a:gd name="connsiteX33" fmla="*/ 531113 w 8851885"/>
+              <a:gd name="connsiteY33" fmla="*/ 1103351 h 1103351"/>
+              <a:gd name="connsiteX34" fmla="*/ 0 w 8851885"/>
+              <a:gd name="connsiteY34" fmla="*/ 1103351 h 1103351"/>
+              <a:gd name="connsiteX35" fmla="*/ 0 w 8851885"/>
+              <a:gd name="connsiteY35" fmla="*/ 540642 h 1103351"/>
+              <a:gd name="connsiteX36" fmla="*/ 0 w 8851885"/>
+              <a:gd name="connsiteY36" fmla="*/ 0 h 1103351"/>
+            </a:gdLst>
+            <a:ahLst/>
+            <a:cxnLst>
+              <a:cxn ang="0">
+                <a:pos x="connsiteX0" y="connsiteY0"/>
+              </a:cxn>
+              <a:cxn ang="0">
+                <a:pos x="connsiteX1" y="connsiteY1"/>
+              </a:cxn>
+              <a:cxn ang="0">
+                <a:pos x="connsiteX2" y="connsiteY2"/>
+              </a:cxn>
+              <a:cxn ang="0">
+                <a:pos x="connsiteX3" y="connsiteY3"/>
+              </a:cxn>
+              <a:cxn ang="0">
+                <a:pos x="connsiteX4" y="connsiteY4"/>
+              </a:cxn>
+              <a:cxn ang="0">
+                <a:pos x="connsiteX5" y="connsiteY5"/>
+              </a:cxn>
+              <a:cxn ang="0">
+                <a:pos x="connsiteX6" y="connsiteY6"/>
+              </a:cxn>
+              <a:cxn ang="0">
+                <a:pos x="connsiteX7" y="connsiteY7"/>
+              </a:cxn>
+              <a:cxn ang="0">
+                <a:pos x="connsiteX8" y="connsiteY8"/>
+              </a:cxn>
+              <a:cxn ang="0">
+                <a:pos x="connsiteX9" y="connsiteY9"/>
+              </a:cxn>
+              <a:cxn ang="0">
+                <a:pos x="connsiteX10" y="connsiteY10"/>
+              </a:cxn>
+              <a:cxn ang="0">
+                <a:pos x="connsiteX11" y="connsiteY11"/>
+              </a:cxn>
+              <a:cxn ang="0">
+                <a:pos x="connsiteX12" y="connsiteY12"/>
+              </a:cxn>
+              <a:cxn ang="0">
+                <a:pos x="connsiteX13" y="connsiteY13"/>
+              </a:cxn>
+              <a:cxn ang="0">
+                <a:pos x="connsiteX14" y="connsiteY14"/>
+              </a:cxn>
+              <a:cxn ang="0">
+                <a:pos x="connsiteX15" y="connsiteY15"/>
+              </a:cxn>
+              <a:cxn ang="0">
+                <a:pos x="connsiteX16" y="connsiteY16"/>
+              </a:cxn>
+              <a:cxn ang="0">
+                <a:pos x="connsiteX17" y="connsiteY17"/>
+              </a:cxn>
+              <a:cxn ang="0">
+                <a:pos x="connsiteX18" y="connsiteY18"/>
+              </a:cxn>
+              <a:cxn ang="0">
+                <a:pos x="connsiteX19" y="connsiteY19"/>
+              </a:cxn>
+              <a:cxn ang="0">
+                <a:pos x="connsiteX20" y="connsiteY20"/>
+              </a:cxn>
+              <a:cxn ang="0">
+                <a:pos x="connsiteX21" y="connsiteY21"/>
+              </a:cxn>
+              <a:cxn ang="0">
+                <a:pos x="connsiteX22" y="connsiteY22"/>
+              </a:cxn>
+              <a:cxn ang="0">
+                <a:pos x="connsiteX23" y="connsiteY23"/>
+              </a:cxn>
+              <a:cxn ang="0">
+                <a:pos x="connsiteX24" y="connsiteY24"/>
+              </a:cxn>
+              <a:cxn ang="0">
+                <a:pos x="connsiteX25" y="connsiteY25"/>
+              </a:cxn>
+              <a:cxn ang="0">
+                <a:pos x="connsiteX26" y="connsiteY26"/>
+              </a:cxn>
+              <a:cxn ang="0">
+                <a:pos x="connsiteX27" y="connsiteY27"/>
+              </a:cxn>
+              <a:cxn ang="0">
+                <a:pos x="connsiteX28" y="connsiteY28"/>
+              </a:cxn>
+              <a:cxn ang="0">
+                <a:pos x="connsiteX29" y="connsiteY29"/>
+              </a:cxn>
+              <a:cxn ang="0">
+                <a:pos x="connsiteX30" y="connsiteY30"/>
+              </a:cxn>
+              <a:cxn ang="0">
+                <a:pos x="connsiteX31" y="connsiteY31"/>
+              </a:cxn>
+              <a:cxn ang="0">
+                <a:pos x="connsiteX32" y="connsiteY32"/>
+              </a:cxn>
+              <a:cxn ang="0">
+                <a:pos x="connsiteX33" y="connsiteY33"/>
+              </a:cxn>
+              <a:cxn ang="0">
+                <a:pos x="connsiteX34" y="connsiteY34"/>
+              </a:cxn>
+              <a:cxn ang="0">
+                <a:pos x="connsiteX35" y="connsiteY35"/>
+              </a:cxn>
+              <a:cxn ang="0">
+                <a:pos x="connsiteX36" y="connsiteY36"/>
+              </a:cxn>
+            </a:cxnLst>
+            <a:rect l="l" t="t" r="r" b="b"/>
+            <a:pathLst>
+              <a:path w="8851885" h="1103351" fill="none" extrusionOk="0">
+                <a:moveTo>
+                  <a:pt x="0" y="0"/>
+                </a:moveTo>
+                <a:cubicBezTo>
+                  <a:pt x="216356" y="-27686"/>
+                  <a:pt x="347451" y="58761"/>
+                  <a:pt x="590126" y="0"/>
+                </a:cubicBezTo>
+                <a:cubicBezTo>
+                  <a:pt x="832801" y="-58761"/>
+                  <a:pt x="761583" y="1722"/>
+                  <a:pt x="914695" y="0"/>
+                </a:cubicBezTo>
+                <a:cubicBezTo>
+                  <a:pt x="1067807" y="-1722"/>
+                  <a:pt x="1445981" y="17514"/>
+                  <a:pt x="1681858" y="0"/>
+                </a:cubicBezTo>
+                <a:cubicBezTo>
+                  <a:pt x="1917735" y="-17514"/>
+                  <a:pt x="2088647" y="52403"/>
+                  <a:pt x="2271984" y="0"/>
+                </a:cubicBezTo>
+                <a:cubicBezTo>
+                  <a:pt x="2455321" y="-52403"/>
+                  <a:pt x="2435958" y="14816"/>
+                  <a:pt x="2596553" y="0"/>
+                </a:cubicBezTo>
+                <a:cubicBezTo>
+                  <a:pt x="2757148" y="-14816"/>
+                  <a:pt x="3076106" y="63913"/>
+                  <a:pt x="3363716" y="0"/>
+                </a:cubicBezTo>
+                <a:cubicBezTo>
+                  <a:pt x="3651326" y="-63913"/>
+                  <a:pt x="3584472" y="22975"/>
+                  <a:pt x="3776804" y="0"/>
+                </a:cubicBezTo>
+                <a:cubicBezTo>
+                  <a:pt x="3969136" y="-22975"/>
+                  <a:pt x="4243809" y="63589"/>
+                  <a:pt x="4543968" y="0"/>
+                </a:cubicBezTo>
+                <a:cubicBezTo>
+                  <a:pt x="4844127" y="-63589"/>
+                  <a:pt x="4797948" y="4302"/>
+                  <a:pt x="4868537" y="0"/>
+                </a:cubicBezTo>
+                <a:cubicBezTo>
+                  <a:pt x="4939126" y="-4302"/>
+                  <a:pt x="5176510" y="25826"/>
+                  <a:pt x="5281625" y="0"/>
+                </a:cubicBezTo>
+                <a:cubicBezTo>
+                  <a:pt x="5386740" y="-25826"/>
+                  <a:pt x="5657772" y="9649"/>
+                  <a:pt x="5871750" y="0"/>
+                </a:cubicBezTo>
+                <a:cubicBezTo>
+                  <a:pt x="6085729" y="-9649"/>
+                  <a:pt x="6146032" y="7822"/>
+                  <a:pt x="6284838" y="0"/>
+                </a:cubicBezTo>
+                <a:cubicBezTo>
+                  <a:pt x="6423644" y="-7822"/>
+                  <a:pt x="6800632" y="53476"/>
+                  <a:pt x="6963483" y="0"/>
+                </a:cubicBezTo>
+                <a:cubicBezTo>
+                  <a:pt x="7126334" y="-53476"/>
+                  <a:pt x="7418298" y="11844"/>
+                  <a:pt x="7553609" y="0"/>
+                </a:cubicBezTo>
+                <a:cubicBezTo>
+                  <a:pt x="7688920" y="-11844"/>
+                  <a:pt x="7772474" y="26216"/>
+                  <a:pt x="7878178" y="0"/>
+                </a:cubicBezTo>
+                <a:cubicBezTo>
+                  <a:pt x="7983882" y="-26216"/>
+                  <a:pt x="8559495" y="115594"/>
+                  <a:pt x="8851885" y="0"/>
+                </a:cubicBezTo>
+                <a:cubicBezTo>
+                  <a:pt x="8899779" y="159751"/>
+                  <a:pt x="8845503" y="385453"/>
+                  <a:pt x="8851885" y="529608"/>
+                </a:cubicBezTo>
+                <a:cubicBezTo>
+                  <a:pt x="8858267" y="673763"/>
+                  <a:pt x="8786659" y="952126"/>
+                  <a:pt x="8851885" y="1103351"/>
+                </a:cubicBezTo>
+                <a:cubicBezTo>
+                  <a:pt x="8597908" y="1137764"/>
+                  <a:pt x="8306581" y="1046634"/>
+                  <a:pt x="8084722" y="1103351"/>
+                </a:cubicBezTo>
+                <a:cubicBezTo>
+                  <a:pt x="7862863" y="1160068"/>
+                  <a:pt x="7791150" y="1060648"/>
+                  <a:pt x="7583115" y="1103351"/>
+                </a:cubicBezTo>
+                <a:cubicBezTo>
+                  <a:pt x="7375080" y="1146054"/>
+                  <a:pt x="7274260" y="1087135"/>
+                  <a:pt x="7170027" y="1103351"/>
+                </a:cubicBezTo>
+                <a:cubicBezTo>
+                  <a:pt x="7065794" y="1119567"/>
+                  <a:pt x="6707985" y="1077280"/>
+                  <a:pt x="6579901" y="1103351"/>
+                </a:cubicBezTo>
+                <a:cubicBezTo>
+                  <a:pt x="6451817" y="1129422"/>
+                  <a:pt x="6065251" y="1055407"/>
+                  <a:pt x="5901257" y="1103351"/>
+                </a:cubicBezTo>
+                <a:cubicBezTo>
+                  <a:pt x="5737263" y="1151295"/>
+                  <a:pt x="5485897" y="1062663"/>
+                  <a:pt x="5311131" y="1103351"/>
+                </a:cubicBezTo>
+                <a:cubicBezTo>
+                  <a:pt x="5136365" y="1144039"/>
+                  <a:pt x="4943122" y="1082631"/>
+                  <a:pt x="4632486" y="1103351"/>
+                </a:cubicBezTo>
+                <a:cubicBezTo>
+                  <a:pt x="4321850" y="1124071"/>
+                  <a:pt x="4431256" y="1096859"/>
+                  <a:pt x="4307917" y="1103351"/>
+                </a:cubicBezTo>
+                <a:cubicBezTo>
+                  <a:pt x="4184578" y="1109843"/>
+                  <a:pt x="3932834" y="1090754"/>
+                  <a:pt x="3806311" y="1103351"/>
+                </a:cubicBezTo>
+                <a:cubicBezTo>
+                  <a:pt x="3679788" y="1115948"/>
+                  <a:pt x="3302731" y="1012628"/>
+                  <a:pt x="3039147" y="1103351"/>
+                </a:cubicBezTo>
+                <a:cubicBezTo>
+                  <a:pt x="2775563" y="1194074"/>
+                  <a:pt x="2603763" y="1091421"/>
+                  <a:pt x="2271984" y="1103351"/>
+                </a:cubicBezTo>
+                <a:cubicBezTo>
+                  <a:pt x="1940205" y="1115281"/>
+                  <a:pt x="1954412" y="1096338"/>
+                  <a:pt x="1770377" y="1103351"/>
+                </a:cubicBezTo>
+                <a:cubicBezTo>
+                  <a:pt x="1586342" y="1110364"/>
+                  <a:pt x="1440587" y="1092949"/>
+                  <a:pt x="1268770" y="1103351"/>
+                </a:cubicBezTo>
+                <a:cubicBezTo>
+                  <a:pt x="1096953" y="1113753"/>
+                  <a:pt x="1103714" y="1091544"/>
+                  <a:pt x="944201" y="1103351"/>
+                </a:cubicBezTo>
+                <a:cubicBezTo>
+                  <a:pt x="784688" y="1115158"/>
+                  <a:pt x="646536" y="1101545"/>
+                  <a:pt x="531113" y="1103351"/>
+                </a:cubicBezTo>
+                <a:cubicBezTo>
+                  <a:pt x="415690" y="1105157"/>
+                  <a:pt x="186537" y="1097261"/>
+                  <a:pt x="0" y="1103351"/>
+                </a:cubicBezTo>
+                <a:cubicBezTo>
+                  <a:pt x="-50503" y="877772"/>
+                  <a:pt x="56011" y="780821"/>
+                  <a:pt x="0" y="540642"/>
+                </a:cubicBezTo>
+                <a:cubicBezTo>
+                  <a:pt x="-56011" y="300463"/>
+                  <a:pt x="36926" y="153159"/>
+                  <a:pt x="0" y="0"/>
+                </a:cubicBezTo>
+                <a:close/>
+              </a:path>
+              <a:path w="8851885" h="1103351" stroke="0" extrusionOk="0">
+                <a:moveTo>
+                  <a:pt x="0" y="0"/>
+                </a:moveTo>
+                <a:cubicBezTo>
+                  <a:pt x="161811" y="-40026"/>
+                  <a:pt x="330528" y="1697"/>
+                  <a:pt x="501607" y="0"/>
+                </a:cubicBezTo>
+                <a:cubicBezTo>
+                  <a:pt x="672686" y="-1697"/>
+                  <a:pt x="860708" y="56308"/>
+                  <a:pt x="1091732" y="0"/>
+                </a:cubicBezTo>
+                <a:cubicBezTo>
+                  <a:pt x="1322756" y="-56308"/>
+                  <a:pt x="1507150" y="68581"/>
+                  <a:pt x="1858896" y="0"/>
+                </a:cubicBezTo>
+                <a:cubicBezTo>
+                  <a:pt x="2210642" y="-68581"/>
+                  <a:pt x="2163011" y="44695"/>
+                  <a:pt x="2271984" y="0"/>
+                </a:cubicBezTo>
+                <a:cubicBezTo>
+                  <a:pt x="2380957" y="-44695"/>
+                  <a:pt x="2677459" y="44697"/>
+                  <a:pt x="2950628" y="0"/>
+                </a:cubicBezTo>
+                <a:cubicBezTo>
+                  <a:pt x="3223797" y="-44697"/>
+                  <a:pt x="3194885" y="34608"/>
+                  <a:pt x="3275197" y="0"/>
+                </a:cubicBezTo>
+                <a:cubicBezTo>
+                  <a:pt x="3355509" y="-34608"/>
+                  <a:pt x="3565452" y="2004"/>
+                  <a:pt x="3776804" y="0"/>
+                </a:cubicBezTo>
+                <a:cubicBezTo>
+                  <a:pt x="3988156" y="-2004"/>
+                  <a:pt x="4121505" y="30284"/>
+                  <a:pt x="4455449" y="0"/>
+                </a:cubicBezTo>
+                <a:cubicBezTo>
+                  <a:pt x="4789393" y="-30284"/>
+                  <a:pt x="5047413" y="61475"/>
+                  <a:pt x="5222612" y="0"/>
+                </a:cubicBezTo>
+                <a:cubicBezTo>
+                  <a:pt x="5397811" y="-61475"/>
+                  <a:pt x="5835744" y="60850"/>
+                  <a:pt x="5989776" y="0"/>
+                </a:cubicBezTo>
+                <a:cubicBezTo>
+                  <a:pt x="6143808" y="-60850"/>
+                  <a:pt x="6278081" y="27632"/>
+                  <a:pt x="6402863" y="0"/>
+                </a:cubicBezTo>
+                <a:cubicBezTo>
+                  <a:pt x="6527645" y="-27632"/>
+                  <a:pt x="6574536" y="6765"/>
+                  <a:pt x="6727433" y="0"/>
+                </a:cubicBezTo>
+                <a:cubicBezTo>
+                  <a:pt x="6880330" y="-6765"/>
+                  <a:pt x="6902175" y="36025"/>
+                  <a:pt x="7052002" y="0"/>
+                </a:cubicBezTo>
+                <a:cubicBezTo>
+                  <a:pt x="7201829" y="-36025"/>
+                  <a:pt x="7424444" y="48950"/>
+                  <a:pt x="7642127" y="0"/>
+                </a:cubicBezTo>
+                <a:cubicBezTo>
+                  <a:pt x="7859810" y="-48950"/>
+                  <a:pt x="8058042" y="37734"/>
+                  <a:pt x="8320772" y="0"/>
+                </a:cubicBezTo>
+                <a:cubicBezTo>
+                  <a:pt x="8583502" y="-37734"/>
+                  <a:pt x="8620875" y="51149"/>
+                  <a:pt x="8851885" y="0"/>
+                </a:cubicBezTo>
+                <a:cubicBezTo>
+                  <a:pt x="8885950" y="238591"/>
+                  <a:pt x="8844513" y="280382"/>
+                  <a:pt x="8851885" y="540642"/>
+                </a:cubicBezTo>
+                <a:cubicBezTo>
+                  <a:pt x="8859257" y="800902"/>
+                  <a:pt x="8833396" y="838395"/>
+                  <a:pt x="8851885" y="1103351"/>
+                </a:cubicBezTo>
+                <a:cubicBezTo>
+                  <a:pt x="8764381" y="1107187"/>
+                  <a:pt x="8621007" y="1088044"/>
+                  <a:pt x="8527316" y="1103351"/>
+                </a:cubicBezTo>
+                <a:cubicBezTo>
+                  <a:pt x="8433625" y="1118658"/>
+                  <a:pt x="7998076" y="1046182"/>
+                  <a:pt x="7848671" y="1103351"/>
+                </a:cubicBezTo>
+                <a:cubicBezTo>
+                  <a:pt x="7699267" y="1160520"/>
+                  <a:pt x="7530290" y="1083082"/>
+                  <a:pt x="7347065" y="1103351"/>
+                </a:cubicBezTo>
+                <a:cubicBezTo>
+                  <a:pt x="7163840" y="1123620"/>
+                  <a:pt x="7111466" y="1071794"/>
+                  <a:pt x="7022495" y="1103351"/>
+                </a:cubicBezTo>
+                <a:cubicBezTo>
+                  <a:pt x="6933524" y="1134908"/>
+                  <a:pt x="6591845" y="1094435"/>
+                  <a:pt x="6432370" y="1103351"/>
+                </a:cubicBezTo>
+                <a:cubicBezTo>
+                  <a:pt x="6272896" y="1112267"/>
+                  <a:pt x="6214389" y="1079871"/>
+                  <a:pt x="6107801" y="1103351"/>
+                </a:cubicBezTo>
+                <a:cubicBezTo>
+                  <a:pt x="6001213" y="1126831"/>
+                  <a:pt x="5682093" y="1082512"/>
+                  <a:pt x="5429156" y="1103351"/>
+                </a:cubicBezTo>
+                <a:cubicBezTo>
+                  <a:pt x="5176219" y="1124190"/>
+                  <a:pt x="5186787" y="1093418"/>
+                  <a:pt x="5104587" y="1103351"/>
+                </a:cubicBezTo>
+                <a:cubicBezTo>
+                  <a:pt x="5022387" y="1113284"/>
+                  <a:pt x="4800320" y="1100211"/>
+                  <a:pt x="4602980" y="1103351"/>
+                </a:cubicBezTo>
+                <a:cubicBezTo>
+                  <a:pt x="4405640" y="1106491"/>
+                  <a:pt x="4197218" y="1071027"/>
+                  <a:pt x="3835817" y="1103351"/>
+                </a:cubicBezTo>
+                <a:cubicBezTo>
+                  <a:pt x="3474416" y="1135675"/>
+                  <a:pt x="3460085" y="1069542"/>
+                  <a:pt x="3334210" y="1103351"/>
+                </a:cubicBezTo>
+                <a:cubicBezTo>
+                  <a:pt x="3208335" y="1137160"/>
+                  <a:pt x="3122797" y="1055027"/>
+                  <a:pt x="2921122" y="1103351"/>
+                </a:cubicBezTo>
+                <a:cubicBezTo>
+                  <a:pt x="2719447" y="1151675"/>
+                  <a:pt x="2676777" y="1072720"/>
+                  <a:pt x="2596553" y="1103351"/>
+                </a:cubicBezTo>
+                <a:cubicBezTo>
+                  <a:pt x="2516329" y="1133982"/>
+                  <a:pt x="2343804" y="1101456"/>
+                  <a:pt x="2271984" y="1103351"/>
+                </a:cubicBezTo>
+                <a:cubicBezTo>
+                  <a:pt x="2200164" y="1105246"/>
+                  <a:pt x="1999246" y="1085673"/>
+                  <a:pt x="1858896" y="1103351"/>
+                </a:cubicBezTo>
+                <a:cubicBezTo>
+                  <a:pt x="1718546" y="1121029"/>
+                  <a:pt x="1359435" y="1047152"/>
+                  <a:pt x="1180251" y="1103351"/>
+                </a:cubicBezTo>
+                <a:cubicBezTo>
+                  <a:pt x="1001068" y="1159550"/>
+                  <a:pt x="971391" y="1076426"/>
+                  <a:pt x="855682" y="1103351"/>
+                </a:cubicBezTo>
+                <a:cubicBezTo>
+                  <a:pt x="739973" y="1130276"/>
+                  <a:pt x="673877" y="1089536"/>
+                  <a:pt x="531113" y="1103351"/>
+                </a:cubicBezTo>
+                <a:cubicBezTo>
+                  <a:pt x="388349" y="1117166"/>
+                  <a:pt x="239184" y="1054719"/>
+                  <a:pt x="0" y="1103351"/>
+                </a:cubicBezTo>
+                <a:cubicBezTo>
+                  <a:pt x="-17545" y="840138"/>
+                  <a:pt x="733" y="696282"/>
+                  <a:pt x="0" y="540642"/>
+                </a:cubicBezTo>
+                <a:cubicBezTo>
+                  <a:pt x="-733" y="385002"/>
+                  <a:pt x="60535" y="134373"/>
+                  <a:pt x="0" y="0"/>
+                </a:cubicBezTo>
+                <a:close/>
+              </a:path>
+            </a:pathLst>
+          </a:custGeom>
+          <a:solidFill>
+            <a:srgbClr val="92D050"/>
+          </a:solidFill>
+          <a:ln>
+            <a:solidFill>
+              <a:schemeClr val="tx1"/>
+            </a:solidFill>
+            <a:extLst>
+              <a:ext uri="{C807C97D-BFC1-408E-A445-0C87EB9F89A2}">
+                <ask:lineSketchStyleProps xmlns:ask="http://schemas.microsoft.com/office/drawing/2018/sketchyshapes" sd="1759329276">
+                  <a:prstGeom prst="rect">
+                    <a:avLst/>
+                  </a:prstGeom>
+                  <ask:type>
+                    <ask:lineSketchScribble/>
+                  </ask:type>
+                </ask:lineSketchStyleProps>
+              </a:ext>
+            </a:extLst>
+          </a:ln>
+        </p:spPr>
+      </p:pic>
+      <p:cxnSp>
+        <p:nvCxnSpPr>
+          <p:cNvPr id="29" name="Connecteur : en angle 28">
+            <a:extLst>
+              <a:ext uri="{FF2B5EF4-FFF2-40B4-BE49-F238E27FC236}">
+                <a16:creationId xmlns:a16="http://schemas.microsoft.com/office/drawing/2014/main" id="{E987A688-E79B-C03A-FE8D-E04A16177884}"/>
+              </a:ext>
+            </a:extLst>
+          </p:cNvPr>
+          <p:cNvCxnSpPr>
+            <a:endCxn id="4" idx="3"/>
+          </p:cNvCxnSpPr>
+          <p:nvPr/>
+        </p:nvCxnSpPr>
+        <p:spPr>
+          <a:xfrm rot="16200000" flipV="1">
+            <a:off x="9228917" y="2558609"/>
+            <a:ext cx="1631406" cy="1490601"/>
+          </a:xfrm>
+          <a:prstGeom prst="bentConnector2">
+            <a:avLst/>
+          </a:prstGeom>
+          <a:ln>
+            <a:solidFill>
+              <a:schemeClr val="tx1"/>
+            </a:solidFill>
+            <a:tailEnd type="triangle"/>
+          </a:ln>
+        </p:spPr>
+        <p:style>
+          <a:lnRef idx="1">
+            <a:schemeClr val="accent1"/>
+          </a:lnRef>
+          <a:fillRef idx="0">
+            <a:schemeClr val="accent1"/>
+          </a:fillRef>
+          <a:effectRef idx="0">
+            <a:schemeClr val="accent1"/>
+          </a:effectRef>
+          <a:fontRef idx="minor">
+            <a:schemeClr val="tx1"/>
+          </a:fontRef>
+        </p:style>
+      </p:cxnSp>
+    </p:spTree>
+    <p:extLst>
+      <p:ext uri="{BB962C8B-B14F-4D97-AF65-F5344CB8AC3E}">
+        <p14:creationId xmlns:p14="http://schemas.microsoft.com/office/powerpoint/2010/main" val="1944734218"/>
+      </p:ext>
+    </p:extLst>
+  </p:cSld>
+  <p:clrMapOvr>
+    <a:masterClrMapping/>
+  </p:clrMapOvr>
+</p:sld>
+</file>
+
+<file path=ppt/slides/slide4.xml><?xml version="1.0" encoding="utf-8"?>
+<p:sld xmlns:a="http://schemas.openxmlformats.org/drawingml/2006/main" xmlns:r="http://schemas.openxmlformats.org/officeDocument/2006/relationships" xmlns:p="http://schemas.openxmlformats.org/presentationml/2006/main">
+  <p:cSld>
+    <p:spTree>
+      <p:nvGrpSpPr>
+        <p:cNvPr id="1" name="">
+          <a:extLst>
+            <a:ext uri="{FF2B5EF4-FFF2-40B4-BE49-F238E27FC236}">
+              <a16:creationId xmlns:a16="http://schemas.microsoft.com/office/drawing/2014/main" id="{26B8FFBD-74A3-288C-B7F5-785A077F589F}"/>
+            </a:ext>
+          </a:extLst>
+        </p:cNvPr>
+        <p:cNvGrpSpPr/>
+        <p:nvPr/>
+      </p:nvGrpSpPr>
+      <p:grpSpPr>
+        <a:xfrm>
+          <a:off x="0" y="0"/>
+          <a:ext cx="0" cy="0"/>
+          <a:chOff x="0" y="0"/>
+          <a:chExt cx="0" cy="0"/>
+        </a:xfrm>
+      </p:grpSpPr>
+      <p:sp>
+        <p:nvSpPr>
+          <p:cNvPr id="10" name="Rectangle 9">
+            <a:extLst>
+              <a:ext uri="{FF2B5EF4-FFF2-40B4-BE49-F238E27FC236}">
+                <a16:creationId xmlns:a16="http://schemas.microsoft.com/office/drawing/2014/main" id="{A6CC4B4B-6138-3988-9F6A-42F6B0D9A7B3}"/>
+              </a:ext>
+            </a:extLst>
+          </p:cNvPr>
+          <p:cNvSpPr/>
+          <p:nvPr/>
+        </p:nvSpPr>
+        <p:spPr>
+          <a:xfrm>
+            <a:off x="644893" y="3349592"/>
+            <a:ext cx="8604985" cy="3291506"/>
+          </a:xfrm>
+          <a:custGeom>
+            <a:avLst/>
+            <a:gdLst>
+              <a:gd name="connsiteX0" fmla="*/ 0 w 8604985"/>
+              <a:gd name="connsiteY0" fmla="*/ 0 h 3291506"/>
+              <a:gd name="connsiteX1" fmla="*/ 745765 w 8604985"/>
+              <a:gd name="connsiteY1" fmla="*/ 0 h 3291506"/>
+              <a:gd name="connsiteX2" fmla="*/ 1491531 w 8604985"/>
+              <a:gd name="connsiteY2" fmla="*/ 0 h 3291506"/>
+              <a:gd name="connsiteX3" fmla="*/ 1979147 w 8604985"/>
+              <a:gd name="connsiteY3" fmla="*/ 0 h 3291506"/>
+              <a:gd name="connsiteX4" fmla="*/ 2466762 w 8604985"/>
+              <a:gd name="connsiteY4" fmla="*/ 0 h 3291506"/>
+              <a:gd name="connsiteX5" fmla="*/ 3212528 w 8604985"/>
+              <a:gd name="connsiteY5" fmla="*/ 0 h 3291506"/>
+              <a:gd name="connsiteX6" fmla="*/ 3958293 w 8604985"/>
+              <a:gd name="connsiteY6" fmla="*/ 0 h 3291506"/>
+              <a:gd name="connsiteX7" fmla="*/ 4618009 w 8604985"/>
+              <a:gd name="connsiteY7" fmla="*/ 0 h 3291506"/>
+              <a:gd name="connsiteX8" fmla="*/ 5019575 w 8604985"/>
+              <a:gd name="connsiteY8" fmla="*/ 0 h 3291506"/>
+              <a:gd name="connsiteX9" fmla="*/ 5765340 w 8604985"/>
+              <a:gd name="connsiteY9" fmla="*/ 0 h 3291506"/>
+              <a:gd name="connsiteX10" fmla="*/ 6166906 w 8604985"/>
+              <a:gd name="connsiteY10" fmla="*/ 0 h 3291506"/>
+              <a:gd name="connsiteX11" fmla="*/ 6912671 w 8604985"/>
+              <a:gd name="connsiteY11" fmla="*/ 0 h 3291506"/>
+              <a:gd name="connsiteX12" fmla="*/ 7400287 w 8604985"/>
+              <a:gd name="connsiteY12" fmla="*/ 0 h 3291506"/>
+              <a:gd name="connsiteX13" fmla="*/ 7801853 w 8604985"/>
+              <a:gd name="connsiteY13" fmla="*/ 0 h 3291506"/>
+              <a:gd name="connsiteX14" fmla="*/ 8604985 w 8604985"/>
+              <a:gd name="connsiteY14" fmla="*/ 0 h 3291506"/>
+              <a:gd name="connsiteX15" fmla="*/ 8604985 w 8604985"/>
+              <a:gd name="connsiteY15" fmla="*/ 548584 h 3291506"/>
+              <a:gd name="connsiteX16" fmla="*/ 8604985 w 8604985"/>
+              <a:gd name="connsiteY16" fmla="*/ 1130084 h 3291506"/>
+              <a:gd name="connsiteX17" fmla="*/ 8604985 w 8604985"/>
+              <a:gd name="connsiteY17" fmla="*/ 1711583 h 3291506"/>
+              <a:gd name="connsiteX18" fmla="*/ 8604985 w 8604985"/>
+              <a:gd name="connsiteY18" fmla="*/ 2325998 h 3291506"/>
+              <a:gd name="connsiteX19" fmla="*/ 8604985 w 8604985"/>
+              <a:gd name="connsiteY19" fmla="*/ 3291506 h 3291506"/>
+              <a:gd name="connsiteX20" fmla="*/ 8203419 w 8604985"/>
+              <a:gd name="connsiteY20" fmla="*/ 3291506 h 3291506"/>
+              <a:gd name="connsiteX21" fmla="*/ 7715803 w 8604985"/>
+              <a:gd name="connsiteY21" fmla="*/ 3291506 h 3291506"/>
+              <a:gd name="connsiteX22" fmla="*/ 7314237 w 8604985"/>
+              <a:gd name="connsiteY22" fmla="*/ 3291506 h 3291506"/>
+              <a:gd name="connsiteX23" fmla="*/ 6912671 w 8604985"/>
+              <a:gd name="connsiteY23" fmla="*/ 3291506 h 3291506"/>
+              <a:gd name="connsiteX24" fmla="*/ 6166906 w 8604985"/>
+              <a:gd name="connsiteY24" fmla="*/ 3291506 h 3291506"/>
+              <a:gd name="connsiteX25" fmla="*/ 5507190 w 8604985"/>
+              <a:gd name="connsiteY25" fmla="*/ 3291506 h 3291506"/>
+              <a:gd name="connsiteX26" fmla="*/ 4761425 w 8604985"/>
+              <a:gd name="connsiteY26" fmla="*/ 3291506 h 3291506"/>
+              <a:gd name="connsiteX27" fmla="*/ 4445909 w 8604985"/>
+              <a:gd name="connsiteY27" fmla="*/ 3291506 h 3291506"/>
+              <a:gd name="connsiteX28" fmla="*/ 3872243 w 8604985"/>
+              <a:gd name="connsiteY28" fmla="*/ 3291506 h 3291506"/>
+              <a:gd name="connsiteX29" fmla="*/ 3470677 w 8604985"/>
+              <a:gd name="connsiteY29" fmla="*/ 3291506 h 3291506"/>
+              <a:gd name="connsiteX30" fmla="*/ 2983061 w 8604985"/>
+              <a:gd name="connsiteY30" fmla="*/ 3291506 h 3291506"/>
+              <a:gd name="connsiteX31" fmla="*/ 2237296 w 8604985"/>
+              <a:gd name="connsiteY31" fmla="*/ 3291506 h 3291506"/>
+              <a:gd name="connsiteX32" fmla="*/ 1835730 w 8604985"/>
+              <a:gd name="connsiteY32" fmla="*/ 3291506 h 3291506"/>
+              <a:gd name="connsiteX33" fmla="*/ 1434164 w 8604985"/>
+              <a:gd name="connsiteY33" fmla="*/ 3291506 h 3291506"/>
+              <a:gd name="connsiteX34" fmla="*/ 860499 w 8604985"/>
+              <a:gd name="connsiteY34" fmla="*/ 3291506 h 3291506"/>
+              <a:gd name="connsiteX35" fmla="*/ 0 w 8604985"/>
+              <a:gd name="connsiteY35" fmla="*/ 3291506 h 3291506"/>
+              <a:gd name="connsiteX36" fmla="*/ 0 w 8604985"/>
+              <a:gd name="connsiteY36" fmla="*/ 2710007 h 3291506"/>
+              <a:gd name="connsiteX37" fmla="*/ 0 w 8604985"/>
+              <a:gd name="connsiteY37" fmla="*/ 2227252 h 3291506"/>
+              <a:gd name="connsiteX38" fmla="*/ 0 w 8604985"/>
+              <a:gd name="connsiteY38" fmla="*/ 1678668 h 3291506"/>
+              <a:gd name="connsiteX39" fmla="*/ 0 w 8604985"/>
+              <a:gd name="connsiteY39" fmla="*/ 1064254 h 3291506"/>
+              <a:gd name="connsiteX40" fmla="*/ 0 w 8604985"/>
+              <a:gd name="connsiteY40" fmla="*/ 581499 h 3291506"/>
+              <a:gd name="connsiteX41" fmla="*/ 0 w 8604985"/>
+              <a:gd name="connsiteY41" fmla="*/ 0 h 3291506"/>
+            </a:gdLst>
+            <a:ahLst/>
+            <a:cxnLst>
+              <a:cxn ang="0">
+                <a:pos x="connsiteX0" y="connsiteY0"/>
+              </a:cxn>
+              <a:cxn ang="0">
+                <a:pos x="connsiteX1" y="connsiteY1"/>
+              </a:cxn>
+              <a:cxn ang="0">
+                <a:pos x="connsiteX2" y="connsiteY2"/>
+              </a:cxn>
+              <a:cxn ang="0">
+                <a:pos x="connsiteX3" y="connsiteY3"/>
+              </a:cxn>
+              <a:cxn ang="0">
+                <a:pos x="connsiteX4" y="connsiteY4"/>
+              </a:cxn>
+              <a:cxn ang="0">
+                <a:pos x="connsiteX5" y="connsiteY5"/>
+              </a:cxn>
+              <a:cxn ang="0">
+                <a:pos x="connsiteX6" y="connsiteY6"/>
+              </a:cxn>
+              <a:cxn ang="0">
+                <a:pos x="connsiteX7" y="connsiteY7"/>
+              </a:cxn>
+              <a:cxn ang="0">
+                <a:pos x="connsiteX8" y="connsiteY8"/>
+              </a:cxn>
+              <a:cxn ang="0">
+                <a:pos x="connsiteX9" y="connsiteY9"/>
+              </a:cxn>
+              <a:cxn ang="0">
+                <a:pos x="connsiteX10" y="connsiteY10"/>
+              </a:cxn>
+              <a:cxn ang="0">
+                <a:pos x="connsiteX11" y="connsiteY11"/>
+              </a:cxn>
+              <a:cxn ang="0">
+                <a:pos x="connsiteX12" y="connsiteY12"/>
+              </a:cxn>
+              <a:cxn ang="0">
+                <a:pos x="connsiteX13" y="connsiteY13"/>
+              </a:cxn>
+              <a:cxn ang="0">
+                <a:pos x="connsiteX14" y="connsiteY14"/>
+              </a:cxn>
+              <a:cxn ang="0">
+                <a:pos x="connsiteX15" y="connsiteY15"/>
+              </a:cxn>
+              <a:cxn ang="0">
+                <a:pos x="connsiteX16" y="connsiteY16"/>
+              </a:cxn>
+              <a:cxn ang="0">
+                <a:pos x="connsiteX17" y="connsiteY17"/>
+              </a:cxn>
+              <a:cxn ang="0">
+                <a:pos x="connsiteX18" y="connsiteY18"/>
+              </a:cxn>
+              <a:cxn ang="0">
+                <a:pos x="connsiteX19" y="connsiteY19"/>
+              </a:cxn>
+              <a:cxn ang="0">
+                <a:pos x="connsiteX20" y="connsiteY20"/>
+              </a:cxn>
+              <a:cxn ang="0">
+                <a:pos x="connsiteX21" y="connsiteY21"/>
+              </a:cxn>
+              <a:cxn ang="0">
+                <a:pos x="connsiteX22" y="connsiteY22"/>
+              </a:cxn>
+              <a:cxn ang="0">
+                <a:pos x="connsiteX23" y="connsiteY23"/>
+              </a:cxn>
+              <a:cxn ang="0">
+                <a:pos x="connsiteX24" y="connsiteY24"/>
+              </a:cxn>
+              <a:cxn ang="0">
+                <a:pos x="connsiteX25" y="connsiteY25"/>
+              </a:cxn>
+              <a:cxn ang="0">
+                <a:pos x="connsiteX26" y="connsiteY26"/>
+              </a:cxn>
+              <a:cxn ang="0">
+                <a:pos x="connsiteX27" y="connsiteY27"/>
+              </a:cxn>
+              <a:cxn ang="0">
+                <a:pos x="connsiteX28" y="connsiteY28"/>
+              </a:cxn>
+              <a:cxn ang="0">
+                <a:pos x="connsiteX29" y="connsiteY29"/>
+              </a:cxn>
+              <a:cxn ang="0">
+                <a:pos x="connsiteX30" y="connsiteY30"/>
+              </a:cxn>
+              <a:cxn ang="0">
+                <a:pos x="connsiteX31" y="connsiteY31"/>
+              </a:cxn>
+              <a:cxn ang="0">
+                <a:pos x="connsiteX32" y="connsiteY32"/>
+              </a:cxn>
+              <a:cxn ang="0">
+                <a:pos x="connsiteX33" y="connsiteY33"/>
+              </a:cxn>
+              <a:cxn ang="0">
+                <a:pos x="connsiteX34" y="connsiteY34"/>
+              </a:cxn>
+              <a:cxn ang="0">
+                <a:pos x="connsiteX35" y="connsiteY35"/>
+              </a:cxn>
+              <a:cxn ang="0">
+                <a:pos x="connsiteX36" y="connsiteY36"/>
+              </a:cxn>
+              <a:cxn ang="0">
+                <a:pos x="connsiteX37" y="connsiteY37"/>
+              </a:cxn>
+              <a:cxn ang="0">
+                <a:pos x="connsiteX38" y="connsiteY38"/>
+              </a:cxn>
+              <a:cxn ang="0">
+                <a:pos x="connsiteX39" y="connsiteY39"/>
+              </a:cxn>
+              <a:cxn ang="0">
+                <a:pos x="connsiteX40" y="connsiteY40"/>
+              </a:cxn>
+              <a:cxn ang="0">
+                <a:pos x="connsiteX41" y="connsiteY41"/>
+              </a:cxn>
+            </a:cxnLst>
+            <a:rect l="l" t="t" r="r" b="b"/>
+            <a:pathLst>
+              <a:path w="8604985" h="3291506" fill="none" extrusionOk="0">
+                <a:moveTo>
+                  <a:pt x="0" y="0"/>
+                </a:moveTo>
+                <a:cubicBezTo>
+                  <a:pt x="250857" y="-32905"/>
+                  <a:pt x="585404" y="27156"/>
+                  <a:pt x="745765" y="0"/>
+                </a:cubicBezTo>
+                <a:cubicBezTo>
+                  <a:pt x="906126" y="-27156"/>
+                  <a:pt x="1132682" y="45935"/>
+                  <a:pt x="1491531" y="0"/>
+                </a:cubicBezTo>
+                <a:cubicBezTo>
+                  <a:pt x="1850380" y="-45935"/>
+                  <a:pt x="1785149" y="47531"/>
+                  <a:pt x="1979147" y="0"/>
+                </a:cubicBezTo>
+                <a:cubicBezTo>
+                  <a:pt x="2173145" y="-47531"/>
+                  <a:pt x="2283569" y="187"/>
+                  <a:pt x="2466762" y="0"/>
+                </a:cubicBezTo>
+                <a:cubicBezTo>
+                  <a:pt x="2649955" y="-187"/>
+                  <a:pt x="2867700" y="34677"/>
+                  <a:pt x="3212528" y="0"/>
+                </a:cubicBezTo>
+                <a:cubicBezTo>
+                  <a:pt x="3557356" y="-34677"/>
+                  <a:pt x="3732340" y="86887"/>
+                  <a:pt x="3958293" y="0"/>
+                </a:cubicBezTo>
+                <a:cubicBezTo>
+                  <a:pt x="4184246" y="-86887"/>
+                  <a:pt x="4348197" y="4474"/>
+                  <a:pt x="4618009" y="0"/>
+                </a:cubicBezTo>
+                <a:cubicBezTo>
+                  <a:pt x="4887821" y="-4474"/>
+                  <a:pt x="4928681" y="47927"/>
+                  <a:pt x="5019575" y="0"/>
+                </a:cubicBezTo>
+                <a:cubicBezTo>
+                  <a:pt x="5110469" y="-47927"/>
+                  <a:pt x="5593747" y="20552"/>
+                  <a:pt x="5765340" y="0"/>
+                </a:cubicBezTo>
+                <a:cubicBezTo>
+                  <a:pt x="5936933" y="-20552"/>
+                  <a:pt x="6030238" y="40739"/>
+                  <a:pt x="6166906" y="0"/>
+                </a:cubicBezTo>
+                <a:cubicBezTo>
+                  <a:pt x="6303574" y="-40739"/>
+                  <a:pt x="6570020" y="7447"/>
+                  <a:pt x="6912671" y="0"/>
+                </a:cubicBezTo>
+                <a:cubicBezTo>
+                  <a:pt x="7255323" y="-7447"/>
+                  <a:pt x="7166418" y="47262"/>
+                  <a:pt x="7400287" y="0"/>
+                </a:cubicBezTo>
+                <a:cubicBezTo>
+                  <a:pt x="7634156" y="-47262"/>
+                  <a:pt x="7703007" y="38766"/>
+                  <a:pt x="7801853" y="0"/>
+                </a:cubicBezTo>
+                <a:cubicBezTo>
+                  <a:pt x="7900699" y="-38766"/>
+                  <a:pt x="8291343" y="27478"/>
+                  <a:pt x="8604985" y="0"/>
+                </a:cubicBezTo>
+                <a:cubicBezTo>
+                  <a:pt x="8631609" y="121291"/>
+                  <a:pt x="8574073" y="308259"/>
+                  <a:pt x="8604985" y="548584"/>
+                </a:cubicBezTo>
+                <a:cubicBezTo>
+                  <a:pt x="8635897" y="788909"/>
+                  <a:pt x="8597003" y="947148"/>
+                  <a:pt x="8604985" y="1130084"/>
+                </a:cubicBezTo>
+                <a:cubicBezTo>
+                  <a:pt x="8612967" y="1313020"/>
+                  <a:pt x="8576072" y="1464749"/>
+                  <a:pt x="8604985" y="1711583"/>
+                </a:cubicBezTo>
+                <a:cubicBezTo>
+                  <a:pt x="8633898" y="1958417"/>
+                  <a:pt x="8563128" y="2099520"/>
+                  <a:pt x="8604985" y="2325998"/>
+                </a:cubicBezTo>
+                <a:cubicBezTo>
+                  <a:pt x="8646842" y="2552476"/>
+                  <a:pt x="8495048" y="2857768"/>
+                  <a:pt x="8604985" y="3291506"/>
+                </a:cubicBezTo>
+                <a:cubicBezTo>
+                  <a:pt x="8425660" y="3293497"/>
+                  <a:pt x="8313417" y="3250057"/>
+                  <a:pt x="8203419" y="3291506"/>
+                </a:cubicBezTo>
+                <a:cubicBezTo>
+                  <a:pt x="8093421" y="3332955"/>
+                  <a:pt x="7815964" y="3274627"/>
+                  <a:pt x="7715803" y="3291506"/>
+                </a:cubicBezTo>
+                <a:cubicBezTo>
+                  <a:pt x="7615642" y="3308385"/>
+                  <a:pt x="7491411" y="3261722"/>
+                  <a:pt x="7314237" y="3291506"/>
+                </a:cubicBezTo>
+                <a:cubicBezTo>
+                  <a:pt x="7137063" y="3321290"/>
+                  <a:pt x="7108415" y="3274543"/>
+                  <a:pt x="6912671" y="3291506"/>
+                </a:cubicBezTo>
+                <a:cubicBezTo>
+                  <a:pt x="6716927" y="3308469"/>
+                  <a:pt x="6494184" y="3203774"/>
+                  <a:pt x="6166906" y="3291506"/>
+                </a:cubicBezTo>
+                <a:cubicBezTo>
+                  <a:pt x="5839629" y="3379238"/>
+                  <a:pt x="5822401" y="3280912"/>
+                  <a:pt x="5507190" y="3291506"/>
+                </a:cubicBezTo>
+                <a:cubicBezTo>
+                  <a:pt x="5191979" y="3302100"/>
+                  <a:pt x="5133019" y="3238054"/>
+                  <a:pt x="4761425" y="3291506"/>
+                </a:cubicBezTo>
+                <a:cubicBezTo>
+                  <a:pt x="4389831" y="3344958"/>
+                  <a:pt x="4527570" y="3263463"/>
+                  <a:pt x="4445909" y="3291506"/>
+                </a:cubicBezTo>
+                <a:cubicBezTo>
+                  <a:pt x="4364248" y="3319549"/>
+                  <a:pt x="4139833" y="3281856"/>
+                  <a:pt x="3872243" y="3291506"/>
+                </a:cubicBezTo>
+                <a:cubicBezTo>
+                  <a:pt x="3604653" y="3301156"/>
+                  <a:pt x="3554062" y="3264754"/>
+                  <a:pt x="3470677" y="3291506"/>
+                </a:cubicBezTo>
+                <a:cubicBezTo>
+                  <a:pt x="3387292" y="3318258"/>
+                  <a:pt x="3171498" y="3266697"/>
+                  <a:pt x="2983061" y="3291506"/>
+                </a:cubicBezTo>
+                <a:cubicBezTo>
+                  <a:pt x="2794624" y="3316315"/>
+                  <a:pt x="2539018" y="3260653"/>
+                  <a:pt x="2237296" y="3291506"/>
+                </a:cubicBezTo>
+                <a:cubicBezTo>
+                  <a:pt x="1935575" y="3322359"/>
+                  <a:pt x="2032527" y="3291213"/>
+                  <a:pt x="1835730" y="3291506"/>
+                </a:cubicBezTo>
+                <a:cubicBezTo>
+                  <a:pt x="1638933" y="3291799"/>
+                  <a:pt x="1520158" y="3279541"/>
+                  <a:pt x="1434164" y="3291506"/>
+                </a:cubicBezTo>
+                <a:cubicBezTo>
+                  <a:pt x="1348170" y="3303471"/>
+                  <a:pt x="1081598" y="3246790"/>
+                  <a:pt x="860499" y="3291506"/>
+                </a:cubicBezTo>
+                <a:cubicBezTo>
+                  <a:pt x="639400" y="3336222"/>
+                  <a:pt x="399637" y="3213119"/>
+                  <a:pt x="0" y="3291506"/>
+                </a:cubicBezTo>
+                <a:cubicBezTo>
+                  <a:pt x="-16317" y="3055053"/>
+                  <a:pt x="51836" y="2830788"/>
+                  <a:pt x="0" y="2710007"/>
+                </a:cubicBezTo>
+                <a:cubicBezTo>
+                  <a:pt x="-51836" y="2589226"/>
+                  <a:pt x="27937" y="2399027"/>
+                  <a:pt x="0" y="2227252"/>
+                </a:cubicBezTo>
+                <a:cubicBezTo>
+                  <a:pt x="-27937" y="2055477"/>
+                  <a:pt x="58039" y="1820232"/>
+                  <a:pt x="0" y="1678668"/>
+                </a:cubicBezTo>
+                <a:cubicBezTo>
+                  <a:pt x="-58039" y="1537104"/>
+                  <a:pt x="18186" y="1242615"/>
+                  <a:pt x="0" y="1064254"/>
+                </a:cubicBezTo>
+                <a:cubicBezTo>
+                  <a:pt x="-18186" y="885893"/>
+                  <a:pt x="13721" y="688867"/>
+                  <a:pt x="0" y="581499"/>
+                </a:cubicBezTo>
+                <a:cubicBezTo>
+                  <a:pt x="-13721" y="474132"/>
+                  <a:pt x="46462" y="154474"/>
+                  <a:pt x="0" y="0"/>
+                </a:cubicBezTo>
+                <a:close/>
+              </a:path>
+              <a:path w="8604985" h="3291506" stroke="0" extrusionOk="0">
+                <a:moveTo>
+                  <a:pt x="0" y="0"/>
+                </a:moveTo>
+                <a:cubicBezTo>
+                  <a:pt x="133788" y="-32938"/>
+                  <a:pt x="302780" y="66964"/>
+                  <a:pt x="573666" y="0"/>
+                </a:cubicBezTo>
+                <a:cubicBezTo>
+                  <a:pt x="844552" y="-66964"/>
+                  <a:pt x="877642" y="2844"/>
+                  <a:pt x="1061281" y="0"/>
+                </a:cubicBezTo>
+                <a:cubicBezTo>
+                  <a:pt x="1244921" y="-2844"/>
+                  <a:pt x="1567197" y="77073"/>
+                  <a:pt x="1720997" y="0"/>
+                </a:cubicBezTo>
+                <a:cubicBezTo>
+                  <a:pt x="1874797" y="-77073"/>
+                  <a:pt x="2195799" y="53090"/>
+                  <a:pt x="2380713" y="0"/>
+                </a:cubicBezTo>
+                <a:cubicBezTo>
+                  <a:pt x="2565627" y="-53090"/>
+                  <a:pt x="2773882" y="28261"/>
+                  <a:pt x="2954378" y="0"/>
+                </a:cubicBezTo>
+                <a:cubicBezTo>
+                  <a:pt x="3134874" y="-28261"/>
+                  <a:pt x="3166659" y="3481"/>
+                  <a:pt x="3269894" y="0"/>
+                </a:cubicBezTo>
+                <a:cubicBezTo>
+                  <a:pt x="3373129" y="-3481"/>
+                  <a:pt x="3740259" y="33371"/>
+                  <a:pt x="3929610" y="0"/>
+                </a:cubicBezTo>
+                <a:cubicBezTo>
+                  <a:pt x="4118961" y="-33371"/>
+                  <a:pt x="4341071" y="81796"/>
+                  <a:pt x="4675375" y="0"/>
+                </a:cubicBezTo>
+                <a:cubicBezTo>
+                  <a:pt x="5009680" y="-81796"/>
+                  <a:pt x="4887376" y="12238"/>
+                  <a:pt x="4990891" y="0"/>
+                </a:cubicBezTo>
+                <a:cubicBezTo>
+                  <a:pt x="5094406" y="-12238"/>
+                  <a:pt x="5182076" y="3746"/>
+                  <a:pt x="5306407" y="0"/>
+                </a:cubicBezTo>
+                <a:cubicBezTo>
+                  <a:pt x="5430738" y="-3746"/>
+                  <a:pt x="5690142" y="24196"/>
+                  <a:pt x="5794023" y="0"/>
+                </a:cubicBezTo>
+                <a:cubicBezTo>
+                  <a:pt x="5897904" y="-24196"/>
+                  <a:pt x="6012691" y="17090"/>
+                  <a:pt x="6109539" y="0"/>
+                </a:cubicBezTo>
+                <a:cubicBezTo>
+                  <a:pt x="6206387" y="-17090"/>
+                  <a:pt x="6397197" y="10610"/>
+                  <a:pt x="6511105" y="0"/>
+                </a:cubicBezTo>
+                <a:cubicBezTo>
+                  <a:pt x="6625013" y="-10610"/>
+                  <a:pt x="7011420" y="26498"/>
+                  <a:pt x="7170821" y="0"/>
+                </a:cubicBezTo>
+                <a:cubicBezTo>
+                  <a:pt x="7330222" y="-26498"/>
+                  <a:pt x="7387467" y="20082"/>
+                  <a:pt x="7486337" y="0"/>
+                </a:cubicBezTo>
+                <a:cubicBezTo>
+                  <a:pt x="7585207" y="-20082"/>
+                  <a:pt x="7926724" y="18466"/>
+                  <a:pt x="8060003" y="0"/>
+                </a:cubicBezTo>
+                <a:cubicBezTo>
+                  <a:pt x="8193282" y="-18466"/>
+                  <a:pt x="8384732" y="20625"/>
+                  <a:pt x="8604985" y="0"/>
+                </a:cubicBezTo>
+                <a:cubicBezTo>
+                  <a:pt x="8624435" y="241496"/>
+                  <a:pt x="8590645" y="300261"/>
+                  <a:pt x="8604985" y="581499"/>
+                </a:cubicBezTo>
+                <a:cubicBezTo>
+                  <a:pt x="8619325" y="862737"/>
+                  <a:pt x="8536734" y="1023093"/>
+                  <a:pt x="8604985" y="1195914"/>
+                </a:cubicBezTo>
+                <a:cubicBezTo>
+                  <a:pt x="8673236" y="1368735"/>
+                  <a:pt x="8594527" y="1507135"/>
+                  <a:pt x="8604985" y="1711583"/>
+                </a:cubicBezTo>
+                <a:cubicBezTo>
+                  <a:pt x="8615443" y="1916031"/>
+                  <a:pt x="8601715" y="1943495"/>
+                  <a:pt x="8604985" y="2161422"/>
+                </a:cubicBezTo>
+                <a:cubicBezTo>
+                  <a:pt x="8608255" y="2379349"/>
+                  <a:pt x="8586915" y="2478166"/>
+                  <a:pt x="8604985" y="2611261"/>
+                </a:cubicBezTo>
+                <a:cubicBezTo>
+                  <a:pt x="8623055" y="2744356"/>
+                  <a:pt x="8575680" y="3134777"/>
+                  <a:pt x="8604985" y="3291506"/>
+                </a:cubicBezTo>
+                <a:cubicBezTo>
+                  <a:pt x="8471210" y="3298783"/>
+                  <a:pt x="8304678" y="3262610"/>
+                  <a:pt x="8203419" y="3291506"/>
+                </a:cubicBezTo>
+                <a:cubicBezTo>
+                  <a:pt x="8102160" y="3320402"/>
+                  <a:pt x="7842561" y="3246825"/>
+                  <a:pt x="7715803" y="3291506"/>
+                </a:cubicBezTo>
+                <a:cubicBezTo>
+                  <a:pt x="7589045" y="3336187"/>
+                  <a:pt x="7241103" y="3237351"/>
+                  <a:pt x="7056088" y="3291506"/>
+                </a:cubicBezTo>
+                <a:cubicBezTo>
+                  <a:pt x="6871073" y="3345661"/>
+                  <a:pt x="6801980" y="3262790"/>
+                  <a:pt x="6654522" y="3291506"/>
+                </a:cubicBezTo>
+                <a:cubicBezTo>
+                  <a:pt x="6507064" y="3320222"/>
+                  <a:pt x="6104206" y="3286571"/>
+                  <a:pt x="5908756" y="3291506"/>
+                </a:cubicBezTo>
+                <a:cubicBezTo>
+                  <a:pt x="5713306" y="3296441"/>
+                  <a:pt x="5466242" y="3256641"/>
+                  <a:pt x="5249041" y="3291506"/>
+                </a:cubicBezTo>
+                <a:cubicBezTo>
+                  <a:pt x="5031840" y="3326371"/>
+                  <a:pt x="5045061" y="3275290"/>
+                  <a:pt x="4933525" y="3291506"/>
+                </a:cubicBezTo>
+                <a:cubicBezTo>
+                  <a:pt x="4821989" y="3307722"/>
+                  <a:pt x="4694726" y="3247309"/>
+                  <a:pt x="4531959" y="3291506"/>
+                </a:cubicBezTo>
+                <a:cubicBezTo>
+                  <a:pt x="4369192" y="3335703"/>
+                  <a:pt x="4239610" y="3253437"/>
+                  <a:pt x="3958293" y="3291506"/>
+                </a:cubicBezTo>
+                <a:cubicBezTo>
+                  <a:pt x="3676976" y="3329575"/>
+                  <a:pt x="3648962" y="3247193"/>
+                  <a:pt x="3384627" y="3291506"/>
+                </a:cubicBezTo>
+                <a:cubicBezTo>
+                  <a:pt x="3120292" y="3335819"/>
+                  <a:pt x="3175608" y="3279130"/>
+                  <a:pt x="3069111" y="3291506"/>
+                </a:cubicBezTo>
+                <a:cubicBezTo>
+                  <a:pt x="2962614" y="3303882"/>
+                  <a:pt x="2633973" y="3268575"/>
+                  <a:pt x="2323346" y="3291506"/>
+                </a:cubicBezTo>
+                <a:cubicBezTo>
+                  <a:pt x="2012720" y="3314437"/>
+                  <a:pt x="1861799" y="3212666"/>
+                  <a:pt x="1663630" y="3291506"/>
+                </a:cubicBezTo>
+                <a:cubicBezTo>
+                  <a:pt x="1465461" y="3370346"/>
+                  <a:pt x="1130609" y="3279540"/>
+                  <a:pt x="917865" y="3291506"/>
+                </a:cubicBezTo>
+                <a:cubicBezTo>
+                  <a:pt x="705121" y="3303472"/>
+                  <a:pt x="644862" y="3276049"/>
+                  <a:pt x="516299" y="3291506"/>
+                </a:cubicBezTo>
+                <a:cubicBezTo>
+                  <a:pt x="387736" y="3306963"/>
+                  <a:pt x="203207" y="3279235"/>
+                  <a:pt x="0" y="3291506"/>
+                </a:cubicBezTo>
+                <a:cubicBezTo>
+                  <a:pt x="-34437" y="3087102"/>
+                  <a:pt x="26706" y="3012623"/>
+                  <a:pt x="0" y="2808752"/>
+                </a:cubicBezTo>
+                <a:cubicBezTo>
+                  <a:pt x="-26706" y="2604881"/>
+                  <a:pt x="3156" y="2455795"/>
+                  <a:pt x="0" y="2293083"/>
+                </a:cubicBezTo>
+                <a:cubicBezTo>
+                  <a:pt x="-3156" y="2130371"/>
+                  <a:pt x="43130" y="1984476"/>
+                  <a:pt x="0" y="1711583"/>
+                </a:cubicBezTo>
+                <a:cubicBezTo>
+                  <a:pt x="-43130" y="1438690"/>
+                  <a:pt x="50662" y="1353340"/>
+                  <a:pt x="0" y="1162999"/>
+                </a:cubicBezTo>
+                <a:cubicBezTo>
+                  <a:pt x="-50662" y="972658"/>
+                  <a:pt x="45865" y="848980"/>
+                  <a:pt x="0" y="680245"/>
+                </a:cubicBezTo>
+                <a:cubicBezTo>
+                  <a:pt x="-45865" y="511510"/>
+                  <a:pt x="47605" y="177687"/>
+                  <a:pt x="0" y="0"/>
+                </a:cubicBezTo>
+                <a:close/>
+              </a:path>
+            </a:pathLst>
+          </a:custGeom>
+          <a:solidFill>
+            <a:srgbClr val="00B0F0"/>
+          </a:solidFill>
+          <a:ln>
+            <a:extLst>
+              <a:ext uri="{C807C97D-BFC1-408E-A445-0C87EB9F89A2}">
+                <ask:lineSketchStyleProps xmlns:ask="http://schemas.microsoft.com/office/drawing/2018/sketchyshapes" sd="249856539">
+                  <a:prstGeom prst="rect">
+                    <a:avLst/>
+                  </a:prstGeom>
+                  <ask:type>
+                    <ask:lineSketchScribble/>
+                  </ask:type>
+                </ask:lineSketchStyleProps>
+              </a:ext>
+            </a:extLst>
+          </a:ln>
+        </p:spPr>
+        <p:style>
+          <a:lnRef idx="2">
+            <a:schemeClr val="accent1">
+              <a:shade val="15000"/>
+            </a:schemeClr>
+          </a:lnRef>
+          <a:fillRef idx="1">
+            <a:schemeClr val="accent1"/>
+          </a:fillRef>
+          <a:effectRef idx="0">
+            <a:schemeClr val="accent1"/>
+          </a:effectRef>
+          <a:fontRef idx="minor">
+            <a:schemeClr val="lt1"/>
+          </a:fontRef>
+        </p:style>
+        <p:txBody>
+          <a:bodyPr rtlCol="0" anchor="ctr"/>
+          <a:lstStyle/>
+          <a:p>
+            <a:pPr algn="ctr"/>
+            <a:endParaRPr lang="fr-FR"/>
+          </a:p>
+        </p:txBody>
+      </p:sp>
+      <p:sp>
+        <p:nvSpPr>
+          <p:cNvPr id="2" name="Título 1">
+            <a:extLst>
+              <a:ext uri="{FF2B5EF4-FFF2-40B4-BE49-F238E27FC236}">
+                <a16:creationId xmlns:a16="http://schemas.microsoft.com/office/drawing/2014/main" id="{DDE1A45F-2FC1-771A-6B0F-370B1DDFD7AB}"/>
+              </a:ext>
+            </a:extLst>
+          </p:cNvPr>
+          <p:cNvSpPr>
+            <a:spLocks noGrp="1"/>
+          </p:cNvSpPr>
+          <p:nvPr>
+            <p:ph type="title"/>
+          </p:nvPr>
+        </p:nvSpPr>
+        <p:spPr/>
+        <p:txBody>
+          <a:bodyPr/>
+          <a:lstStyle/>
+          <a:p>
+            <a:r>
+              <a:rPr lang="en-US" dirty="0"/>
+              <a:t>Discuss Item# 1</a:t>
+            </a:r>
+            <a:endParaRPr lang="en-US" noProof="0" dirty="0"/>
+          </a:p>
+        </p:txBody>
+      </p:sp>
+      <p:sp>
+        <p:nvSpPr>
+          <p:cNvPr id="6" name="Marcador de número de diapositiva 5">
+            <a:extLst>
+              <a:ext uri="{FF2B5EF4-FFF2-40B4-BE49-F238E27FC236}">
+                <a16:creationId xmlns:a16="http://schemas.microsoft.com/office/drawing/2014/main" id="{A3524E66-9035-085D-0694-77280B461B7A}"/>
+              </a:ext>
+            </a:extLst>
+          </p:cNvPr>
+          <p:cNvSpPr>
+            <a:spLocks noGrp="1"/>
+          </p:cNvSpPr>
+          <p:nvPr>
+            <p:ph type="sldNum" sz="quarter" idx="12"/>
+          </p:nvPr>
+        </p:nvSpPr>
+        <p:spPr/>
+        <p:txBody>
+          <a:bodyPr/>
+          <a:lstStyle/>
+          <a:p>
+            <a:pPr>
+              <a:defRPr/>
+            </a:pPr>
+            <a:fld id="{54AB3086-DE1C-4E19-8CD7-9E76252A0DD1}" type="slidenum">
+              <a:rPr lang="en-US" noProof="0" smtClean="0"/>
+              <a:pPr>
+                <a:defRPr/>
+              </a:pPr>
+              <a:t>4</a:t>
+            </a:fld>
+            <a:endParaRPr lang="en-US" noProof="0" dirty="0"/>
+          </a:p>
+        </p:txBody>
+      </p:sp>
+      <p:sp>
+        <p:nvSpPr>
+          <p:cNvPr id="7" name="Marcador de número de diapositiva 5">
+            <a:extLst>
+              <a:ext uri="{FF2B5EF4-FFF2-40B4-BE49-F238E27FC236}">
+                <a16:creationId xmlns:a16="http://schemas.microsoft.com/office/drawing/2014/main" id="{B4CC56F9-890F-93CA-5F94-BDFFEB02986E}"/>
+              </a:ext>
+            </a:extLst>
+          </p:cNvPr>
+          <p:cNvSpPr txBox="1">
+            <a:spLocks/>
+          </p:cNvSpPr>
+          <p:nvPr/>
+        </p:nvSpPr>
+        <p:spPr>
+          <a:xfrm>
+            <a:off x="8610600" y="6356350"/>
+            <a:ext cx="2743200" cy="365125"/>
+          </a:xfrm>
+          <a:prstGeom prst="rect">
+            <a:avLst/>
+          </a:prstGeom>
+        </p:spPr>
+        <p:txBody>
+          <a:bodyPr vert="horz" lIns="91440" tIns="45720" rIns="91440" bIns="45720" rtlCol="0" anchor="ctr"/>
+          <a:lstStyle>
+            <a:defPPr>
+              <a:defRPr lang="es-ES"/>
+            </a:defPPr>
+            <a:lvl1pPr marL="0" algn="r" defTabSz="914400" rtl="0" eaLnBrk="1" fontAlgn="auto" latinLnBrk="0" hangingPunct="1">
+              <a:spcBef>
+                <a:spcPts val="0"/>
+              </a:spcBef>
+              <a:spcAft>
+                <a:spcPts val="0"/>
+              </a:spcAft>
+              <a:defRPr sz="1200" kern="1200">
+                <a:solidFill>
+                  <a:schemeClr val="tx1">
+                    <a:tint val="75000"/>
+                  </a:schemeClr>
+                </a:solidFill>
+                <a:latin typeface="+mn-lt"/>
+                <a:ea typeface="+mn-ea"/>
+                <a:cs typeface="+mn-cs"/>
+              </a:defRPr>
+            </a:lvl1pPr>
+            <a:lvl2pPr marL="457200" algn="l" defTabSz="914400" rtl="0" eaLnBrk="1" latinLnBrk="0" hangingPunct="1">
+              <a:defRPr sz="1800" kern="1200">
+                <a:solidFill>
+                  <a:schemeClr val="tx1"/>
+                </a:solidFill>
+                <a:latin typeface="+mn-lt"/>
+                <a:ea typeface="+mn-ea"/>
+                <a:cs typeface="+mn-cs"/>
+              </a:defRPr>
+            </a:lvl2pPr>
+            <a:lvl3pPr marL="914400" algn="l" defTabSz="914400" rtl="0" eaLnBrk="1" latinLnBrk="0" hangingPunct="1">
+              <a:defRPr sz="1800" kern="1200">
+                <a:solidFill>
+                  <a:schemeClr val="tx1"/>
+                </a:solidFill>
+                <a:latin typeface="+mn-lt"/>
+                <a:ea typeface="+mn-ea"/>
+                <a:cs typeface="+mn-cs"/>
+              </a:defRPr>
+            </a:lvl3pPr>
+            <a:lvl4pPr marL="1371600" algn="l" defTabSz="914400" rtl="0" eaLnBrk="1" latinLnBrk="0" hangingPunct="1">
+              <a:defRPr sz="1800" kern="1200">
+                <a:solidFill>
+                  <a:schemeClr val="tx1"/>
+                </a:solidFill>
+                <a:latin typeface="+mn-lt"/>
+                <a:ea typeface="+mn-ea"/>
+                <a:cs typeface="+mn-cs"/>
+              </a:defRPr>
+            </a:lvl4pPr>
+            <a:lvl5pPr marL="1828800" algn="l" defTabSz="914400" rtl="0" eaLnBrk="1" latinLnBrk="0" hangingPunct="1">
+              <a:defRPr sz="1800" kern="1200">
+                <a:solidFill>
+                  <a:schemeClr val="tx1"/>
+                </a:solidFill>
+                <a:latin typeface="+mn-lt"/>
+                <a:ea typeface="+mn-ea"/>
+                <a:cs typeface="+mn-cs"/>
+              </a:defRPr>
+            </a:lvl5pPr>
+            <a:lvl6pPr marL="2286000" algn="l" defTabSz="914400" rtl="0" eaLnBrk="1" latinLnBrk="0" hangingPunct="1">
+              <a:defRPr sz="1800" kern="1200">
+                <a:solidFill>
+                  <a:schemeClr val="tx1"/>
+                </a:solidFill>
+                <a:latin typeface="+mn-lt"/>
+                <a:ea typeface="+mn-ea"/>
+                <a:cs typeface="+mn-cs"/>
+              </a:defRPr>
+            </a:lvl6pPr>
+            <a:lvl7pPr marL="2743200" algn="l" defTabSz="914400" rtl="0" eaLnBrk="1" latinLnBrk="0" hangingPunct="1">
+              <a:defRPr sz="1800" kern="1200">
+                <a:solidFill>
+                  <a:schemeClr val="tx1"/>
+                </a:solidFill>
+                <a:latin typeface="+mn-lt"/>
+                <a:ea typeface="+mn-ea"/>
+                <a:cs typeface="+mn-cs"/>
+              </a:defRPr>
+            </a:lvl7pPr>
+            <a:lvl8pPr marL="3200400" algn="l" defTabSz="914400" rtl="0" eaLnBrk="1" latinLnBrk="0" hangingPunct="1">
+              <a:defRPr sz="1800" kern="1200">
+                <a:solidFill>
+                  <a:schemeClr val="tx1"/>
+                </a:solidFill>
+                <a:latin typeface="+mn-lt"/>
+                <a:ea typeface="+mn-ea"/>
+                <a:cs typeface="+mn-cs"/>
+              </a:defRPr>
+            </a:lvl8pPr>
+            <a:lvl9pPr marL="3657600" algn="l" defTabSz="914400" rtl="0" eaLnBrk="1" latinLnBrk="0" hangingPunct="1">
+              <a:defRPr sz="1800" kern="1200">
+                <a:solidFill>
+                  <a:schemeClr val="tx1"/>
+                </a:solidFill>
+                <a:latin typeface="+mn-lt"/>
+                <a:ea typeface="+mn-ea"/>
+                <a:cs typeface="+mn-cs"/>
+              </a:defRPr>
+            </a:lvl9pPr>
+          </a:lstStyle>
+          <a:p>
+            <a:pPr>
+              <a:defRPr/>
+            </a:pPr>
+            <a:fld id="{54AB3086-DE1C-4E19-8CD7-9E76252A0DD1}" type="slidenum">
+              <a:rPr lang="en-US" smtClean="0"/>
+              <a:pPr>
+                <a:defRPr/>
+              </a:pPr>
+              <a:t>4</a:t>
+            </a:fld>
+            <a:endParaRPr lang="en-US" dirty="0"/>
+          </a:p>
+        </p:txBody>
+      </p:sp>
+      <p:sp>
+        <p:nvSpPr>
+          <p:cNvPr id="8" name="Marcador de contenido 2">
+            <a:extLst>
+              <a:ext uri="{FF2B5EF4-FFF2-40B4-BE49-F238E27FC236}">
+                <a16:creationId xmlns:a16="http://schemas.microsoft.com/office/drawing/2014/main" id="{2216BE0F-76BD-1BFD-E782-6B3B1F750DC9}"/>
+              </a:ext>
+            </a:extLst>
+          </p:cNvPr>
+          <p:cNvSpPr>
+            <a:spLocks noGrp="1"/>
+          </p:cNvSpPr>
+          <p:nvPr>
+            <p:ph idx="1"/>
+          </p:nvPr>
+        </p:nvSpPr>
+        <p:spPr>
+          <a:xfrm>
+            <a:off x="838200" y="1481327"/>
+            <a:ext cx="8056057" cy="5159771"/>
+          </a:xfrm>
+        </p:spPr>
+        <p:txBody>
+          <a:bodyPr/>
+          <a:lstStyle/>
+          <a:p>
+            <a:r>
+              <a:rPr lang="en-US" sz="3200" noProof="0" dirty="0">
+                <a:solidFill>
+                  <a:schemeClr val="bg1">
+                    <a:lumMod val="85000"/>
+                  </a:schemeClr>
+                </a:solidFill>
+              </a:rPr>
+              <a:t>List of </a:t>
+            </a:r>
+            <a:r>
+              <a:rPr lang="en-US" sz="3200" b="1" i="1" noProof="0" dirty="0">
+                <a:solidFill>
+                  <a:schemeClr val="bg1">
+                    <a:lumMod val="85000"/>
+                  </a:schemeClr>
+                </a:solidFill>
+              </a:rPr>
+              <a:t>updated operators</a:t>
+            </a:r>
+            <a:r>
+              <a:rPr lang="en-US" sz="3200" noProof="0" dirty="0">
+                <a:solidFill>
+                  <a:schemeClr val="bg1">
+                    <a:lumMod val="85000"/>
+                  </a:schemeClr>
+                </a:solidFill>
+              </a:rPr>
+              <a:t>’ requirements is </a:t>
+            </a:r>
+            <a:r>
+              <a:rPr lang="en-US" sz="3200" b="1" i="1" noProof="0" dirty="0">
+                <a:solidFill>
+                  <a:schemeClr val="bg1">
+                    <a:lumMod val="85000"/>
+                  </a:schemeClr>
+                </a:solidFill>
+              </a:rPr>
+              <a:t>stable</a:t>
+            </a:r>
+          </a:p>
+          <a:p>
+            <a:r>
+              <a:rPr lang="en-US" sz="3200" noProof="0" dirty="0">
+                <a:solidFill>
+                  <a:schemeClr val="bg1">
+                    <a:lumMod val="85000"/>
+                  </a:schemeClr>
+                </a:solidFill>
+              </a:rPr>
+              <a:t>Operators’ </a:t>
+            </a:r>
+            <a:r>
+              <a:rPr lang="en-US" sz="3200" b="1" i="1" noProof="0" dirty="0">
+                <a:solidFill>
+                  <a:schemeClr val="bg1">
+                    <a:lumMod val="85000"/>
+                  </a:schemeClr>
+                </a:solidFill>
+              </a:rPr>
+              <a:t>prioritization</a:t>
+            </a:r>
+            <a:r>
+              <a:rPr lang="en-US" sz="3200" noProof="0" dirty="0">
+                <a:solidFill>
+                  <a:schemeClr val="bg1">
+                    <a:lumMod val="85000"/>
+                  </a:schemeClr>
+                </a:solidFill>
+              </a:rPr>
+              <a:t> of that list (strong, nice-to-have) is </a:t>
+            </a:r>
+            <a:r>
+              <a:rPr lang="en-US" sz="3200" b="1" i="1" noProof="0" dirty="0">
+                <a:solidFill>
+                  <a:schemeClr val="bg1">
+                    <a:lumMod val="85000"/>
+                  </a:schemeClr>
+                </a:solidFill>
+              </a:rPr>
+              <a:t>stable</a:t>
+            </a:r>
+            <a:r>
+              <a:rPr lang="en-US" sz="3200" noProof="0" dirty="0">
+                <a:solidFill>
+                  <a:schemeClr val="bg1">
+                    <a:lumMod val="85000"/>
+                  </a:schemeClr>
+                </a:solidFill>
+              </a:rPr>
+              <a:t> as well</a:t>
+            </a:r>
+          </a:p>
+          <a:p>
+            <a:r>
+              <a:rPr lang="en-US" sz="3200" dirty="0"/>
+              <a:t>These requirements need to be balanced to also take into account other views (vendors, etc.): collaborative requirements (</a:t>
+            </a:r>
+            <a:r>
+              <a:rPr lang="en-US" sz="3200" b="1" i="1" dirty="0">
+                <a:solidFill>
+                  <a:srgbClr val="FFC000"/>
+                </a:solidFill>
+              </a:rPr>
+              <a:t>In progress</a:t>
+            </a:r>
+            <a:r>
+              <a:rPr lang="en-US" sz="3200" dirty="0"/>
+              <a:t>)</a:t>
+            </a:r>
+          </a:p>
+          <a:p>
+            <a:pPr lvl="1"/>
+            <a:r>
+              <a:rPr lang="en-US" sz="2800" dirty="0"/>
+              <a:t>Build a very few set of actionable items that will be the focus of work in the IETF </a:t>
+            </a:r>
+          </a:p>
+          <a:p>
+            <a:pPr lvl="1"/>
+            <a:r>
+              <a:rPr lang="en-US" sz="2800" noProof="0" dirty="0"/>
+              <a:t>Actionable by the IETF as a whole, including WGs, ADs, etc. Not specifically, NMOP</a:t>
+            </a:r>
+          </a:p>
+          <a:p>
+            <a:pPr lvl="1"/>
+            <a:endParaRPr lang="en-US" sz="2800" noProof="0" dirty="0"/>
+          </a:p>
+        </p:txBody>
+      </p:sp>
+      <p:sp>
+        <p:nvSpPr>
+          <p:cNvPr id="9" name="Rectangle 8">
+            <a:extLst>
+              <a:ext uri="{FF2B5EF4-FFF2-40B4-BE49-F238E27FC236}">
+                <a16:creationId xmlns:a16="http://schemas.microsoft.com/office/drawing/2014/main" id="{A9559994-3175-1FB4-EE8B-86007FE43845}"/>
+              </a:ext>
+            </a:extLst>
+          </p:cNvPr>
+          <p:cNvSpPr/>
+          <p:nvPr/>
+        </p:nvSpPr>
+        <p:spPr>
+          <a:xfrm>
+            <a:off x="2974205" y="1785961"/>
+            <a:ext cx="8866183" cy="1405940"/>
+          </a:xfrm>
+          <a:custGeom>
+            <a:avLst/>
+            <a:gdLst>
+              <a:gd name="connsiteX0" fmla="*/ 0 w 8866183"/>
+              <a:gd name="connsiteY0" fmla="*/ 0 h 1405940"/>
+              <a:gd name="connsiteX1" fmla="*/ 502417 w 8866183"/>
+              <a:gd name="connsiteY1" fmla="*/ 0 h 1405940"/>
+              <a:gd name="connsiteX2" fmla="*/ 1270820 w 8866183"/>
+              <a:gd name="connsiteY2" fmla="*/ 0 h 1405940"/>
+              <a:gd name="connsiteX3" fmla="*/ 2039222 w 8866183"/>
+              <a:gd name="connsiteY3" fmla="*/ 0 h 1405940"/>
+              <a:gd name="connsiteX4" fmla="*/ 2541639 w 8866183"/>
+              <a:gd name="connsiteY4" fmla="*/ 0 h 1405940"/>
+              <a:gd name="connsiteX5" fmla="*/ 3132718 w 8866183"/>
+              <a:gd name="connsiteY5" fmla="*/ 0 h 1405940"/>
+              <a:gd name="connsiteX6" fmla="*/ 3723797 w 8866183"/>
+              <a:gd name="connsiteY6" fmla="*/ 0 h 1405940"/>
+              <a:gd name="connsiteX7" fmla="*/ 4492199 w 8866183"/>
+              <a:gd name="connsiteY7" fmla="*/ 0 h 1405940"/>
+              <a:gd name="connsiteX8" fmla="*/ 5083278 w 8866183"/>
+              <a:gd name="connsiteY8" fmla="*/ 0 h 1405940"/>
+              <a:gd name="connsiteX9" fmla="*/ 5674357 w 8866183"/>
+              <a:gd name="connsiteY9" fmla="*/ 0 h 1405940"/>
+              <a:gd name="connsiteX10" fmla="*/ 6265436 w 8866183"/>
+              <a:gd name="connsiteY10" fmla="*/ 0 h 1405940"/>
+              <a:gd name="connsiteX11" fmla="*/ 6856515 w 8866183"/>
+              <a:gd name="connsiteY11" fmla="*/ 0 h 1405940"/>
+              <a:gd name="connsiteX12" fmla="*/ 7624917 w 8866183"/>
+              <a:gd name="connsiteY12" fmla="*/ 0 h 1405940"/>
+              <a:gd name="connsiteX13" fmla="*/ 8304658 w 8866183"/>
+              <a:gd name="connsiteY13" fmla="*/ 0 h 1405940"/>
+              <a:gd name="connsiteX14" fmla="*/ 8866183 w 8866183"/>
+              <a:gd name="connsiteY14" fmla="*/ 0 h 1405940"/>
+              <a:gd name="connsiteX15" fmla="*/ 8866183 w 8866183"/>
+              <a:gd name="connsiteY15" fmla="*/ 482706 h 1405940"/>
+              <a:gd name="connsiteX16" fmla="*/ 8866183 w 8866183"/>
+              <a:gd name="connsiteY16" fmla="*/ 965412 h 1405940"/>
+              <a:gd name="connsiteX17" fmla="*/ 8866183 w 8866183"/>
+              <a:gd name="connsiteY17" fmla="*/ 1405940 h 1405940"/>
+              <a:gd name="connsiteX18" fmla="*/ 8275104 w 8866183"/>
+              <a:gd name="connsiteY18" fmla="*/ 1405940 h 1405940"/>
+              <a:gd name="connsiteX19" fmla="*/ 7772687 w 8866183"/>
+              <a:gd name="connsiteY19" fmla="*/ 1405940 h 1405940"/>
+              <a:gd name="connsiteX20" fmla="*/ 7270270 w 8866183"/>
+              <a:gd name="connsiteY20" fmla="*/ 1405940 h 1405940"/>
+              <a:gd name="connsiteX21" fmla="*/ 6679191 w 8866183"/>
+              <a:gd name="connsiteY21" fmla="*/ 1405940 h 1405940"/>
+              <a:gd name="connsiteX22" fmla="*/ 5910789 w 8866183"/>
+              <a:gd name="connsiteY22" fmla="*/ 1405940 h 1405940"/>
+              <a:gd name="connsiteX23" fmla="*/ 5142386 w 8866183"/>
+              <a:gd name="connsiteY23" fmla="*/ 1405940 h 1405940"/>
+              <a:gd name="connsiteX24" fmla="*/ 4462645 w 8866183"/>
+              <a:gd name="connsiteY24" fmla="*/ 1405940 h 1405940"/>
+              <a:gd name="connsiteX25" fmla="*/ 3782905 w 8866183"/>
+              <a:gd name="connsiteY25" fmla="*/ 1405940 h 1405940"/>
+              <a:gd name="connsiteX26" fmla="*/ 3103164 w 8866183"/>
+              <a:gd name="connsiteY26" fmla="*/ 1405940 h 1405940"/>
+              <a:gd name="connsiteX27" fmla="*/ 2334762 w 8866183"/>
+              <a:gd name="connsiteY27" fmla="*/ 1405940 h 1405940"/>
+              <a:gd name="connsiteX28" fmla="*/ 1921006 w 8866183"/>
+              <a:gd name="connsiteY28" fmla="*/ 1405940 h 1405940"/>
+              <a:gd name="connsiteX29" fmla="*/ 1329927 w 8866183"/>
+              <a:gd name="connsiteY29" fmla="*/ 1405940 h 1405940"/>
+              <a:gd name="connsiteX30" fmla="*/ 650187 w 8866183"/>
+              <a:gd name="connsiteY30" fmla="*/ 1405940 h 1405940"/>
+              <a:gd name="connsiteX31" fmla="*/ 0 w 8866183"/>
+              <a:gd name="connsiteY31" fmla="*/ 1405940 h 1405940"/>
+              <a:gd name="connsiteX32" fmla="*/ 0 w 8866183"/>
+              <a:gd name="connsiteY32" fmla="*/ 937293 h 1405940"/>
+              <a:gd name="connsiteX33" fmla="*/ 0 w 8866183"/>
+              <a:gd name="connsiteY33" fmla="*/ 454587 h 1405940"/>
+              <a:gd name="connsiteX34" fmla="*/ 0 w 8866183"/>
+              <a:gd name="connsiteY34" fmla="*/ 0 h 1405940"/>
+            </a:gdLst>
+            <a:ahLst/>
+            <a:cxnLst>
+              <a:cxn ang="0">
+                <a:pos x="connsiteX0" y="connsiteY0"/>
+              </a:cxn>
+              <a:cxn ang="0">
+                <a:pos x="connsiteX1" y="connsiteY1"/>
+              </a:cxn>
+              <a:cxn ang="0">
+                <a:pos x="connsiteX2" y="connsiteY2"/>
+              </a:cxn>
+              <a:cxn ang="0">
+                <a:pos x="connsiteX3" y="connsiteY3"/>
+              </a:cxn>
+              <a:cxn ang="0">
+                <a:pos x="connsiteX4" y="connsiteY4"/>
+              </a:cxn>
+              <a:cxn ang="0">
+                <a:pos x="connsiteX5" y="connsiteY5"/>
+              </a:cxn>
+              <a:cxn ang="0">
+                <a:pos x="connsiteX6" y="connsiteY6"/>
+              </a:cxn>
+              <a:cxn ang="0">
+                <a:pos x="connsiteX7" y="connsiteY7"/>
+              </a:cxn>
+              <a:cxn ang="0">
+                <a:pos x="connsiteX8" y="connsiteY8"/>
+              </a:cxn>
+              <a:cxn ang="0">
+                <a:pos x="connsiteX9" y="connsiteY9"/>
+              </a:cxn>
+              <a:cxn ang="0">
+                <a:pos x="connsiteX10" y="connsiteY10"/>
+              </a:cxn>
+              <a:cxn ang="0">
+                <a:pos x="connsiteX11" y="connsiteY11"/>
+              </a:cxn>
+              <a:cxn ang="0">
+                <a:pos x="connsiteX12" y="connsiteY12"/>
+              </a:cxn>
+              <a:cxn ang="0">
+                <a:pos x="connsiteX13" y="connsiteY13"/>
+              </a:cxn>
+              <a:cxn ang="0">
+                <a:pos x="connsiteX14" y="connsiteY14"/>
+              </a:cxn>
+              <a:cxn ang="0">
+                <a:pos x="connsiteX15" y="connsiteY15"/>
+              </a:cxn>
+              <a:cxn ang="0">
+                <a:pos x="connsiteX16" y="connsiteY16"/>
+              </a:cxn>
+              <a:cxn ang="0">
+                <a:pos x="connsiteX17" y="connsiteY17"/>
+              </a:cxn>
+              <a:cxn ang="0">
+                <a:pos x="connsiteX18" y="connsiteY18"/>
+              </a:cxn>
+              <a:cxn ang="0">
+                <a:pos x="connsiteX19" y="connsiteY19"/>
+              </a:cxn>
+              <a:cxn ang="0">
+                <a:pos x="connsiteX20" y="connsiteY20"/>
+              </a:cxn>
+              <a:cxn ang="0">
+                <a:pos x="connsiteX21" y="connsiteY21"/>
+              </a:cxn>
+              <a:cxn ang="0">
+                <a:pos x="connsiteX22" y="connsiteY22"/>
+              </a:cxn>
+              <a:cxn ang="0">
+                <a:pos x="connsiteX23" y="connsiteY23"/>
+              </a:cxn>
+              <a:cxn ang="0">
+                <a:pos x="connsiteX24" y="connsiteY24"/>
+              </a:cxn>
+              <a:cxn ang="0">
+                <a:pos x="connsiteX25" y="connsiteY25"/>
+              </a:cxn>
+              <a:cxn ang="0">
+                <a:pos x="connsiteX26" y="connsiteY26"/>
+              </a:cxn>
+              <a:cxn ang="0">
+                <a:pos x="connsiteX27" y="connsiteY27"/>
+              </a:cxn>
+              <a:cxn ang="0">
+                <a:pos x="connsiteX28" y="connsiteY28"/>
+              </a:cxn>
+              <a:cxn ang="0">
+                <a:pos x="connsiteX29" y="connsiteY29"/>
+              </a:cxn>
+              <a:cxn ang="0">
+                <a:pos x="connsiteX30" y="connsiteY30"/>
+              </a:cxn>
+              <a:cxn ang="0">
+                <a:pos x="connsiteX31" y="connsiteY31"/>
+              </a:cxn>
+              <a:cxn ang="0">
+                <a:pos x="connsiteX32" y="connsiteY32"/>
+              </a:cxn>
+              <a:cxn ang="0">
+                <a:pos x="connsiteX33" y="connsiteY33"/>
+              </a:cxn>
+              <a:cxn ang="0">
+                <a:pos x="connsiteX34" y="connsiteY34"/>
+              </a:cxn>
+            </a:cxnLst>
+            <a:rect l="l" t="t" r="r" b="b"/>
+            <a:pathLst>
+              <a:path w="8866183" h="1405940" fill="none" extrusionOk="0">
+                <a:moveTo>
+                  <a:pt x="0" y="0"/>
+                </a:moveTo>
+                <a:cubicBezTo>
+                  <a:pt x="177240" y="-42284"/>
+                  <a:pt x="400885" y="24539"/>
+                  <a:pt x="502417" y="0"/>
+                </a:cubicBezTo>
+                <a:cubicBezTo>
+                  <a:pt x="603949" y="-24539"/>
+                  <a:pt x="999485" y="32908"/>
+                  <a:pt x="1270820" y="0"/>
+                </a:cubicBezTo>
+                <a:cubicBezTo>
+                  <a:pt x="1542155" y="-32908"/>
+                  <a:pt x="1862855" y="66379"/>
+                  <a:pt x="2039222" y="0"/>
+                </a:cubicBezTo>
+                <a:cubicBezTo>
+                  <a:pt x="2215589" y="-66379"/>
+                  <a:pt x="2385522" y="24713"/>
+                  <a:pt x="2541639" y="0"/>
+                </a:cubicBezTo>
+                <a:cubicBezTo>
+                  <a:pt x="2697756" y="-24713"/>
+                  <a:pt x="2894945" y="3112"/>
+                  <a:pt x="3132718" y="0"/>
+                </a:cubicBezTo>
+                <a:cubicBezTo>
+                  <a:pt x="3370491" y="-3112"/>
+                  <a:pt x="3482565" y="22955"/>
+                  <a:pt x="3723797" y="0"/>
+                </a:cubicBezTo>
+                <a:cubicBezTo>
+                  <a:pt x="3965029" y="-22955"/>
+                  <a:pt x="4248594" y="16466"/>
+                  <a:pt x="4492199" y="0"/>
+                </a:cubicBezTo>
+                <a:cubicBezTo>
+                  <a:pt x="4735804" y="-16466"/>
+                  <a:pt x="4928983" y="48819"/>
+                  <a:pt x="5083278" y="0"/>
+                </a:cubicBezTo>
+                <a:cubicBezTo>
+                  <a:pt x="5237573" y="-48819"/>
+                  <a:pt x="5496659" y="22380"/>
+                  <a:pt x="5674357" y="0"/>
+                </a:cubicBezTo>
+                <a:cubicBezTo>
+                  <a:pt x="5852055" y="-22380"/>
+                  <a:pt x="5973703" y="70846"/>
+                  <a:pt x="6265436" y="0"/>
+                </a:cubicBezTo>
+                <a:cubicBezTo>
+                  <a:pt x="6557169" y="-70846"/>
+                  <a:pt x="6672001" y="25413"/>
+                  <a:pt x="6856515" y="0"/>
+                </a:cubicBezTo>
+                <a:cubicBezTo>
+                  <a:pt x="7041029" y="-25413"/>
+                  <a:pt x="7397245" y="38261"/>
+                  <a:pt x="7624917" y="0"/>
+                </a:cubicBezTo>
+                <a:cubicBezTo>
+                  <a:pt x="7852589" y="-38261"/>
+                  <a:pt x="8105868" y="52975"/>
+                  <a:pt x="8304658" y="0"/>
+                </a:cubicBezTo>
+                <a:cubicBezTo>
+                  <a:pt x="8503448" y="-52975"/>
+                  <a:pt x="8741834" y="54100"/>
+                  <a:pt x="8866183" y="0"/>
+                </a:cubicBezTo>
+                <a:cubicBezTo>
+                  <a:pt x="8873678" y="106128"/>
+                  <a:pt x="8817470" y="381591"/>
+                  <a:pt x="8866183" y="482706"/>
+                </a:cubicBezTo>
+                <a:cubicBezTo>
+                  <a:pt x="8914896" y="583821"/>
+                  <a:pt x="8824796" y="783091"/>
+                  <a:pt x="8866183" y="965412"/>
+                </a:cubicBezTo>
+                <a:cubicBezTo>
+                  <a:pt x="8907570" y="1147733"/>
+                  <a:pt x="8844251" y="1309623"/>
+                  <a:pt x="8866183" y="1405940"/>
+                </a:cubicBezTo>
+                <a:cubicBezTo>
+                  <a:pt x="8694707" y="1424808"/>
+                  <a:pt x="8488027" y="1397153"/>
+                  <a:pt x="8275104" y="1405940"/>
+                </a:cubicBezTo>
+                <a:cubicBezTo>
+                  <a:pt x="8062181" y="1414727"/>
+                  <a:pt x="8022553" y="1368133"/>
+                  <a:pt x="7772687" y="1405940"/>
+                </a:cubicBezTo>
+                <a:cubicBezTo>
+                  <a:pt x="7522821" y="1443747"/>
+                  <a:pt x="7433354" y="1391303"/>
+                  <a:pt x="7270270" y="1405940"/>
+                </a:cubicBezTo>
+                <a:cubicBezTo>
+                  <a:pt x="7107186" y="1420577"/>
+                  <a:pt x="6906019" y="1362594"/>
+                  <a:pt x="6679191" y="1405940"/>
+                </a:cubicBezTo>
+                <a:cubicBezTo>
+                  <a:pt x="6452363" y="1449286"/>
+                  <a:pt x="6237123" y="1384679"/>
+                  <a:pt x="5910789" y="1405940"/>
+                </a:cubicBezTo>
+                <a:cubicBezTo>
+                  <a:pt x="5584455" y="1427201"/>
+                  <a:pt x="5325373" y="1328114"/>
+                  <a:pt x="5142386" y="1405940"/>
+                </a:cubicBezTo>
+                <a:cubicBezTo>
+                  <a:pt x="4959399" y="1483766"/>
+                  <a:pt x="4787239" y="1344046"/>
+                  <a:pt x="4462645" y="1405940"/>
+                </a:cubicBezTo>
+                <a:cubicBezTo>
+                  <a:pt x="4138051" y="1467834"/>
+                  <a:pt x="3971179" y="1354796"/>
+                  <a:pt x="3782905" y="1405940"/>
+                </a:cubicBezTo>
+                <a:cubicBezTo>
+                  <a:pt x="3594631" y="1457084"/>
+                  <a:pt x="3315171" y="1400009"/>
+                  <a:pt x="3103164" y="1405940"/>
+                </a:cubicBezTo>
+                <a:cubicBezTo>
+                  <a:pt x="2891157" y="1411871"/>
+                  <a:pt x="2686946" y="1319821"/>
+                  <a:pt x="2334762" y="1405940"/>
+                </a:cubicBezTo>
+                <a:cubicBezTo>
+                  <a:pt x="1982578" y="1492059"/>
+                  <a:pt x="2004784" y="1369933"/>
+                  <a:pt x="1921006" y="1405940"/>
+                </a:cubicBezTo>
+                <a:cubicBezTo>
+                  <a:pt x="1837228" y="1441947"/>
+                  <a:pt x="1601665" y="1376636"/>
+                  <a:pt x="1329927" y="1405940"/>
+                </a:cubicBezTo>
+                <a:cubicBezTo>
+                  <a:pt x="1058189" y="1435244"/>
+                  <a:pt x="853087" y="1397905"/>
+                  <a:pt x="650187" y="1405940"/>
+                </a:cubicBezTo>
+                <a:cubicBezTo>
+                  <a:pt x="447287" y="1413975"/>
+                  <a:pt x="157560" y="1390649"/>
+                  <a:pt x="0" y="1405940"/>
+                </a:cubicBezTo>
+                <a:cubicBezTo>
+                  <a:pt x="-7866" y="1269901"/>
+                  <a:pt x="32675" y="1075108"/>
+                  <a:pt x="0" y="937293"/>
+                </a:cubicBezTo>
+                <a:cubicBezTo>
+                  <a:pt x="-32675" y="799478"/>
+                  <a:pt x="15339" y="687049"/>
+                  <a:pt x="0" y="454587"/>
+                </a:cubicBezTo>
+                <a:cubicBezTo>
+                  <a:pt x="-15339" y="222125"/>
+                  <a:pt x="33908" y="145835"/>
+                  <a:pt x="0" y="0"/>
+                </a:cubicBezTo>
+                <a:close/>
+              </a:path>
+              <a:path w="8866183" h="1405940" stroke="0" extrusionOk="0">
+                <a:moveTo>
+                  <a:pt x="0" y="0"/>
+                </a:moveTo>
+                <a:cubicBezTo>
+                  <a:pt x="285616" y="-25692"/>
+                  <a:pt x="413557" y="33354"/>
+                  <a:pt x="768403" y="0"/>
+                </a:cubicBezTo>
+                <a:cubicBezTo>
+                  <a:pt x="1123249" y="-33354"/>
+                  <a:pt x="970185" y="25333"/>
+                  <a:pt x="1093496" y="0"/>
+                </a:cubicBezTo>
+                <a:cubicBezTo>
+                  <a:pt x="1216807" y="-25333"/>
+                  <a:pt x="1409654" y="3907"/>
+                  <a:pt x="1507251" y="0"/>
+                </a:cubicBezTo>
+                <a:cubicBezTo>
+                  <a:pt x="1604848" y="-3907"/>
+                  <a:pt x="2041975" y="44052"/>
+                  <a:pt x="2275654" y="0"/>
+                </a:cubicBezTo>
+                <a:cubicBezTo>
+                  <a:pt x="2509333" y="-44052"/>
+                  <a:pt x="2514927" y="31139"/>
+                  <a:pt x="2689409" y="0"/>
+                </a:cubicBezTo>
+                <a:cubicBezTo>
+                  <a:pt x="2863891" y="-31139"/>
+                  <a:pt x="3095439" y="51339"/>
+                  <a:pt x="3457811" y="0"/>
+                </a:cubicBezTo>
+                <a:cubicBezTo>
+                  <a:pt x="3820183" y="-51339"/>
+                  <a:pt x="3938918" y="14236"/>
+                  <a:pt x="4226214" y="0"/>
+                </a:cubicBezTo>
+                <a:cubicBezTo>
+                  <a:pt x="4513510" y="-14236"/>
+                  <a:pt x="4757708" y="29963"/>
+                  <a:pt x="4994616" y="0"/>
+                </a:cubicBezTo>
+                <a:cubicBezTo>
+                  <a:pt x="5231524" y="-29963"/>
+                  <a:pt x="5306661" y="59873"/>
+                  <a:pt x="5497033" y="0"/>
+                </a:cubicBezTo>
+                <a:cubicBezTo>
+                  <a:pt x="5687405" y="-59873"/>
+                  <a:pt x="5761866" y="21348"/>
+                  <a:pt x="5910789" y="0"/>
+                </a:cubicBezTo>
+                <a:cubicBezTo>
+                  <a:pt x="6059712" y="-21348"/>
+                  <a:pt x="6160664" y="17412"/>
+                  <a:pt x="6324544" y="0"/>
+                </a:cubicBezTo>
+                <a:cubicBezTo>
+                  <a:pt x="6488425" y="-17412"/>
+                  <a:pt x="6885867" y="70023"/>
+                  <a:pt x="7092946" y="0"/>
+                </a:cubicBezTo>
+                <a:cubicBezTo>
+                  <a:pt x="7300025" y="-70023"/>
+                  <a:pt x="7352816" y="25307"/>
+                  <a:pt x="7418040" y="0"/>
+                </a:cubicBezTo>
+                <a:cubicBezTo>
+                  <a:pt x="7483264" y="-25307"/>
+                  <a:pt x="7741600" y="46399"/>
+                  <a:pt x="7920457" y="0"/>
+                </a:cubicBezTo>
+                <a:cubicBezTo>
+                  <a:pt x="8099314" y="-46399"/>
+                  <a:pt x="8207844" y="30841"/>
+                  <a:pt x="8334212" y="0"/>
+                </a:cubicBezTo>
+                <a:cubicBezTo>
+                  <a:pt x="8460581" y="-30841"/>
+                  <a:pt x="8606117" y="17554"/>
+                  <a:pt x="8866183" y="0"/>
+                </a:cubicBezTo>
+                <a:cubicBezTo>
+                  <a:pt x="8878895" y="210431"/>
+                  <a:pt x="8856341" y="224790"/>
+                  <a:pt x="8866183" y="426468"/>
+                </a:cubicBezTo>
+                <a:cubicBezTo>
+                  <a:pt x="8876025" y="628146"/>
+                  <a:pt x="8855050" y="749227"/>
+                  <a:pt x="8866183" y="923234"/>
+                </a:cubicBezTo>
+                <a:cubicBezTo>
+                  <a:pt x="8877316" y="1097241"/>
+                  <a:pt x="8817166" y="1241073"/>
+                  <a:pt x="8866183" y="1405940"/>
+                </a:cubicBezTo>
+                <a:cubicBezTo>
+                  <a:pt x="8709165" y="1410456"/>
+                  <a:pt x="8437732" y="1364784"/>
+                  <a:pt x="8097780" y="1405940"/>
+                </a:cubicBezTo>
+                <a:cubicBezTo>
+                  <a:pt x="7757828" y="1447096"/>
+                  <a:pt x="7699431" y="1330622"/>
+                  <a:pt x="7418040" y="1405940"/>
+                </a:cubicBezTo>
+                <a:cubicBezTo>
+                  <a:pt x="7136649" y="1481258"/>
+                  <a:pt x="6981292" y="1403843"/>
+                  <a:pt x="6738299" y="1405940"/>
+                </a:cubicBezTo>
+                <a:cubicBezTo>
+                  <a:pt x="6495306" y="1408037"/>
+                  <a:pt x="6341588" y="1367833"/>
+                  <a:pt x="6235882" y="1405940"/>
+                </a:cubicBezTo>
+                <a:cubicBezTo>
+                  <a:pt x="6130176" y="1444047"/>
+                  <a:pt x="6001260" y="1374950"/>
+                  <a:pt x="5822127" y="1405940"/>
+                </a:cubicBezTo>
+                <a:cubicBezTo>
+                  <a:pt x="5642994" y="1436930"/>
+                  <a:pt x="5480970" y="1352101"/>
+                  <a:pt x="5319710" y="1405940"/>
+                </a:cubicBezTo>
+                <a:cubicBezTo>
+                  <a:pt x="5158450" y="1459779"/>
+                  <a:pt x="5073980" y="1400794"/>
+                  <a:pt x="4994616" y="1405940"/>
+                </a:cubicBezTo>
+                <a:cubicBezTo>
+                  <a:pt x="4915252" y="1411086"/>
+                  <a:pt x="4664695" y="1351091"/>
+                  <a:pt x="4492199" y="1405940"/>
+                </a:cubicBezTo>
+                <a:cubicBezTo>
+                  <a:pt x="4319703" y="1460789"/>
+                  <a:pt x="4093768" y="1395578"/>
+                  <a:pt x="3989782" y="1405940"/>
+                </a:cubicBezTo>
+                <a:cubicBezTo>
+                  <a:pt x="3885796" y="1416302"/>
+                  <a:pt x="3774190" y="1369350"/>
+                  <a:pt x="3576027" y="1405940"/>
+                </a:cubicBezTo>
+                <a:cubicBezTo>
+                  <a:pt x="3377865" y="1442530"/>
+                  <a:pt x="3047765" y="1354918"/>
+                  <a:pt x="2896286" y="1405940"/>
+                </a:cubicBezTo>
+                <a:cubicBezTo>
+                  <a:pt x="2744807" y="1456962"/>
+                  <a:pt x="2660200" y="1397752"/>
+                  <a:pt x="2482531" y="1405940"/>
+                </a:cubicBezTo>
+                <a:cubicBezTo>
+                  <a:pt x="2304863" y="1414128"/>
+                  <a:pt x="2019182" y="1381932"/>
+                  <a:pt x="1891452" y="1405940"/>
+                </a:cubicBezTo>
+                <a:cubicBezTo>
+                  <a:pt x="1763722" y="1429948"/>
+                  <a:pt x="1490241" y="1386490"/>
+                  <a:pt x="1300374" y="1405940"/>
+                </a:cubicBezTo>
+                <a:cubicBezTo>
+                  <a:pt x="1110507" y="1425390"/>
+                  <a:pt x="1090098" y="1369581"/>
+                  <a:pt x="975280" y="1405940"/>
+                </a:cubicBezTo>
+                <a:cubicBezTo>
+                  <a:pt x="860462" y="1442299"/>
+                  <a:pt x="779871" y="1405622"/>
+                  <a:pt x="650187" y="1405940"/>
+                </a:cubicBezTo>
+                <a:cubicBezTo>
+                  <a:pt x="520503" y="1406258"/>
+                  <a:pt x="210426" y="1347085"/>
+                  <a:pt x="0" y="1405940"/>
+                </a:cubicBezTo>
+                <a:cubicBezTo>
+                  <a:pt x="-52974" y="1223184"/>
+                  <a:pt x="23569" y="1034345"/>
+                  <a:pt x="0" y="923234"/>
+                </a:cubicBezTo>
+                <a:cubicBezTo>
+                  <a:pt x="-23569" y="812123"/>
+                  <a:pt x="43626" y="562276"/>
+                  <a:pt x="0" y="426468"/>
+                </a:cubicBezTo>
+                <a:cubicBezTo>
+                  <a:pt x="-43626" y="290660"/>
+                  <a:pt x="47191" y="126742"/>
+                  <a:pt x="0" y="0"/>
+                </a:cubicBezTo>
+                <a:close/>
+              </a:path>
+            </a:pathLst>
+          </a:custGeom>
+          <a:solidFill>
+            <a:schemeClr val="tx1"/>
+          </a:solidFill>
+          <a:ln>
+            <a:extLst>
+              <a:ext uri="{C807C97D-BFC1-408E-A445-0C87EB9F89A2}">
+                <ask:lineSketchStyleProps xmlns:ask="http://schemas.microsoft.com/office/drawing/2018/sketchyshapes" sd="1715687224">
+                  <a:prstGeom prst="rect">
+                    <a:avLst/>
+                  </a:prstGeom>
+                  <ask:type>
+                    <ask:lineSketchScribble/>
+                  </ask:type>
+                </ask:lineSketchStyleProps>
+              </a:ext>
+            </a:extLst>
+          </a:ln>
+        </p:spPr>
+        <p:style>
+          <a:lnRef idx="2">
+            <a:schemeClr val="accent1">
+              <a:shade val="15000"/>
+            </a:schemeClr>
+          </a:lnRef>
+          <a:fillRef idx="1">
+            <a:schemeClr val="accent1"/>
+          </a:fillRef>
+          <a:effectRef idx="0">
+            <a:schemeClr val="accent1"/>
+          </a:effectRef>
+          <a:fontRef idx="minor">
+            <a:schemeClr val="lt1"/>
+          </a:fontRef>
+        </p:style>
+        <p:txBody>
+          <a:bodyPr rtlCol="0" anchor="ctr"/>
+          <a:lstStyle/>
+          <a:p>
+            <a:pPr algn="ctr"/>
+            <a:r>
+              <a:rPr lang="en-US" sz="3200" dirty="0">
+                <a:solidFill>
+                  <a:schemeClr val="bg1"/>
+                </a:solidFill>
+              </a:rPr>
+              <a:t>Should we keep this part of the document?</a:t>
+            </a:r>
+          </a:p>
+          <a:p>
+            <a:pPr algn="ctr"/>
+            <a:r>
+              <a:rPr lang="en-US" sz="3200" dirty="0">
+                <a:solidFill>
+                  <a:schemeClr val="bg1"/>
+                </a:solidFill>
+              </a:rPr>
+              <a:t>Are there objections to keep it in the document?</a:t>
+            </a:r>
+          </a:p>
+        </p:txBody>
+      </p:sp>
+    </p:spTree>
+    <p:extLst>
+      <p:ext uri="{BB962C8B-B14F-4D97-AF65-F5344CB8AC3E}">
+        <p14:creationId xmlns:p14="http://schemas.microsoft.com/office/powerpoint/2010/main" val="623479167"/>
+      </p:ext>
+    </p:extLst>
+  </p:cSld>
+  <p:clrMapOvr>
+    <a:masterClrMapping/>
+  </p:clrMapOvr>
+</p:sld>
+</file>
+
+<file path=ppt/slides/slide5.xml><?xml version="1.0" encoding="utf-8"?>
+<p:sld xmlns:a="http://schemas.openxmlformats.org/drawingml/2006/main" xmlns:r="http://schemas.openxmlformats.org/officeDocument/2006/relationships" xmlns:p="http://schemas.openxmlformats.org/presentationml/2006/main">
+  <p:cSld>
+    <p:spTree>
+      <p:nvGrpSpPr>
         <p:cNvPr id="1" name=""/>
         <p:cNvGrpSpPr/>
         <p:nvPr/>
@@ -6629,7 +10356,15 @@
             </a:r>
             <a:r>
               <a:rPr lang="en-US" sz="2000" dirty="0"/>
-              <a:t> of these abstractions can be easily correlated with underlying functionalities (OPS-REQ-STRENGTHEN-DM, OPS-REQ-INTEGRATION)</a:t>
+              <a:t> of these abstractions can be easily correlated with underlying functionalities (</a:t>
+            </a:r>
+            <a:r>
+              <a:rPr lang="en-US" sz="2000" i="1" dirty="0"/>
+              <a:t>OPS-REQ-STRENGTHEN-DM, OPS-REQ-INTEGRATION</a:t>
+            </a:r>
+            <a:r>
+              <a:rPr lang="en-US" sz="2000" dirty="0"/>
+              <a:t>)</a:t>
             </a:r>
           </a:p>
           <a:p>
@@ -6651,7 +10386,15 @@
             </a:r>
             <a:r>
               <a:rPr lang="en-US" sz="2000" dirty="0"/>
-              <a:t>(OPS-REQ-QUICK-BUT-WELL, OPS-REQ-TIMELY-DM)</a:t>
+              <a:t>(</a:t>
+            </a:r>
+            <a:r>
+              <a:rPr lang="en-US" sz="2000" i="1" dirty="0"/>
+              <a:t>OPS-REQ-QUICK-BUT-WELL, OPS-REQ-TIMELY-DM</a:t>
+            </a:r>
+            <a:r>
+              <a:rPr lang="en-US" sz="2000" dirty="0"/>
+              <a:t>)</a:t>
             </a:r>
           </a:p>
           <a:p>
@@ -6673,7 +10416,15 @@
             </a:r>
             <a:r>
               <a:rPr lang="en-US" sz="2000" dirty="0"/>
-              <a:t>, not bells and whistles (OPS-REQ-ITERATE)</a:t>
+              <a:t>, not bells and whistles (</a:t>
+            </a:r>
+            <a:r>
+              <a:rPr lang="en-US" sz="2000" i="1" dirty="0"/>
+              <a:t>OPS-REQ-ITERATE</a:t>
+            </a:r>
+            <a:r>
+              <a:rPr lang="en-US" sz="2000" dirty="0"/>
+              <a:t>)</a:t>
             </a:r>
           </a:p>
           <a:p>
@@ -6695,7 +10446,15 @@
             </a:r>
             <a:r>
               <a:rPr lang="en-US" sz="2000" dirty="0"/>
-              <a:t>while a specification is under development (OPS-REQ-READILY-IMPLEM, OPS-REQ-TOOLS)</a:t>
+              <a:t>while a specification is under development (</a:t>
+            </a:r>
+            <a:r>
+              <a:rPr lang="en-US" sz="2000" i="1" dirty="0"/>
+              <a:t>OPS-REQ-READILY-IMPLEM, OPS-REQ-TOOLS</a:t>
+            </a:r>
+            <a:r>
+              <a:rPr lang="en-US" sz="2000" dirty="0"/>
+              <a:t>)</a:t>
             </a:r>
           </a:p>
           <a:p>
@@ -6739,7 +10498,11 @@
             </a:r>
             <a:r>
               <a:rPr lang="en-US" sz="2000" dirty="0"/>
-              <a:t>to validate features (OPS-REQ-GUIDE-AND-PROFILE)</a:t>
+              <a:t>to validate features (</a:t>
+            </a:r>
+            <a:r>
+              <a:rPr lang="en-US" sz="2000" i="1" dirty="0"/>
+              <a:t>OPS-REQ-GUIDE-AND-PROFILE)</a:t>
             </a:r>
           </a:p>
           <a:p>
@@ -6761,7 +10524,15 @@
             </a:r>
             <a:r>
               <a:rPr lang="en-US" sz="2000" dirty="0"/>
-              <a:t>learned from different means (OPS-REQ-REUSABILITY)</a:t>
+              <a:t>learned from different means (</a:t>
+            </a:r>
+            <a:r>
+              <a:rPr lang="en-US" sz="2000" i="1" dirty="0"/>
+              <a:t>OPS-REQ-REUSABILITY</a:t>
+            </a:r>
+            <a:r>
+              <a:rPr lang="en-US" sz="2000" dirty="0"/>
+              <a:t>)</a:t>
             </a:r>
           </a:p>
           <a:p>
@@ -6783,7 +10554,15 @@
             </a:r>
             <a:r>
               <a:rPr lang="en-US" sz="2000" dirty="0"/>
-              <a:t>into an operator’s environments (OPS-REQ-EASE-EXPOSURE, OPS-REQ-DM2API, OPS-REQ-INTEGRATION)</a:t>
+              <a:t>into an operator’s environments (</a:t>
+            </a:r>
+            <a:r>
+              <a:rPr lang="en-US" sz="2000" i="1" dirty="0"/>
+              <a:t>OPS-REQ-EASE-EXPOSURE, OPS-REQ-DM2API, OPS-REQ-INTEGRATION</a:t>
+            </a:r>
+            <a:r>
+              <a:rPr lang="en-US" sz="2000" dirty="0"/>
+              <a:t>)</a:t>
             </a:r>
           </a:p>
           <a:p>
@@ -6817,7 +10596,15 @@
             </a:r>
             <a:r>
               <a:rPr lang="en-US" sz="2000" dirty="0"/>
-              <a:t> (OPS-REQ-BRIDGE)</a:t>
+              <a:t> (</a:t>
+            </a:r>
+            <a:r>
+              <a:rPr lang="en-US" sz="2000" i="1" dirty="0"/>
+              <a:t>OPS-REQ-BRIDGE</a:t>
+            </a:r>
+            <a:r>
+              <a:rPr lang="en-US" sz="2000" dirty="0"/>
+              <a:t>)</a:t>
             </a:r>
           </a:p>
           <a:p>
@@ -6863,7 +10650,7 @@
               <a:pPr>
                 <a:defRPr/>
               </a:pPr>
-              <a:t>3</a:t>
+              <a:t>5</a:t>
             </a:fld>
             <a:endParaRPr lang="en-US" dirty="0"/>
           </a:p>
@@ -6882,7 +10669,7 @@
 </p:sld>
 </file>
 
-<file path=ppt/slides/slide4.xml><?xml version="1.0" encoding="utf-8"?>
+<file path=ppt/slides/slide6.xml><?xml version="1.0" encoding="utf-8"?>
 <p:sld xmlns:a="http://schemas.openxmlformats.org/drawingml/2006/main" xmlns:r="http://schemas.openxmlformats.org/officeDocument/2006/relationships" xmlns:p="http://schemas.openxmlformats.org/presentationml/2006/main">
   <p:cSld>
     <p:spTree>
@@ -11978,7 +15765,7 @@
           <a:p>
             <a:r>
               <a:rPr lang="en-US" dirty="0"/>
-              <a:t>Consolidated List</a:t>
+              <a:t>Consolidated List </a:t>
             </a:r>
             <a:endParaRPr lang="fr-FR" dirty="0"/>
           </a:p>
@@ -12274,7 +16061,7 @@
               <a:pPr>
                 <a:defRPr/>
               </a:pPr>
-              <a:t>4</a:t>
+              <a:t>6</a:t>
             </a:fld>
             <a:endParaRPr lang="en-US" dirty="0"/>
           </a:p>
@@ -12290,10 +16077,353 @@
   <p:clrMapOvr>
     <a:masterClrMapping/>
   </p:clrMapOvr>
+  <p:timing>
+    <p:tnLst>
+      <p:par>
+        <p:cTn id="1" dur="indefinite" restart="never" nodeType="tmRoot">
+          <p:childTnLst>
+            <p:seq concurrent="1" nextAc="seek">
+              <p:cTn id="2" dur="indefinite" nodeType="mainSeq">
+                <p:childTnLst>
+                  <p:par>
+                    <p:cTn id="3" fill="hold">
+                      <p:stCondLst>
+                        <p:cond delay="indefinite"/>
+                      </p:stCondLst>
+                      <p:childTnLst>
+                        <p:par>
+                          <p:cTn id="4" fill="hold">
+                            <p:stCondLst>
+                              <p:cond delay="0"/>
+                            </p:stCondLst>
+                            <p:childTnLst>
+                              <p:par>
+                                <p:cTn id="5" presetID="1" presetClass="entr" presetSubtype="0" fill="hold" nodeType="clickEffect">
+                                  <p:stCondLst>
+                                    <p:cond delay="0"/>
+                                  </p:stCondLst>
+                                  <p:childTnLst>
+                                    <p:set>
+                                      <p:cBhvr>
+                                        <p:cTn id="6" dur="1" fill="hold">
+                                          <p:stCondLst>
+                                            <p:cond delay="0"/>
+                                          </p:stCondLst>
+                                        </p:cTn>
+                                        <p:tgtEl>
+                                          <p:spTgt spid="20"/>
+                                        </p:tgtEl>
+                                        <p:attrNameLst>
+                                          <p:attrName>style.visibility</p:attrName>
+                                        </p:attrNameLst>
+                                      </p:cBhvr>
+                                      <p:to>
+                                        <p:strVal val="visible"/>
+                                      </p:to>
+                                    </p:set>
+                                  </p:childTnLst>
+                                </p:cTn>
+                              </p:par>
+                            </p:childTnLst>
+                          </p:cTn>
+                        </p:par>
+                      </p:childTnLst>
+                    </p:cTn>
+                  </p:par>
+                  <p:par>
+                    <p:cTn id="7" fill="hold">
+                      <p:stCondLst>
+                        <p:cond delay="indefinite"/>
+                      </p:stCondLst>
+                      <p:childTnLst>
+                        <p:par>
+                          <p:cTn id="8" fill="hold">
+                            <p:stCondLst>
+                              <p:cond delay="0"/>
+                            </p:stCondLst>
+                            <p:childTnLst>
+                              <p:par>
+                                <p:cTn id="9" presetID="1" presetClass="entr" presetSubtype="0" fill="hold" nodeType="clickEffect">
+                                  <p:stCondLst>
+                                    <p:cond delay="0"/>
+                                  </p:stCondLst>
+                                  <p:childTnLst>
+                                    <p:set>
+                                      <p:cBhvr>
+                                        <p:cTn id="10" dur="1" fill="hold">
+                                          <p:stCondLst>
+                                            <p:cond delay="0"/>
+                                          </p:stCondLst>
+                                        </p:cTn>
+                                        <p:tgtEl>
+                                          <p:spTgt spid="21"/>
+                                        </p:tgtEl>
+                                        <p:attrNameLst>
+                                          <p:attrName>style.visibility</p:attrName>
+                                        </p:attrNameLst>
+                                      </p:cBhvr>
+                                      <p:to>
+                                        <p:strVal val="visible"/>
+                                      </p:to>
+                                    </p:set>
+                                  </p:childTnLst>
+                                </p:cTn>
+                              </p:par>
+                            </p:childTnLst>
+                          </p:cTn>
+                        </p:par>
+                      </p:childTnLst>
+                    </p:cTn>
+                  </p:par>
+                  <p:par>
+                    <p:cTn id="11" fill="hold">
+                      <p:stCondLst>
+                        <p:cond delay="indefinite"/>
+                      </p:stCondLst>
+                      <p:childTnLst>
+                        <p:par>
+                          <p:cTn id="12" fill="hold">
+                            <p:stCondLst>
+                              <p:cond delay="0"/>
+                            </p:stCondLst>
+                            <p:childTnLst>
+                              <p:par>
+                                <p:cTn id="13" presetID="1" presetClass="entr" presetSubtype="0" fill="hold" nodeType="clickEffect">
+                                  <p:stCondLst>
+                                    <p:cond delay="0"/>
+                                  </p:stCondLst>
+                                  <p:childTnLst>
+                                    <p:set>
+                                      <p:cBhvr>
+                                        <p:cTn id="14" dur="1" fill="hold">
+                                          <p:stCondLst>
+                                            <p:cond delay="0"/>
+                                          </p:stCondLst>
+                                        </p:cTn>
+                                        <p:tgtEl>
+                                          <p:spTgt spid="22"/>
+                                        </p:tgtEl>
+                                        <p:attrNameLst>
+                                          <p:attrName>style.visibility</p:attrName>
+                                        </p:attrNameLst>
+                                      </p:cBhvr>
+                                      <p:to>
+                                        <p:strVal val="visible"/>
+                                      </p:to>
+                                    </p:set>
+                                  </p:childTnLst>
+                                </p:cTn>
+                              </p:par>
+                            </p:childTnLst>
+                          </p:cTn>
+                        </p:par>
+                      </p:childTnLst>
+                    </p:cTn>
+                  </p:par>
+                  <p:par>
+                    <p:cTn id="15" fill="hold">
+                      <p:stCondLst>
+                        <p:cond delay="indefinite"/>
+                      </p:stCondLst>
+                      <p:childTnLst>
+                        <p:par>
+                          <p:cTn id="16" fill="hold">
+                            <p:stCondLst>
+                              <p:cond delay="0"/>
+                            </p:stCondLst>
+                            <p:childTnLst>
+                              <p:par>
+                                <p:cTn id="17" presetID="1" presetClass="entr" presetSubtype="0" fill="hold" grpId="0" nodeType="clickEffect">
+                                  <p:stCondLst>
+                                    <p:cond delay="0"/>
+                                  </p:stCondLst>
+                                  <p:childTnLst>
+                                    <p:set>
+                                      <p:cBhvr>
+                                        <p:cTn id="18" dur="1" fill="hold">
+                                          <p:stCondLst>
+                                            <p:cond delay="0"/>
+                                          </p:stCondLst>
+                                        </p:cTn>
+                                        <p:tgtEl>
+                                          <p:spTgt spid="16"/>
+                                        </p:tgtEl>
+                                        <p:attrNameLst>
+                                          <p:attrName>style.visibility</p:attrName>
+                                        </p:attrNameLst>
+                                      </p:cBhvr>
+                                      <p:to>
+                                        <p:strVal val="visible"/>
+                                      </p:to>
+                                    </p:set>
+                                  </p:childTnLst>
+                                </p:cTn>
+                              </p:par>
+                              <p:par>
+                                <p:cTn id="19" presetID="1" presetClass="entr" presetSubtype="0" fill="hold" grpId="0" nodeType="withEffect">
+                                  <p:stCondLst>
+                                    <p:cond delay="0"/>
+                                  </p:stCondLst>
+                                  <p:childTnLst>
+                                    <p:set>
+                                      <p:cBhvr>
+                                        <p:cTn id="20" dur="1" fill="hold">
+                                          <p:stCondLst>
+                                            <p:cond delay="0"/>
+                                          </p:stCondLst>
+                                        </p:cTn>
+                                        <p:tgtEl>
+                                          <p:spTgt spid="13"/>
+                                        </p:tgtEl>
+                                        <p:attrNameLst>
+                                          <p:attrName>style.visibility</p:attrName>
+                                        </p:attrNameLst>
+                                      </p:cBhvr>
+                                      <p:to>
+                                        <p:strVal val="visible"/>
+                                      </p:to>
+                                    </p:set>
+                                  </p:childTnLst>
+                                </p:cTn>
+                              </p:par>
+                              <p:par>
+                                <p:cTn id="21" presetID="1" presetClass="entr" presetSubtype="0" fill="hold" grpId="0" nodeType="withEffect">
+                                  <p:stCondLst>
+                                    <p:cond delay="0"/>
+                                  </p:stCondLst>
+                                  <p:childTnLst>
+                                    <p:set>
+                                      <p:cBhvr>
+                                        <p:cTn id="22" dur="1" fill="hold">
+                                          <p:stCondLst>
+                                            <p:cond delay="0"/>
+                                          </p:stCondLst>
+                                        </p:cTn>
+                                        <p:tgtEl>
+                                          <p:spTgt spid="6"/>
+                                        </p:tgtEl>
+                                        <p:attrNameLst>
+                                          <p:attrName>style.visibility</p:attrName>
+                                        </p:attrNameLst>
+                                      </p:cBhvr>
+                                      <p:to>
+                                        <p:strVal val="visible"/>
+                                      </p:to>
+                                    </p:set>
+                                  </p:childTnLst>
+                                </p:cTn>
+                              </p:par>
+                            </p:childTnLst>
+                          </p:cTn>
+                        </p:par>
+                      </p:childTnLst>
+                    </p:cTn>
+                  </p:par>
+                  <p:par>
+                    <p:cTn id="23" fill="hold">
+                      <p:stCondLst>
+                        <p:cond delay="indefinite"/>
+                      </p:stCondLst>
+                      <p:childTnLst>
+                        <p:par>
+                          <p:cTn id="24" fill="hold">
+                            <p:stCondLst>
+                              <p:cond delay="0"/>
+                            </p:stCondLst>
+                            <p:childTnLst>
+                              <p:par>
+                                <p:cTn id="25" presetID="1" presetClass="entr" presetSubtype="0" fill="hold" grpId="0" nodeType="clickEffect">
+                                  <p:stCondLst>
+                                    <p:cond delay="0"/>
+                                  </p:stCondLst>
+                                  <p:childTnLst>
+                                    <p:set>
+                                      <p:cBhvr>
+                                        <p:cTn id="26" dur="1" fill="hold">
+                                          <p:stCondLst>
+                                            <p:cond delay="0"/>
+                                          </p:stCondLst>
+                                        </p:cTn>
+                                        <p:tgtEl>
+                                          <p:spTgt spid="17"/>
+                                        </p:tgtEl>
+                                        <p:attrNameLst>
+                                          <p:attrName>style.visibility</p:attrName>
+                                        </p:attrNameLst>
+                                      </p:cBhvr>
+                                      <p:to>
+                                        <p:strVal val="visible"/>
+                                      </p:to>
+                                    </p:set>
+                                  </p:childTnLst>
+                                </p:cTn>
+                              </p:par>
+                              <p:par>
+                                <p:cTn id="27" presetID="1" presetClass="entr" presetSubtype="0" fill="hold" grpId="0" nodeType="withEffect">
+                                  <p:stCondLst>
+                                    <p:cond delay="0"/>
+                                  </p:stCondLst>
+                                  <p:childTnLst>
+                                    <p:set>
+                                      <p:cBhvr>
+                                        <p:cTn id="28" dur="1" fill="hold">
+                                          <p:stCondLst>
+                                            <p:cond delay="0"/>
+                                          </p:stCondLst>
+                                        </p:cTn>
+                                        <p:tgtEl>
+                                          <p:spTgt spid="19"/>
+                                        </p:tgtEl>
+                                        <p:attrNameLst>
+                                          <p:attrName>style.visibility</p:attrName>
+                                        </p:attrNameLst>
+                                      </p:cBhvr>
+                                      <p:to>
+                                        <p:strVal val="visible"/>
+                                      </p:to>
+                                    </p:set>
+                                  </p:childTnLst>
+                                </p:cTn>
+                              </p:par>
+                            </p:childTnLst>
+                          </p:cTn>
+                        </p:par>
+                      </p:childTnLst>
+                    </p:cTn>
+                  </p:par>
+                </p:childTnLst>
+              </p:cTn>
+              <p:prevCondLst>
+                <p:cond evt="onPrev" delay="0">
+                  <p:tgtEl>
+                    <p:sldTgt/>
+                  </p:tgtEl>
+                </p:cond>
+              </p:prevCondLst>
+              <p:nextCondLst>
+                <p:cond evt="onNext" delay="0">
+                  <p:tgtEl>
+                    <p:sldTgt/>
+                  </p:tgtEl>
+                </p:cond>
+              </p:nextCondLst>
+            </p:seq>
+          </p:childTnLst>
+        </p:cTn>
+      </p:par>
+    </p:tnLst>
+    <p:bldLst>
+      <p:bldP spid="16" grpId="0" animBg="1"/>
+      <p:bldP spid="13" grpId="0" animBg="1"/>
+      <p:bldP spid="17" grpId="0" animBg="1"/>
+      <p:bldP spid="19" grpId="0" animBg="1"/>
+      <p:bldP spid="6" grpId="0"/>
+    </p:bldLst>
+  </p:timing>
 </p:sld>
 </file>
 
-<file path=ppt/slides/slide5.xml><?xml version="1.0" encoding="utf-8"?>
+<file path=ppt/slides/slide7.xml><?xml version="1.0" encoding="utf-8"?>
 <p:sld xmlns:a="http://schemas.openxmlformats.org/drawingml/2006/main" xmlns:r="http://schemas.openxmlformats.org/officeDocument/2006/relationships" xmlns:p="http://schemas.openxmlformats.org/presentationml/2006/main">
   <p:cSld>
     <p:spTree>
@@ -12333,7 +16463,15 @@
           <a:p>
             <a:r>
               <a:rPr lang="fr-FR" dirty="0"/>
-              <a:t>Open Discussion</a:t>
+              <a:t>Open Discussion (</a:t>
+            </a:r>
+            <a:r>
+              <a:rPr lang="fr-FR" dirty="0" err="1"/>
+              <a:t>depends</a:t>
+            </a:r>
+            <a:r>
+              <a:rPr lang="fr-FR" dirty="0"/>
+              <a:t> #1)</a:t>
             </a:r>
           </a:p>
         </p:txBody>
@@ -12360,25 +16498,55 @@
           <a:lstStyle/>
           <a:p>
             <a:r>
-              <a:rPr lang="en-US" noProof="0"/>
+              <a:rPr lang="en-US" sz="3200" b="1" dirty="0">
+                <a:solidFill>
+                  <a:srgbClr val="00B0F0"/>
+                </a:solidFill>
+              </a:rPr>
+              <a:t>Q#2</a:t>
+            </a:r>
+            <a:r>
+              <a:rPr lang="en-US" sz="3200" dirty="0"/>
+              <a:t>: </a:t>
+            </a:r>
+            <a:r>
+              <a:rPr lang="en-US" sz="3200" noProof="0" dirty="0"/>
               <a:t>Should the consolidated list be further trimmed?</a:t>
             </a:r>
           </a:p>
           <a:p>
-            <a:endParaRPr lang="en-US" noProof="0" dirty="0"/>
-          </a:p>
-          <a:p>
-            <a:r>
-              <a:rPr lang="en-US" noProof="0" dirty="0"/>
+            <a:r>
+              <a:rPr lang="en-US" sz="3200" b="1" dirty="0">
+                <a:solidFill>
+                  <a:srgbClr val="00B0F0"/>
+                </a:solidFill>
+              </a:rPr>
+              <a:t>Q#3</a:t>
+            </a:r>
+            <a:r>
+              <a:rPr lang="en-US" sz="3200" dirty="0"/>
+              <a:t>: </a:t>
+            </a:r>
+            <a:r>
+              <a:rPr lang="en-US" sz="3200" noProof="0" dirty="0"/>
               <a:t>Should the list be ordered?</a:t>
             </a:r>
           </a:p>
           <a:p>
-            <a:endParaRPr lang="en-US" noProof="0" dirty="0"/>
-          </a:p>
-          <a:p>
-            <a:r>
-              <a:rPr lang="en-US" noProof="0" dirty="0"/>
+            <a:r>
+              <a:rPr lang="en-US" sz="3200" b="1" dirty="0">
+                <a:solidFill>
+                  <a:srgbClr val="00B0F0"/>
+                </a:solidFill>
+              </a:rPr>
+              <a:t>Q#4</a:t>
+            </a:r>
+            <a:r>
+              <a:rPr lang="en-US" sz="3200" dirty="0"/>
+              <a:t>: </a:t>
+            </a:r>
+            <a:r>
+              <a:rPr lang="en-US" sz="3200" noProof="0" dirty="0"/>
               <a:t>Is there any missing important recommendations?</a:t>
             </a:r>
           </a:p>
@@ -12413,7 +16581,7 @@
               <a:pPr>
                 <a:defRPr/>
               </a:pPr>
-              <a:t>5</a:t>
+              <a:t>7</a:t>
             </a:fld>
             <a:endParaRPr lang="en-US" dirty="0"/>
           </a:p>
